--- a/Lecture slides/AMOS B04 - Agile Planning.pptx
+++ b/Lecture slides/AMOS B04 - Agile Planning.pptx
@@ -2,74 +2,75 @@
 <file path=ppt/presentation.xml><?xml version="1.0" encoding="utf-8"?>
 <p:presentation xmlns:a="http://schemas.openxmlformats.org/drawingml/2006/main" xmlns:r="http://schemas.openxmlformats.org/officeDocument/2006/relationships" xmlns:mc="http://schemas.openxmlformats.org/markup-compatibility/2006" xmlns:mv="urn:schemas-microsoft-com:mac:vml" xmlns:p="http://schemas.openxmlformats.org/presentationml/2006/main" xmlns:c="http://schemas.openxmlformats.org/drawingml/2006/chart" xmlns:dgm="http://schemas.openxmlformats.org/drawingml/2006/diagram" xmlns:o="urn:schemas-microsoft-com:office:office" xmlns:v="urn:schemas-microsoft-com:vml" xmlns:pvml="urn:schemas-microsoft-com:office:powerpoint" xmlns:com="http://schemas.openxmlformats.org/drawingml/2006/compatibility" xmlns:p14="http://schemas.microsoft.com/office/powerpoint/2010/main" xmlns:p15="http://schemas.microsoft.com/office/powerpoint/2012/main" xmlns:ahyp="http://schemas.microsoft.com/office/drawing/2018/hyperlinkcolor" autoCompressPictures="0" strictFirstAndLastChars="0" saveSubsetFonts="1" showSpecialPlsOnTitleSld="0">
   <p:sldMasterIdLst>
-    <p:sldMasterId id="2147483654" r:id="rId5"/>
+    <p:sldMasterId id="2147483660" r:id="rId5"/>
+    <p:sldMasterId id="2147483661" r:id="rId6"/>
   </p:sldMasterIdLst>
   <p:notesMasterIdLst>
-    <p:notesMasterId r:id="rId6"/>
+    <p:notesMasterId r:id="rId7"/>
   </p:notesMasterIdLst>
   <p:sldIdLst>
-    <p:sldId id="256" r:id="rId7"/>
-    <p:sldId id="257" r:id="rId8"/>
-    <p:sldId id="258" r:id="rId9"/>
-    <p:sldId id="259" r:id="rId10"/>
-    <p:sldId id="260" r:id="rId11"/>
-    <p:sldId id="261" r:id="rId12"/>
-    <p:sldId id="262" r:id="rId13"/>
-    <p:sldId id="263" r:id="rId14"/>
-    <p:sldId id="264" r:id="rId15"/>
-    <p:sldId id="265" r:id="rId16"/>
-    <p:sldId id="266" r:id="rId17"/>
-    <p:sldId id="267" r:id="rId18"/>
-    <p:sldId id="268" r:id="rId19"/>
-    <p:sldId id="269" r:id="rId20"/>
-    <p:sldId id="270" r:id="rId21"/>
-    <p:sldId id="271" r:id="rId22"/>
-    <p:sldId id="272" r:id="rId23"/>
-    <p:sldId id="273" r:id="rId24"/>
-    <p:sldId id="274" r:id="rId25"/>
-    <p:sldId id="275" r:id="rId26"/>
-    <p:sldId id="276" r:id="rId27"/>
-    <p:sldId id="277" r:id="rId28"/>
-    <p:sldId id="278" r:id="rId29"/>
-    <p:sldId id="279" r:id="rId30"/>
-    <p:sldId id="280" r:id="rId31"/>
-    <p:sldId id="281" r:id="rId32"/>
-    <p:sldId id="282" r:id="rId33"/>
-    <p:sldId id="283" r:id="rId34"/>
-    <p:sldId id="284" r:id="rId35"/>
-    <p:sldId id="285" r:id="rId36"/>
-    <p:sldId id="286" r:id="rId37"/>
-    <p:sldId id="287" r:id="rId38"/>
-    <p:sldId id="288" r:id="rId39"/>
-    <p:sldId id="289" r:id="rId40"/>
-    <p:sldId id="290" r:id="rId41"/>
-    <p:sldId id="291" r:id="rId42"/>
-    <p:sldId id="292" r:id="rId43"/>
-    <p:sldId id="293" r:id="rId44"/>
-    <p:sldId id="294" r:id="rId45"/>
-    <p:sldId id="295" r:id="rId46"/>
-    <p:sldId id="296" r:id="rId47"/>
-    <p:sldId id="297" r:id="rId48"/>
-    <p:sldId id="298" r:id="rId49"/>
-    <p:sldId id="299" r:id="rId50"/>
-    <p:sldId id="300" r:id="rId51"/>
-    <p:sldId id="301" r:id="rId52"/>
-    <p:sldId id="302" r:id="rId53"/>
-    <p:sldId id="303" r:id="rId54"/>
-    <p:sldId id="304" r:id="rId55"/>
-    <p:sldId id="305" r:id="rId56"/>
-    <p:sldId id="306" r:id="rId57"/>
-    <p:sldId id="307" r:id="rId58"/>
-    <p:sldId id="308" r:id="rId59"/>
-    <p:sldId id="309" r:id="rId60"/>
-    <p:sldId id="310" r:id="rId61"/>
-    <p:sldId id="311" r:id="rId62"/>
-    <p:sldId id="312" r:id="rId63"/>
-    <p:sldId id="313" r:id="rId64"/>
-    <p:sldId id="314" r:id="rId65"/>
-    <p:sldId id="315" r:id="rId66"/>
-    <p:sldId id="316" r:id="rId67"/>
-    <p:sldId id="317" r:id="rId68"/>
+    <p:sldId id="256" r:id="rId8"/>
+    <p:sldId id="257" r:id="rId9"/>
+    <p:sldId id="258" r:id="rId10"/>
+    <p:sldId id="259" r:id="rId11"/>
+    <p:sldId id="260" r:id="rId12"/>
+    <p:sldId id="261" r:id="rId13"/>
+    <p:sldId id="262" r:id="rId14"/>
+    <p:sldId id="263" r:id="rId15"/>
+    <p:sldId id="264" r:id="rId16"/>
+    <p:sldId id="265" r:id="rId17"/>
+    <p:sldId id="266" r:id="rId18"/>
+    <p:sldId id="267" r:id="rId19"/>
+    <p:sldId id="268" r:id="rId20"/>
+    <p:sldId id="269" r:id="rId21"/>
+    <p:sldId id="270" r:id="rId22"/>
+    <p:sldId id="271" r:id="rId23"/>
+    <p:sldId id="272" r:id="rId24"/>
+    <p:sldId id="273" r:id="rId25"/>
+    <p:sldId id="274" r:id="rId26"/>
+    <p:sldId id="275" r:id="rId27"/>
+    <p:sldId id="276" r:id="rId28"/>
+    <p:sldId id="277" r:id="rId29"/>
+    <p:sldId id="278" r:id="rId30"/>
+    <p:sldId id="279" r:id="rId31"/>
+    <p:sldId id="280" r:id="rId32"/>
+    <p:sldId id="281" r:id="rId33"/>
+    <p:sldId id="282" r:id="rId34"/>
+    <p:sldId id="283" r:id="rId35"/>
+    <p:sldId id="284" r:id="rId36"/>
+    <p:sldId id="285" r:id="rId37"/>
+    <p:sldId id="286" r:id="rId38"/>
+    <p:sldId id="287" r:id="rId39"/>
+    <p:sldId id="288" r:id="rId40"/>
+    <p:sldId id="289" r:id="rId41"/>
+    <p:sldId id="290" r:id="rId42"/>
+    <p:sldId id="291" r:id="rId43"/>
+    <p:sldId id="292" r:id="rId44"/>
+    <p:sldId id="293" r:id="rId45"/>
+    <p:sldId id="294" r:id="rId46"/>
+    <p:sldId id="295" r:id="rId47"/>
+    <p:sldId id="296" r:id="rId48"/>
+    <p:sldId id="297" r:id="rId49"/>
+    <p:sldId id="298" r:id="rId50"/>
+    <p:sldId id="299" r:id="rId51"/>
+    <p:sldId id="300" r:id="rId52"/>
+    <p:sldId id="301" r:id="rId53"/>
+    <p:sldId id="302" r:id="rId54"/>
+    <p:sldId id="303" r:id="rId55"/>
+    <p:sldId id="304" r:id="rId56"/>
+    <p:sldId id="305" r:id="rId57"/>
+    <p:sldId id="306" r:id="rId58"/>
+    <p:sldId id="307" r:id="rId59"/>
+    <p:sldId id="308" r:id="rId60"/>
+    <p:sldId id="309" r:id="rId61"/>
+    <p:sldId id="310" r:id="rId62"/>
+    <p:sldId id="311" r:id="rId63"/>
+    <p:sldId id="312" r:id="rId64"/>
+    <p:sldId id="313" r:id="rId65"/>
+    <p:sldId id="314" r:id="rId66"/>
+    <p:sldId id="315" r:id="rId67"/>
+    <p:sldId id="316" r:id="rId68"/>
+    <p:sldId id="317" r:id="rId69"/>
   </p:sldIdLst>
   <p:sldSz cy="5143500" cx="9144000"/>
   <p:notesSz cx="6858000" cy="9144000"/>
@@ -752,7 +753,7 @@
   <p:cSld>
     <p:spTree>
       <p:nvGrpSpPr>
-        <p:cNvPr id="47" name="Shape 47"/>
+        <p:cNvPr id="89" name="Shape 89"/>
         <p:cNvGrpSpPr/>
         <p:nvPr/>
       </p:nvGrpSpPr>
@@ -766,7 +767,7 @@
       </p:grpSpPr>
       <p:sp>
         <p:nvSpPr>
-          <p:cNvPr id="48" name="Google Shape;48;g2cd8abd02ba_0_122:notes"/>
+          <p:cNvPr id="90" name="Google Shape;90;g2cd8abd02ba_0_122:notes"/>
           <p:cNvSpPr/>
           <p:nvPr>
             <p:ph idx="2" type="sldImg"/>
@@ -801,7 +802,7 @@
       </p:sp>
       <p:sp>
         <p:nvSpPr>
-          <p:cNvPr id="49" name="Google Shape;49;g2cd8abd02ba_0_122:notes"/>
+          <p:cNvPr id="91" name="Google Shape;91;g2cd8abd02ba_0_122:notes"/>
           <p:cNvSpPr txBox="1"/>
           <p:nvPr>
             <p:ph idx="1" type="body"/>
@@ -851,7 +852,7 @@
   <p:cSld>
     <p:spTree>
       <p:nvGrpSpPr>
-        <p:cNvPr id="110" name="Shape 110"/>
+        <p:cNvPr id="152" name="Shape 152"/>
         <p:cNvGrpSpPr/>
         <p:nvPr/>
       </p:nvGrpSpPr>
@@ -865,7 +866,7 @@
       </p:grpSpPr>
       <p:sp>
         <p:nvSpPr>
-          <p:cNvPr id="111" name="Google Shape;111;g152a3f74d0d_0_34:notes"/>
+          <p:cNvPr id="153" name="Google Shape;153;g152a3f74d0d_0_34:notes"/>
           <p:cNvSpPr/>
           <p:nvPr>
             <p:ph idx="2" type="sldImg"/>
@@ -900,7 +901,7 @@
       </p:sp>
       <p:sp>
         <p:nvSpPr>
-          <p:cNvPr id="112" name="Google Shape;112;g152a3f74d0d_0_34:notes"/>
+          <p:cNvPr id="154" name="Google Shape;154;g152a3f74d0d_0_34:notes"/>
           <p:cNvSpPr txBox="1"/>
           <p:nvPr>
             <p:ph idx="1" type="body"/>
@@ -950,7 +951,7 @@
   <p:cSld>
     <p:spTree>
       <p:nvGrpSpPr>
-        <p:cNvPr id="115" name="Shape 115"/>
+        <p:cNvPr id="157" name="Shape 157"/>
         <p:cNvGrpSpPr/>
         <p:nvPr/>
       </p:nvGrpSpPr>
@@ -964,7 +965,7 @@
       </p:grpSpPr>
       <p:sp>
         <p:nvSpPr>
-          <p:cNvPr id="116" name="Google Shape;116;g22d0a57d65a_0_84:notes"/>
+          <p:cNvPr id="158" name="Google Shape;158;g22d0a57d65a_0_84:notes"/>
           <p:cNvSpPr/>
           <p:nvPr>
             <p:ph idx="2" type="sldImg"/>
@@ -999,7 +1000,7 @@
       </p:sp>
       <p:sp>
         <p:nvSpPr>
-          <p:cNvPr id="117" name="Google Shape;117;g22d0a57d65a_0_84:notes"/>
+          <p:cNvPr id="159" name="Google Shape;159;g22d0a57d65a_0_84:notes"/>
           <p:cNvSpPr txBox="1"/>
           <p:nvPr>
             <p:ph idx="1" type="body"/>
@@ -1049,7 +1050,7 @@
   <p:cSld>
     <p:spTree>
       <p:nvGrpSpPr>
-        <p:cNvPr id="122" name="Shape 122"/>
+        <p:cNvPr id="164" name="Shape 164"/>
         <p:cNvGrpSpPr/>
         <p:nvPr/>
       </p:nvGrpSpPr>
@@ -1063,7 +1064,7 @@
       </p:grpSpPr>
       <p:sp>
         <p:nvSpPr>
-          <p:cNvPr id="123" name="Google Shape;123;g22d0a57d65a_0_90:notes"/>
+          <p:cNvPr id="165" name="Google Shape;165;g22d0a57d65a_0_90:notes"/>
           <p:cNvSpPr/>
           <p:nvPr>
             <p:ph idx="2" type="sldImg"/>
@@ -1098,7 +1099,7 @@
       </p:sp>
       <p:sp>
         <p:nvSpPr>
-          <p:cNvPr id="124" name="Google Shape;124;g22d0a57d65a_0_90:notes"/>
+          <p:cNvPr id="166" name="Google Shape;166;g22d0a57d65a_0_90:notes"/>
           <p:cNvSpPr txBox="1"/>
           <p:nvPr>
             <p:ph idx="1" type="body"/>
@@ -1148,7 +1149,7 @@
   <p:cSld>
     <p:spTree>
       <p:nvGrpSpPr>
-        <p:cNvPr id="129" name="Shape 129"/>
+        <p:cNvPr id="171" name="Shape 171"/>
         <p:cNvGrpSpPr/>
         <p:nvPr/>
       </p:nvGrpSpPr>
@@ -1162,7 +1163,7 @@
       </p:grpSpPr>
       <p:sp>
         <p:nvSpPr>
-          <p:cNvPr id="130" name="Google Shape;130;g22d0a57d65a_0_98:notes"/>
+          <p:cNvPr id="172" name="Google Shape;172;g22d0a57d65a_0_98:notes"/>
           <p:cNvSpPr/>
           <p:nvPr>
             <p:ph idx="2" type="sldImg"/>
@@ -1197,7 +1198,7 @@
       </p:sp>
       <p:sp>
         <p:nvSpPr>
-          <p:cNvPr id="131" name="Google Shape;131;g22d0a57d65a_0_98:notes"/>
+          <p:cNvPr id="173" name="Google Shape;173;g22d0a57d65a_0_98:notes"/>
           <p:cNvSpPr txBox="1"/>
           <p:nvPr>
             <p:ph idx="1" type="body"/>
@@ -1247,7 +1248,7 @@
   <p:cSld>
     <p:spTree>
       <p:nvGrpSpPr>
-        <p:cNvPr id="136" name="Shape 136"/>
+        <p:cNvPr id="179" name="Shape 179"/>
         <p:cNvGrpSpPr/>
         <p:nvPr/>
       </p:nvGrpSpPr>
@@ -1261,7 +1262,7 @@
       </p:grpSpPr>
       <p:sp>
         <p:nvSpPr>
-          <p:cNvPr id="137" name="Google Shape;137;g22d0a57d65a_0_129:notes"/>
+          <p:cNvPr id="180" name="Google Shape;180;g22d0a57d65a_0_129:notes"/>
           <p:cNvSpPr/>
           <p:nvPr>
             <p:ph idx="2" type="sldImg"/>
@@ -1296,7 +1297,7 @@
       </p:sp>
       <p:sp>
         <p:nvSpPr>
-          <p:cNvPr id="138" name="Google Shape;138;g22d0a57d65a_0_129:notes"/>
+          <p:cNvPr id="181" name="Google Shape;181;g22d0a57d65a_0_129:notes"/>
           <p:cNvSpPr txBox="1"/>
           <p:nvPr>
             <p:ph idx="1" type="body"/>
@@ -1346,7 +1347,7 @@
   <p:cSld>
     <p:spTree>
       <p:nvGrpSpPr>
-        <p:cNvPr id="143" name="Shape 143"/>
+        <p:cNvPr id="186" name="Shape 186"/>
         <p:cNvGrpSpPr/>
         <p:nvPr/>
       </p:nvGrpSpPr>
@@ -1360,7 +1361,7 @@
       </p:grpSpPr>
       <p:sp>
         <p:nvSpPr>
-          <p:cNvPr id="144" name="Google Shape;144;g22d0a57d65a_0_4:notes"/>
+          <p:cNvPr id="187" name="Google Shape;187;g22d0a57d65a_0_4:notes"/>
           <p:cNvSpPr/>
           <p:nvPr>
             <p:ph idx="2" type="sldImg"/>
@@ -1395,7 +1396,7 @@
       </p:sp>
       <p:sp>
         <p:nvSpPr>
-          <p:cNvPr id="145" name="Google Shape;145;g22d0a57d65a_0_4:notes"/>
+          <p:cNvPr id="188" name="Google Shape;188;g22d0a57d65a_0_4:notes"/>
           <p:cNvSpPr txBox="1"/>
           <p:nvPr>
             <p:ph idx="1" type="body"/>
@@ -1445,7 +1446,7 @@
   <p:cSld>
     <p:spTree>
       <p:nvGrpSpPr>
-        <p:cNvPr id="148" name="Shape 148"/>
+        <p:cNvPr id="191" name="Shape 191"/>
         <p:cNvGrpSpPr/>
         <p:nvPr/>
       </p:nvGrpSpPr>
@@ -1459,7 +1460,7 @@
       </p:grpSpPr>
       <p:sp>
         <p:nvSpPr>
-          <p:cNvPr id="149" name="Google Shape;149;g22d0a57d65a_0_104:notes"/>
+          <p:cNvPr id="192" name="Google Shape;192;g22d0a57d65a_0_104:notes"/>
           <p:cNvSpPr/>
           <p:nvPr>
             <p:ph idx="2" type="sldImg"/>
@@ -1494,7 +1495,7 @@
       </p:sp>
       <p:sp>
         <p:nvSpPr>
-          <p:cNvPr id="150" name="Google Shape;150;g22d0a57d65a_0_104:notes"/>
+          <p:cNvPr id="193" name="Google Shape;193;g22d0a57d65a_0_104:notes"/>
           <p:cNvSpPr txBox="1"/>
           <p:nvPr>
             <p:ph idx="1" type="body"/>
@@ -1544,7 +1545,7 @@
   <p:cSld>
     <p:spTree>
       <p:nvGrpSpPr>
-        <p:cNvPr id="156" name="Shape 156"/>
+        <p:cNvPr id="199" name="Shape 199"/>
         <p:cNvGrpSpPr/>
         <p:nvPr/>
       </p:nvGrpSpPr>
@@ -1558,7 +1559,7 @@
       </p:grpSpPr>
       <p:sp>
         <p:nvSpPr>
-          <p:cNvPr id="157" name="Google Shape;157;g22d0a57d65a_0_110:notes"/>
+          <p:cNvPr id="200" name="Google Shape;200;g22d0a57d65a_0_110:notes"/>
           <p:cNvSpPr/>
           <p:nvPr>
             <p:ph idx="2" type="sldImg"/>
@@ -1593,7 +1594,7 @@
       </p:sp>
       <p:sp>
         <p:nvSpPr>
-          <p:cNvPr id="158" name="Google Shape;158;g22d0a57d65a_0_110:notes"/>
+          <p:cNvPr id="201" name="Google Shape;201;g22d0a57d65a_0_110:notes"/>
           <p:cNvSpPr txBox="1"/>
           <p:nvPr>
             <p:ph idx="1" type="body"/>
@@ -1643,7 +1644,7 @@
   <p:cSld>
     <p:spTree>
       <p:nvGrpSpPr>
-        <p:cNvPr id="163" name="Shape 163"/>
+        <p:cNvPr id="206" name="Shape 206"/>
         <p:cNvGrpSpPr/>
         <p:nvPr/>
       </p:nvGrpSpPr>
@@ -1657,7 +1658,7 @@
       </p:grpSpPr>
       <p:sp>
         <p:nvSpPr>
-          <p:cNvPr id="164" name="Google Shape;164;g22d0a57d65a_0_36:notes"/>
+          <p:cNvPr id="207" name="Google Shape;207;g22d0a57d65a_0_36:notes"/>
           <p:cNvSpPr/>
           <p:nvPr>
             <p:ph idx="2" type="sldImg"/>
@@ -1692,7 +1693,7 @@
       </p:sp>
       <p:sp>
         <p:nvSpPr>
-          <p:cNvPr id="165" name="Google Shape;165;g22d0a57d65a_0_36:notes"/>
+          <p:cNvPr id="208" name="Google Shape;208;g22d0a57d65a_0_36:notes"/>
           <p:cNvSpPr txBox="1"/>
           <p:nvPr>
             <p:ph idx="1" type="body"/>
@@ -1742,7 +1743,7 @@
   <p:cSld>
     <p:spTree>
       <p:nvGrpSpPr>
-        <p:cNvPr id="172" name="Shape 172"/>
+        <p:cNvPr id="215" name="Shape 215"/>
         <p:cNvGrpSpPr/>
         <p:nvPr/>
       </p:nvGrpSpPr>
@@ -1756,7 +1757,7 @@
       </p:grpSpPr>
       <p:sp>
         <p:nvSpPr>
-          <p:cNvPr id="173" name="Google Shape;173;g22d0a57d65a_0_119:notes"/>
+          <p:cNvPr id="216" name="Google Shape;216;g22d0a57d65a_0_119:notes"/>
           <p:cNvSpPr/>
           <p:nvPr>
             <p:ph idx="2" type="sldImg"/>
@@ -1791,7 +1792,7 @@
       </p:sp>
       <p:sp>
         <p:nvSpPr>
-          <p:cNvPr id="174" name="Google Shape;174;g22d0a57d65a_0_119:notes"/>
+          <p:cNvPr id="217" name="Google Shape;217;g22d0a57d65a_0_119:notes"/>
           <p:cNvSpPr txBox="1"/>
           <p:nvPr>
             <p:ph idx="1" type="body"/>
@@ -1841,7 +1842,7 @@
   <p:cSld>
     <p:spTree>
       <p:nvGrpSpPr>
-        <p:cNvPr id="53" name="Shape 53"/>
+        <p:cNvPr id="95" name="Shape 95"/>
         <p:cNvGrpSpPr/>
         <p:nvPr/>
       </p:nvGrpSpPr>
@@ -1855,7 +1856,7 @@
       </p:grpSpPr>
       <p:sp>
         <p:nvSpPr>
-          <p:cNvPr id="54" name="Google Shape;54;g267d90b4e96_0_0:notes"/>
+          <p:cNvPr id="96" name="Google Shape;96;g267d90b4e96_0_0:notes"/>
           <p:cNvSpPr/>
           <p:nvPr>
             <p:ph idx="2" type="sldImg"/>
@@ -1890,7 +1891,7 @@
       </p:sp>
       <p:sp>
         <p:nvSpPr>
-          <p:cNvPr id="55" name="Google Shape;55;g267d90b4e96_0_0:notes"/>
+          <p:cNvPr id="97" name="Google Shape;97;g267d90b4e96_0_0:notes"/>
           <p:cNvSpPr txBox="1"/>
           <p:nvPr>
             <p:ph idx="1" type="body"/>
@@ -1940,7 +1941,7 @@
   <p:cSld>
     <p:spTree>
       <p:nvGrpSpPr>
-        <p:cNvPr id="179" name="Shape 179"/>
+        <p:cNvPr id="222" name="Shape 222"/>
         <p:cNvGrpSpPr/>
         <p:nvPr/>
       </p:nvGrpSpPr>
@@ -1954,7 +1955,7 @@
       </p:grpSpPr>
       <p:sp>
         <p:nvSpPr>
-          <p:cNvPr id="180" name="Google Shape;180;g22d58330789_0_15:notes"/>
+          <p:cNvPr id="223" name="Google Shape;223;g22d58330789_0_15:notes"/>
           <p:cNvSpPr/>
           <p:nvPr>
             <p:ph idx="2" type="sldImg"/>
@@ -1989,7 +1990,7 @@
       </p:sp>
       <p:sp>
         <p:nvSpPr>
-          <p:cNvPr id="181" name="Google Shape;181;g22d58330789_0_15:notes"/>
+          <p:cNvPr id="224" name="Google Shape;224;g22d58330789_0_15:notes"/>
           <p:cNvSpPr txBox="1"/>
           <p:nvPr>
             <p:ph idx="1" type="body"/>
@@ -2039,7 +2040,7 @@
   <p:cSld>
     <p:spTree>
       <p:nvGrpSpPr>
-        <p:cNvPr id="186" name="Shape 186"/>
+        <p:cNvPr id="229" name="Shape 229"/>
         <p:cNvGrpSpPr/>
         <p:nvPr/>
       </p:nvGrpSpPr>
@@ -2053,7 +2054,7 @@
       </p:grpSpPr>
       <p:sp>
         <p:nvSpPr>
-          <p:cNvPr id="187" name="Google Shape;187;g22d0a57d65a_0_124:notes"/>
+          <p:cNvPr id="230" name="Google Shape;230;g22d0a57d65a_0_124:notes"/>
           <p:cNvSpPr/>
           <p:nvPr>
             <p:ph idx="2" type="sldImg"/>
@@ -2088,7 +2089,7 @@
       </p:sp>
       <p:sp>
         <p:nvSpPr>
-          <p:cNvPr id="188" name="Google Shape;188;g22d0a57d65a_0_124:notes"/>
+          <p:cNvPr id="231" name="Google Shape;231;g22d0a57d65a_0_124:notes"/>
           <p:cNvSpPr txBox="1"/>
           <p:nvPr>
             <p:ph idx="1" type="body"/>
@@ -2138,7 +2139,7 @@
   <p:cSld>
     <p:spTree>
       <p:nvGrpSpPr>
-        <p:cNvPr id="195" name="Shape 195"/>
+        <p:cNvPr id="238" name="Shape 238"/>
         <p:cNvGrpSpPr/>
         <p:nvPr/>
       </p:nvGrpSpPr>
@@ -2152,7 +2153,7 @@
       </p:grpSpPr>
       <p:sp>
         <p:nvSpPr>
-          <p:cNvPr id="196" name="Google Shape;196;g22d0a57d65a_0_44:notes"/>
+          <p:cNvPr id="239" name="Google Shape;239;g22d0a57d65a_0_44:notes"/>
           <p:cNvSpPr/>
           <p:nvPr>
             <p:ph idx="2" type="sldImg"/>
@@ -2187,7 +2188,7 @@
       </p:sp>
       <p:sp>
         <p:nvSpPr>
-          <p:cNvPr id="197" name="Google Shape;197;g22d0a57d65a_0_44:notes"/>
+          <p:cNvPr id="240" name="Google Shape;240;g22d0a57d65a_0_44:notes"/>
           <p:cNvSpPr txBox="1"/>
           <p:nvPr>
             <p:ph idx="1" type="body"/>
@@ -2237,7 +2238,7 @@
   <p:cSld>
     <p:spTree>
       <p:nvGrpSpPr>
-        <p:cNvPr id="202" name="Shape 202"/>
+        <p:cNvPr id="245" name="Shape 245"/>
         <p:cNvGrpSpPr/>
         <p:nvPr/>
       </p:nvGrpSpPr>
@@ -2251,7 +2252,7 @@
       </p:grpSpPr>
       <p:sp>
         <p:nvSpPr>
-          <p:cNvPr id="203" name="Google Shape;203;g22d58330789_0_78:notes"/>
+          <p:cNvPr id="246" name="Google Shape;246;g22d58330789_0_78:notes"/>
           <p:cNvSpPr/>
           <p:nvPr>
             <p:ph idx="2" type="sldImg"/>
@@ -2286,7 +2287,7 @@
       </p:sp>
       <p:sp>
         <p:nvSpPr>
-          <p:cNvPr id="204" name="Google Shape;204;g22d58330789_0_78:notes"/>
+          <p:cNvPr id="247" name="Google Shape;247;g22d58330789_0_78:notes"/>
           <p:cNvSpPr txBox="1"/>
           <p:nvPr>
             <p:ph idx="1" type="body"/>
@@ -2336,7 +2337,7 @@
   <p:cSld>
     <p:spTree>
       <p:nvGrpSpPr>
-        <p:cNvPr id="209" name="Shape 209"/>
+        <p:cNvPr id="252" name="Shape 252"/>
         <p:cNvGrpSpPr/>
         <p:nvPr/>
       </p:nvGrpSpPr>
@@ -2350,7 +2351,7 @@
       </p:grpSpPr>
       <p:sp>
         <p:nvSpPr>
-          <p:cNvPr id="210" name="Google Shape;210;g22d58330789_0_31:notes"/>
+          <p:cNvPr id="253" name="Google Shape;253;g22d58330789_0_31:notes"/>
           <p:cNvSpPr/>
           <p:nvPr>
             <p:ph idx="2" type="sldImg"/>
@@ -2385,7 +2386,7 @@
       </p:sp>
       <p:sp>
         <p:nvSpPr>
-          <p:cNvPr id="211" name="Google Shape;211;g22d58330789_0_31:notes"/>
+          <p:cNvPr id="254" name="Google Shape;254;g22d58330789_0_31:notes"/>
           <p:cNvSpPr txBox="1"/>
           <p:nvPr>
             <p:ph idx="1" type="body"/>
@@ -2435,7 +2436,7 @@
   <p:cSld>
     <p:spTree>
       <p:nvGrpSpPr>
-        <p:cNvPr id="216" name="Shape 216"/>
+        <p:cNvPr id="259" name="Shape 259"/>
         <p:cNvGrpSpPr/>
         <p:nvPr/>
       </p:nvGrpSpPr>
@@ -2449,7 +2450,7 @@
       </p:grpSpPr>
       <p:sp>
         <p:nvSpPr>
-          <p:cNvPr id="217" name="Google Shape;217;g22d58330789_0_37:notes"/>
+          <p:cNvPr id="260" name="Google Shape;260;g22d58330789_0_37:notes"/>
           <p:cNvSpPr/>
           <p:nvPr>
             <p:ph idx="2" type="sldImg"/>
@@ -2484,7 +2485,7 @@
       </p:sp>
       <p:sp>
         <p:nvSpPr>
-          <p:cNvPr id="218" name="Google Shape;218;g22d58330789_0_37:notes"/>
+          <p:cNvPr id="261" name="Google Shape;261;g22d58330789_0_37:notes"/>
           <p:cNvSpPr txBox="1"/>
           <p:nvPr>
             <p:ph idx="1" type="body"/>
@@ -2534,7 +2535,7 @@
   <p:cSld>
     <p:spTree>
       <p:nvGrpSpPr>
-        <p:cNvPr id="224" name="Shape 224"/>
+        <p:cNvPr id="267" name="Shape 267"/>
         <p:cNvGrpSpPr/>
         <p:nvPr/>
       </p:nvGrpSpPr>
@@ -2548,7 +2549,7 @@
       </p:grpSpPr>
       <p:sp>
         <p:nvSpPr>
-          <p:cNvPr id="225" name="Google Shape;225;g22d58330789_0_71:notes"/>
+          <p:cNvPr id="268" name="Google Shape;268;g22d58330789_0_71:notes"/>
           <p:cNvSpPr/>
           <p:nvPr>
             <p:ph idx="2" type="sldImg"/>
@@ -2583,7 +2584,7 @@
       </p:sp>
       <p:sp>
         <p:nvSpPr>
-          <p:cNvPr id="226" name="Google Shape;226;g22d58330789_0_71:notes"/>
+          <p:cNvPr id="269" name="Google Shape;269;g22d58330789_0_71:notes"/>
           <p:cNvSpPr txBox="1"/>
           <p:nvPr>
             <p:ph idx="1" type="body"/>
@@ -2633,7 +2634,7 @@
   <p:cSld>
     <p:spTree>
       <p:nvGrpSpPr>
-        <p:cNvPr id="232" name="Shape 232"/>
+        <p:cNvPr id="275" name="Shape 275"/>
         <p:cNvGrpSpPr/>
         <p:nvPr/>
       </p:nvGrpSpPr>
@@ -2647,7 +2648,7 @@
       </p:grpSpPr>
       <p:sp>
         <p:nvSpPr>
-          <p:cNvPr id="233" name="Google Shape;233;g22d58330789_0_84:notes"/>
+          <p:cNvPr id="276" name="Google Shape;276;g22d58330789_0_84:notes"/>
           <p:cNvSpPr/>
           <p:nvPr>
             <p:ph idx="2" type="sldImg"/>
@@ -2682,7 +2683,7 @@
       </p:sp>
       <p:sp>
         <p:nvSpPr>
-          <p:cNvPr id="234" name="Google Shape;234;g22d58330789_0_84:notes"/>
+          <p:cNvPr id="277" name="Google Shape;277;g22d58330789_0_84:notes"/>
           <p:cNvSpPr txBox="1"/>
           <p:nvPr>
             <p:ph idx="1" type="body"/>
@@ -2732,7 +2733,7 @@
   <p:cSld>
     <p:spTree>
       <p:nvGrpSpPr>
-        <p:cNvPr id="240" name="Shape 240"/>
+        <p:cNvPr id="283" name="Shape 283"/>
         <p:cNvGrpSpPr/>
         <p:nvPr/>
       </p:nvGrpSpPr>
@@ -2746,7 +2747,7 @@
       </p:grpSpPr>
       <p:sp>
         <p:nvSpPr>
-          <p:cNvPr id="241" name="Google Shape;241;g22d0a57d65a_0_51:notes"/>
+          <p:cNvPr id="284" name="Google Shape;284;g22d0a57d65a_0_51:notes"/>
           <p:cNvSpPr/>
           <p:nvPr>
             <p:ph idx="2" type="sldImg"/>
@@ -2781,7 +2782,7 @@
       </p:sp>
       <p:sp>
         <p:nvSpPr>
-          <p:cNvPr id="242" name="Google Shape;242;g22d0a57d65a_0_51:notes"/>
+          <p:cNvPr id="285" name="Google Shape;285;g22d0a57d65a_0_51:notes"/>
           <p:cNvSpPr txBox="1"/>
           <p:nvPr>
             <p:ph idx="1" type="body"/>
@@ -2831,7 +2832,7 @@
   <p:cSld>
     <p:spTree>
       <p:nvGrpSpPr>
-        <p:cNvPr id="247" name="Shape 247"/>
+        <p:cNvPr id="290" name="Shape 290"/>
         <p:cNvGrpSpPr/>
         <p:nvPr/>
       </p:nvGrpSpPr>
@@ -2845,7 +2846,7 @@
       </p:grpSpPr>
       <p:sp>
         <p:nvSpPr>
-          <p:cNvPr id="248" name="Google Shape;248;g22d58330789_0_0:notes"/>
+          <p:cNvPr id="291" name="Google Shape;291;g22d58330789_0_0:notes"/>
           <p:cNvSpPr/>
           <p:nvPr>
             <p:ph idx="2" type="sldImg"/>
@@ -2880,7 +2881,7 @@
       </p:sp>
       <p:sp>
         <p:nvSpPr>
-          <p:cNvPr id="249" name="Google Shape;249;g22d58330789_0_0:notes"/>
+          <p:cNvPr id="292" name="Google Shape;292;g22d58330789_0_0:notes"/>
           <p:cNvSpPr txBox="1"/>
           <p:nvPr>
             <p:ph idx="1" type="body"/>
@@ -2930,7 +2931,7 @@
   <p:cSld>
     <p:spTree>
       <p:nvGrpSpPr>
-        <p:cNvPr id="60" name="Shape 60"/>
+        <p:cNvPr id="102" name="Shape 102"/>
         <p:cNvGrpSpPr/>
         <p:nvPr/>
       </p:nvGrpSpPr>
@@ -2944,7 +2945,7 @@
       </p:grpSpPr>
       <p:sp>
         <p:nvSpPr>
-          <p:cNvPr id="61" name="Google Shape;61;gf17014c61d_0_0:notes"/>
+          <p:cNvPr id="103" name="Google Shape;103;gf17014c61d_0_0:notes"/>
           <p:cNvSpPr/>
           <p:nvPr>
             <p:ph idx="2" type="sldImg"/>
@@ -2979,7 +2980,7 @@
       </p:sp>
       <p:sp>
         <p:nvSpPr>
-          <p:cNvPr id="62" name="Google Shape;62;gf17014c61d_0_0:notes"/>
+          <p:cNvPr id="104" name="Google Shape;104;gf17014c61d_0_0:notes"/>
           <p:cNvSpPr txBox="1"/>
           <p:nvPr>
             <p:ph idx="1" type="body"/>
@@ -3029,7 +3030,7 @@
   <p:cSld>
     <p:spTree>
       <p:nvGrpSpPr>
-        <p:cNvPr id="255" name="Shape 255"/>
+        <p:cNvPr id="298" name="Shape 298"/>
         <p:cNvGrpSpPr/>
         <p:nvPr/>
       </p:nvGrpSpPr>
@@ -3043,7 +3044,7 @@
       </p:grpSpPr>
       <p:sp>
         <p:nvSpPr>
-          <p:cNvPr id="256" name="Google Shape;256;g22d0a57d65a_0_12:notes"/>
+          <p:cNvPr id="299" name="Google Shape;299;g22d0a57d65a_0_12:notes"/>
           <p:cNvSpPr/>
           <p:nvPr>
             <p:ph idx="2" type="sldImg"/>
@@ -3078,7 +3079,7 @@
       </p:sp>
       <p:sp>
         <p:nvSpPr>
-          <p:cNvPr id="257" name="Google Shape;257;g22d0a57d65a_0_12:notes"/>
+          <p:cNvPr id="300" name="Google Shape;300;g22d0a57d65a_0_12:notes"/>
           <p:cNvSpPr txBox="1"/>
           <p:nvPr>
             <p:ph idx="1" type="body"/>
@@ -3128,7 +3129,7 @@
   <p:cSld>
     <p:spTree>
       <p:nvGrpSpPr>
-        <p:cNvPr id="260" name="Shape 260"/>
+        <p:cNvPr id="303" name="Shape 303"/>
         <p:cNvGrpSpPr/>
         <p:nvPr/>
       </p:nvGrpSpPr>
@@ -3142,7 +3143,7 @@
       </p:grpSpPr>
       <p:sp>
         <p:nvSpPr>
-          <p:cNvPr id="261" name="Google Shape;261;g22d58330789_0_110:notes"/>
+          <p:cNvPr id="304" name="Google Shape;304;g22d58330789_0_110:notes"/>
           <p:cNvSpPr/>
           <p:nvPr>
             <p:ph idx="2" type="sldImg"/>
@@ -3177,7 +3178,7 @@
       </p:sp>
       <p:sp>
         <p:nvSpPr>
-          <p:cNvPr id="262" name="Google Shape;262;g22d58330789_0_110:notes"/>
+          <p:cNvPr id="305" name="Google Shape;305;g22d58330789_0_110:notes"/>
           <p:cNvSpPr txBox="1"/>
           <p:nvPr>
             <p:ph idx="1" type="body"/>
@@ -3227,7 +3228,7 @@
   <p:cSld>
     <p:spTree>
       <p:nvGrpSpPr>
-        <p:cNvPr id="267" name="Shape 267"/>
+        <p:cNvPr id="310" name="Shape 310"/>
         <p:cNvGrpSpPr/>
         <p:nvPr/>
       </p:nvGrpSpPr>
@@ -3241,7 +3242,7 @@
       </p:grpSpPr>
       <p:sp>
         <p:nvSpPr>
-          <p:cNvPr id="268" name="Google Shape;268;g22d0a57d65a_0_57:notes"/>
+          <p:cNvPr id="311" name="Google Shape;311;g22d0a57d65a_0_57:notes"/>
           <p:cNvSpPr/>
           <p:nvPr>
             <p:ph idx="2" type="sldImg"/>
@@ -3276,7 +3277,7 @@
       </p:sp>
       <p:sp>
         <p:nvSpPr>
-          <p:cNvPr id="269" name="Google Shape;269;g22d0a57d65a_0_57:notes"/>
+          <p:cNvPr id="312" name="Google Shape;312;g22d0a57d65a_0_57:notes"/>
           <p:cNvSpPr txBox="1"/>
           <p:nvPr>
             <p:ph idx="1" type="body"/>
@@ -3326,7 +3327,7 @@
   <p:cSld>
     <p:spTree>
       <p:nvGrpSpPr>
-        <p:cNvPr id="275" name="Shape 275"/>
+        <p:cNvPr id="318" name="Shape 318"/>
         <p:cNvGrpSpPr/>
         <p:nvPr/>
       </p:nvGrpSpPr>
@@ -3340,7 +3341,7 @@
       </p:grpSpPr>
       <p:sp>
         <p:nvSpPr>
-          <p:cNvPr id="276" name="Google Shape;276;g23e571cdfcc_0_0:notes"/>
+          <p:cNvPr id="319" name="Google Shape;319;g23e571cdfcc_0_0:notes"/>
           <p:cNvSpPr/>
           <p:nvPr>
             <p:ph idx="2" type="sldImg"/>
@@ -3375,7 +3376,7 @@
       </p:sp>
       <p:sp>
         <p:nvSpPr>
-          <p:cNvPr id="277" name="Google Shape;277;g23e571cdfcc_0_0:notes"/>
+          <p:cNvPr id="320" name="Google Shape;320;g23e571cdfcc_0_0:notes"/>
           <p:cNvSpPr txBox="1"/>
           <p:nvPr>
             <p:ph idx="1" type="body"/>
@@ -3425,7 +3426,7 @@
   <p:cSld>
     <p:spTree>
       <p:nvGrpSpPr>
-        <p:cNvPr id="282" name="Shape 282"/>
+        <p:cNvPr id="325" name="Shape 325"/>
         <p:cNvGrpSpPr/>
         <p:nvPr/>
       </p:nvGrpSpPr>
@@ -3439,7 +3440,7 @@
       </p:grpSpPr>
       <p:sp>
         <p:nvSpPr>
-          <p:cNvPr id="283" name="Google Shape;283;g23f3a7ed1f3_0_0:notes"/>
+          <p:cNvPr id="326" name="Google Shape;326;g23f3a7ed1f3_0_0:notes"/>
           <p:cNvSpPr/>
           <p:nvPr>
             <p:ph idx="2" type="sldImg"/>
@@ -3474,7 +3475,7 @@
       </p:sp>
       <p:sp>
         <p:nvSpPr>
-          <p:cNvPr id="284" name="Google Shape;284;g23f3a7ed1f3_0_0:notes"/>
+          <p:cNvPr id="327" name="Google Shape;327;g23f3a7ed1f3_0_0:notes"/>
           <p:cNvSpPr txBox="1"/>
           <p:nvPr>
             <p:ph idx="1" type="body"/>
@@ -3524,7 +3525,7 @@
   <p:cSld>
     <p:spTree>
       <p:nvGrpSpPr>
-        <p:cNvPr id="289" name="Shape 289"/>
+        <p:cNvPr id="332" name="Shape 332"/>
         <p:cNvGrpSpPr/>
         <p:nvPr/>
       </p:nvGrpSpPr>
@@ -3538,7 +3539,7 @@
       </p:grpSpPr>
       <p:sp>
         <p:nvSpPr>
-          <p:cNvPr id="290" name="Google Shape;290;g23e571cdfcc_0_6:notes"/>
+          <p:cNvPr id="333" name="Google Shape;333;g23e571cdfcc_0_6:notes"/>
           <p:cNvSpPr/>
           <p:nvPr>
             <p:ph idx="2" type="sldImg"/>
@@ -3573,7 +3574,7 @@
       </p:sp>
       <p:sp>
         <p:nvSpPr>
-          <p:cNvPr id="291" name="Google Shape;291;g23e571cdfcc_0_6:notes"/>
+          <p:cNvPr id="334" name="Google Shape;334;g23e571cdfcc_0_6:notes"/>
           <p:cNvSpPr txBox="1"/>
           <p:nvPr>
             <p:ph idx="1" type="body"/>
@@ -3623,7 +3624,7 @@
   <p:cSld>
     <p:spTree>
       <p:nvGrpSpPr>
-        <p:cNvPr id="296" name="Shape 296"/>
+        <p:cNvPr id="339" name="Shape 339"/>
         <p:cNvGrpSpPr/>
         <p:nvPr/>
       </p:nvGrpSpPr>
@@ -3637,7 +3638,7 @@
       </p:grpSpPr>
       <p:sp>
         <p:nvSpPr>
-          <p:cNvPr id="297" name="Google Shape;297;g22e00a9b09e_0_1:notes"/>
+          <p:cNvPr id="340" name="Google Shape;340;g22e00a9b09e_0_1:notes"/>
           <p:cNvSpPr/>
           <p:nvPr>
             <p:ph idx="2" type="sldImg"/>
@@ -3672,7 +3673,7 @@
       </p:sp>
       <p:sp>
         <p:nvSpPr>
-          <p:cNvPr id="298" name="Google Shape;298;g22e00a9b09e_0_1:notes"/>
+          <p:cNvPr id="341" name="Google Shape;341;g22e00a9b09e_0_1:notes"/>
           <p:cNvSpPr txBox="1"/>
           <p:nvPr>
             <p:ph idx="1" type="body"/>
@@ -3722,7 +3723,7 @@
   <p:cSld>
     <p:spTree>
       <p:nvGrpSpPr>
-        <p:cNvPr id="304" name="Shape 304"/>
+        <p:cNvPr id="347" name="Shape 347"/>
         <p:cNvGrpSpPr/>
         <p:nvPr/>
       </p:nvGrpSpPr>
@@ -3736,7 +3737,7 @@
       </p:grpSpPr>
       <p:sp>
         <p:nvSpPr>
-          <p:cNvPr id="305" name="Google Shape;305;g22e00a9b09e_0_9:notes"/>
+          <p:cNvPr id="348" name="Google Shape;348;g22e00a9b09e_0_9:notes"/>
           <p:cNvSpPr/>
           <p:nvPr>
             <p:ph idx="2" type="sldImg"/>
@@ -3771,7 +3772,7 @@
       </p:sp>
       <p:sp>
         <p:nvSpPr>
-          <p:cNvPr id="306" name="Google Shape;306;g22e00a9b09e_0_9:notes"/>
+          <p:cNvPr id="349" name="Google Shape;349;g22e00a9b09e_0_9:notes"/>
           <p:cNvSpPr txBox="1"/>
           <p:nvPr>
             <p:ph idx="1" type="body"/>
@@ -3821,7 +3822,7 @@
   <p:cSld>
     <p:spTree>
       <p:nvGrpSpPr>
-        <p:cNvPr id="311" name="Shape 311"/>
+        <p:cNvPr id="354" name="Shape 354"/>
         <p:cNvGrpSpPr/>
         <p:nvPr/>
       </p:nvGrpSpPr>
@@ -3835,7 +3836,7 @@
       </p:grpSpPr>
       <p:sp>
         <p:nvSpPr>
-          <p:cNvPr id="312" name="Google Shape;312;g22e00a9b09e_0_37:notes"/>
+          <p:cNvPr id="355" name="Google Shape;355;g22e00a9b09e_0_37:notes"/>
           <p:cNvSpPr/>
           <p:nvPr>
             <p:ph idx="2" type="sldImg"/>
@@ -3870,7 +3871,7 @@
       </p:sp>
       <p:sp>
         <p:nvSpPr>
-          <p:cNvPr id="313" name="Google Shape;313;g22e00a9b09e_0_37:notes"/>
+          <p:cNvPr id="356" name="Google Shape;356;g22e00a9b09e_0_37:notes"/>
           <p:cNvSpPr txBox="1"/>
           <p:nvPr>
             <p:ph idx="1" type="body"/>
@@ -3920,7 +3921,7 @@
   <p:cSld>
     <p:spTree>
       <p:nvGrpSpPr>
-        <p:cNvPr id="318" name="Shape 318"/>
+        <p:cNvPr id="361" name="Shape 361"/>
         <p:cNvGrpSpPr/>
         <p:nvPr/>
       </p:nvGrpSpPr>
@@ -3934,7 +3935,7 @@
       </p:grpSpPr>
       <p:sp>
         <p:nvSpPr>
-          <p:cNvPr id="319" name="Google Shape;319;g3501d43bbca_0_0:notes"/>
+          <p:cNvPr id="362" name="Google Shape;362;g3501d43bbca_0_0:notes"/>
           <p:cNvSpPr/>
           <p:nvPr>
             <p:ph idx="2" type="sldImg"/>
@@ -3969,7 +3970,7 @@
       </p:sp>
       <p:sp>
         <p:nvSpPr>
-          <p:cNvPr id="320" name="Google Shape;320;g3501d43bbca_0_0:notes"/>
+          <p:cNvPr id="363" name="Google Shape;363;g3501d43bbca_0_0:notes"/>
           <p:cNvSpPr txBox="1"/>
           <p:nvPr>
             <p:ph idx="1" type="body"/>
@@ -4019,7 +4020,7 @@
   <p:cSld>
     <p:spTree>
       <p:nvGrpSpPr>
-        <p:cNvPr id="67" name="Shape 67"/>
+        <p:cNvPr id="109" name="Shape 109"/>
         <p:cNvGrpSpPr/>
         <p:nvPr/>
       </p:nvGrpSpPr>
@@ -4033,7 +4034,7 @@
       </p:grpSpPr>
       <p:sp>
         <p:nvSpPr>
-          <p:cNvPr id="68" name="Google Shape;68;g152a3f74d0d_0_28:notes"/>
+          <p:cNvPr id="110" name="Google Shape;110;g152a3f74d0d_0_28:notes"/>
           <p:cNvSpPr/>
           <p:nvPr>
             <p:ph idx="2" type="sldImg"/>
@@ -4068,7 +4069,7 @@
       </p:sp>
       <p:sp>
         <p:nvSpPr>
-          <p:cNvPr id="69" name="Google Shape;69;g152a3f74d0d_0_28:notes"/>
+          <p:cNvPr id="111" name="Google Shape;111;g152a3f74d0d_0_28:notes"/>
           <p:cNvSpPr txBox="1"/>
           <p:nvPr>
             <p:ph idx="1" type="body"/>
@@ -4118,7 +4119,7 @@
   <p:cSld>
     <p:spTree>
       <p:nvGrpSpPr>
-        <p:cNvPr id="325" name="Shape 325"/>
+        <p:cNvPr id="368" name="Shape 368"/>
         <p:cNvGrpSpPr/>
         <p:nvPr/>
       </p:nvGrpSpPr>
@@ -4132,7 +4133,7 @@
       </p:grpSpPr>
       <p:sp>
         <p:nvSpPr>
-          <p:cNvPr id="326" name="Google Shape;326;g22d0a57d65a_0_16:notes"/>
+          <p:cNvPr id="369" name="Google Shape;369;g22d0a57d65a_0_16:notes"/>
           <p:cNvSpPr/>
           <p:nvPr>
             <p:ph idx="2" type="sldImg"/>
@@ -4167,7 +4168,7 @@
       </p:sp>
       <p:sp>
         <p:nvSpPr>
-          <p:cNvPr id="327" name="Google Shape;327;g22d0a57d65a_0_16:notes"/>
+          <p:cNvPr id="370" name="Google Shape;370;g22d0a57d65a_0_16:notes"/>
           <p:cNvSpPr txBox="1"/>
           <p:nvPr>
             <p:ph idx="1" type="body"/>
@@ -4217,7 +4218,7 @@
   <p:cSld>
     <p:spTree>
       <p:nvGrpSpPr>
-        <p:cNvPr id="330" name="Shape 330"/>
+        <p:cNvPr id="373" name="Shape 373"/>
         <p:cNvGrpSpPr/>
         <p:nvPr/>
       </p:nvGrpSpPr>
@@ -4231,7 +4232,7 @@
       </p:grpSpPr>
       <p:sp>
         <p:nvSpPr>
-          <p:cNvPr id="331" name="Google Shape;331;g22e00a9b09e_0_18:notes"/>
+          <p:cNvPr id="374" name="Google Shape;374;g22e00a9b09e_0_18:notes"/>
           <p:cNvSpPr/>
           <p:nvPr>
             <p:ph idx="2" type="sldImg"/>
@@ -4266,7 +4267,7 @@
       </p:sp>
       <p:sp>
         <p:nvSpPr>
-          <p:cNvPr id="332" name="Google Shape;332;g22e00a9b09e_0_18:notes"/>
+          <p:cNvPr id="375" name="Google Shape;375;g22e00a9b09e_0_18:notes"/>
           <p:cNvSpPr txBox="1"/>
           <p:nvPr>
             <p:ph idx="1" type="body"/>
@@ -4316,7 +4317,7 @@
   <p:cSld>
     <p:spTree>
       <p:nvGrpSpPr>
-        <p:cNvPr id="337" name="Shape 337"/>
+        <p:cNvPr id="380" name="Shape 380"/>
         <p:cNvGrpSpPr/>
         <p:nvPr/>
       </p:nvGrpSpPr>
@@ -4330,7 +4331,7 @@
       </p:grpSpPr>
       <p:sp>
         <p:nvSpPr>
-          <p:cNvPr id="338" name="Google Shape;338;g22e00a9b09e_0_24:notes"/>
+          <p:cNvPr id="381" name="Google Shape;381;g22e00a9b09e_0_24:notes"/>
           <p:cNvSpPr/>
           <p:nvPr>
             <p:ph idx="2" type="sldImg"/>
@@ -4365,7 +4366,7 @@
       </p:sp>
       <p:sp>
         <p:nvSpPr>
-          <p:cNvPr id="339" name="Google Shape;339;g22e00a9b09e_0_24:notes"/>
+          <p:cNvPr id="382" name="Google Shape;382;g22e00a9b09e_0_24:notes"/>
           <p:cNvSpPr txBox="1"/>
           <p:nvPr>
             <p:ph idx="1" type="body"/>
@@ -4415,7 +4416,7 @@
   <p:cSld>
     <p:spTree>
       <p:nvGrpSpPr>
-        <p:cNvPr id="344" name="Shape 344"/>
+        <p:cNvPr id="387" name="Shape 387"/>
         <p:cNvGrpSpPr/>
         <p:nvPr/>
       </p:nvGrpSpPr>
@@ -4429,7 +4430,7 @@
       </p:grpSpPr>
       <p:sp>
         <p:nvSpPr>
-          <p:cNvPr id="345" name="Google Shape;345;g22e00a9b09e_0_31:notes"/>
+          <p:cNvPr id="388" name="Google Shape;388;g22e00a9b09e_0_31:notes"/>
           <p:cNvSpPr/>
           <p:nvPr>
             <p:ph idx="2" type="sldImg"/>
@@ -4464,7 +4465,7 @@
       </p:sp>
       <p:sp>
         <p:nvSpPr>
-          <p:cNvPr id="346" name="Google Shape;346;g22e00a9b09e_0_31:notes"/>
+          <p:cNvPr id="389" name="Google Shape;389;g22e00a9b09e_0_31:notes"/>
           <p:cNvSpPr txBox="1"/>
           <p:nvPr>
             <p:ph idx="1" type="body"/>
@@ -4514,7 +4515,7 @@
   <p:cSld>
     <p:spTree>
       <p:nvGrpSpPr>
-        <p:cNvPr id="351" name="Shape 351"/>
+        <p:cNvPr id="394" name="Shape 394"/>
         <p:cNvGrpSpPr/>
         <p:nvPr/>
       </p:nvGrpSpPr>
@@ -4528,7 +4529,7 @@
       </p:grpSpPr>
       <p:sp>
         <p:nvSpPr>
-          <p:cNvPr id="352" name="Google Shape;352;g22e00a9b09e_0_46:notes"/>
+          <p:cNvPr id="395" name="Google Shape;395;g22e00a9b09e_0_46:notes"/>
           <p:cNvSpPr/>
           <p:nvPr>
             <p:ph idx="2" type="sldImg"/>
@@ -4563,7 +4564,7 @@
       </p:sp>
       <p:sp>
         <p:nvSpPr>
-          <p:cNvPr id="353" name="Google Shape;353;g22e00a9b09e_0_46:notes"/>
+          <p:cNvPr id="396" name="Google Shape;396;g22e00a9b09e_0_46:notes"/>
           <p:cNvSpPr txBox="1"/>
           <p:nvPr>
             <p:ph idx="1" type="body"/>
@@ -4613,7 +4614,7 @@
   <p:cSld>
     <p:spTree>
       <p:nvGrpSpPr>
-        <p:cNvPr id="358" name="Shape 358"/>
+        <p:cNvPr id="401" name="Shape 401"/>
         <p:cNvGrpSpPr/>
         <p:nvPr/>
       </p:nvGrpSpPr>
@@ -4627,7 +4628,7 @@
       </p:grpSpPr>
       <p:sp>
         <p:nvSpPr>
-          <p:cNvPr id="359" name="Google Shape;359;g22e00a9b09e_0_57:notes"/>
+          <p:cNvPr id="402" name="Google Shape;402;g22e00a9b09e_0_57:notes"/>
           <p:cNvSpPr/>
           <p:nvPr>
             <p:ph idx="2" type="sldImg"/>
@@ -4662,7 +4663,7 @@
       </p:sp>
       <p:sp>
         <p:nvSpPr>
-          <p:cNvPr id="360" name="Google Shape;360;g22e00a9b09e_0_57:notes"/>
+          <p:cNvPr id="403" name="Google Shape;403;g22e00a9b09e_0_57:notes"/>
           <p:cNvSpPr txBox="1"/>
           <p:nvPr>
             <p:ph idx="1" type="body"/>
@@ -4712,7 +4713,7 @@
   <p:cSld>
     <p:spTree>
       <p:nvGrpSpPr>
-        <p:cNvPr id="365" name="Shape 365"/>
+        <p:cNvPr id="408" name="Shape 408"/>
         <p:cNvGrpSpPr/>
         <p:nvPr/>
       </p:nvGrpSpPr>
@@ -4726,7 +4727,7 @@
       </p:grpSpPr>
       <p:sp>
         <p:nvSpPr>
-          <p:cNvPr id="366" name="Google Shape;366;g3501d43bbca_0_6:notes"/>
+          <p:cNvPr id="409" name="Google Shape;409;g3501d43bbca_0_6:notes"/>
           <p:cNvSpPr/>
           <p:nvPr>
             <p:ph idx="2" type="sldImg"/>
@@ -4761,7 +4762,7 @@
       </p:sp>
       <p:sp>
         <p:nvSpPr>
-          <p:cNvPr id="367" name="Google Shape;367;g3501d43bbca_0_6:notes"/>
+          <p:cNvPr id="410" name="Google Shape;410;g3501d43bbca_0_6:notes"/>
           <p:cNvSpPr txBox="1"/>
           <p:nvPr>
             <p:ph idx="1" type="body"/>
@@ -4811,7 +4812,7 @@
   <p:cSld>
     <p:spTree>
       <p:nvGrpSpPr>
-        <p:cNvPr id="372" name="Shape 372"/>
+        <p:cNvPr id="415" name="Shape 415"/>
         <p:cNvGrpSpPr/>
         <p:nvPr/>
       </p:nvGrpSpPr>
@@ -4825,7 +4826,7 @@
       </p:grpSpPr>
       <p:sp>
         <p:nvSpPr>
-          <p:cNvPr id="373" name="Google Shape;373;g22e44005c08_0_0:notes"/>
+          <p:cNvPr id="416" name="Google Shape;416;g22e44005c08_0_0:notes"/>
           <p:cNvSpPr/>
           <p:nvPr>
             <p:ph idx="2" type="sldImg"/>
@@ -4860,7 +4861,7 @@
       </p:sp>
       <p:sp>
         <p:nvSpPr>
-          <p:cNvPr id="374" name="Google Shape;374;g22e44005c08_0_0:notes"/>
+          <p:cNvPr id="417" name="Google Shape;417;g22e44005c08_0_0:notes"/>
           <p:cNvSpPr txBox="1"/>
           <p:nvPr>
             <p:ph idx="1" type="body"/>
@@ -4910,7 +4911,7 @@
   <p:cSld>
     <p:spTree>
       <p:nvGrpSpPr>
-        <p:cNvPr id="379" name="Shape 379"/>
+        <p:cNvPr id="422" name="Shape 422"/>
         <p:cNvGrpSpPr/>
         <p:nvPr/>
       </p:nvGrpSpPr>
@@ -4924,7 +4925,7 @@
       </p:grpSpPr>
       <p:sp>
         <p:nvSpPr>
-          <p:cNvPr id="380" name="Google Shape;380;g22d0a57d65a_0_8:notes"/>
+          <p:cNvPr id="423" name="Google Shape;423;g22d0a57d65a_0_8:notes"/>
           <p:cNvSpPr/>
           <p:nvPr>
             <p:ph idx="2" type="sldImg"/>
@@ -4959,7 +4960,7 @@
       </p:sp>
       <p:sp>
         <p:nvSpPr>
-          <p:cNvPr id="381" name="Google Shape;381;g22d0a57d65a_0_8:notes"/>
+          <p:cNvPr id="424" name="Google Shape;424;g22d0a57d65a_0_8:notes"/>
           <p:cNvSpPr txBox="1"/>
           <p:nvPr>
             <p:ph idx="1" type="body"/>
@@ -5009,7 +5010,7 @@
   <p:cSld>
     <p:spTree>
       <p:nvGrpSpPr>
-        <p:cNvPr id="384" name="Shape 384"/>
+        <p:cNvPr id="427" name="Shape 427"/>
         <p:cNvGrpSpPr/>
         <p:nvPr/>
       </p:nvGrpSpPr>
@@ -5023,7 +5024,7 @@
       </p:grpSpPr>
       <p:sp>
         <p:nvSpPr>
-          <p:cNvPr id="385" name="Google Shape;385;g22e44005c08_0_33:notes"/>
+          <p:cNvPr id="428" name="Google Shape;428;g22e44005c08_0_33:notes"/>
           <p:cNvSpPr/>
           <p:nvPr>
             <p:ph idx="2" type="sldImg"/>
@@ -5058,7 +5059,7 @@
       </p:sp>
       <p:sp>
         <p:nvSpPr>
-          <p:cNvPr id="386" name="Google Shape;386;g22e44005c08_0_33:notes"/>
+          <p:cNvPr id="429" name="Google Shape;429;g22e44005c08_0_33:notes"/>
           <p:cNvSpPr txBox="1"/>
           <p:nvPr>
             <p:ph idx="1" type="body"/>
@@ -5108,7 +5109,7 @@
   <p:cSld>
     <p:spTree>
       <p:nvGrpSpPr>
-        <p:cNvPr id="72" name="Shape 72"/>
+        <p:cNvPr id="114" name="Shape 114"/>
         <p:cNvGrpSpPr/>
         <p:nvPr/>
       </p:nvGrpSpPr>
@@ -5122,7 +5123,7 @@
       </p:grpSpPr>
       <p:sp>
         <p:nvSpPr>
-          <p:cNvPr id="73" name="Google Shape;73;g152a3f74d0d_0_57:notes"/>
+          <p:cNvPr id="115" name="Google Shape;115;g152a3f74d0d_0_57:notes"/>
           <p:cNvSpPr/>
           <p:nvPr>
             <p:ph idx="2" type="sldImg"/>
@@ -5157,7 +5158,7 @@
       </p:sp>
       <p:sp>
         <p:nvSpPr>
-          <p:cNvPr id="74" name="Google Shape;74;g152a3f74d0d_0_57:notes"/>
+          <p:cNvPr id="116" name="Google Shape;116;g152a3f74d0d_0_57:notes"/>
           <p:cNvSpPr txBox="1"/>
           <p:nvPr>
             <p:ph idx="1" type="body"/>
@@ -5207,7 +5208,7 @@
   <p:cSld>
     <p:spTree>
       <p:nvGrpSpPr>
-        <p:cNvPr id="391" name="Shape 391"/>
+        <p:cNvPr id="434" name="Shape 434"/>
         <p:cNvGrpSpPr/>
         <p:nvPr/>
       </p:nvGrpSpPr>
@@ -5221,7 +5222,7 @@
       </p:grpSpPr>
       <p:sp>
         <p:nvSpPr>
-          <p:cNvPr id="392" name="Google Shape;392;g152c562dbb7_0_0:notes"/>
+          <p:cNvPr id="435" name="Google Shape;435;g152c562dbb7_0_0:notes"/>
           <p:cNvSpPr/>
           <p:nvPr>
             <p:ph idx="2" type="sldImg"/>
@@ -5256,7 +5257,7 @@
       </p:sp>
       <p:sp>
         <p:nvSpPr>
-          <p:cNvPr id="393" name="Google Shape;393;g152c562dbb7_0_0:notes"/>
+          <p:cNvPr id="436" name="Google Shape;436;g152c562dbb7_0_0:notes"/>
           <p:cNvSpPr txBox="1"/>
           <p:nvPr>
             <p:ph idx="1" type="body"/>
@@ -5306,7 +5307,7 @@
   <p:cSld>
     <p:spTree>
       <p:nvGrpSpPr>
-        <p:cNvPr id="398" name="Shape 398"/>
+        <p:cNvPr id="441" name="Shape 441"/>
         <p:cNvGrpSpPr/>
         <p:nvPr/>
       </p:nvGrpSpPr>
@@ -5320,7 +5321,7 @@
       </p:grpSpPr>
       <p:sp>
         <p:nvSpPr>
-          <p:cNvPr id="399" name="Google Shape;399;g22d58330789_0_104:notes"/>
+          <p:cNvPr id="442" name="Google Shape;442;g22d58330789_0_104:notes"/>
           <p:cNvSpPr/>
           <p:nvPr>
             <p:ph idx="2" type="sldImg"/>
@@ -5355,7 +5356,7 @@
       </p:sp>
       <p:sp>
         <p:nvSpPr>
-          <p:cNvPr id="400" name="Google Shape;400;g22d58330789_0_104:notes"/>
+          <p:cNvPr id="443" name="Google Shape;443;g22d58330789_0_104:notes"/>
           <p:cNvSpPr txBox="1"/>
           <p:nvPr>
             <p:ph idx="1" type="body"/>
@@ -5405,7 +5406,7 @@
   <p:cSld>
     <p:spTree>
       <p:nvGrpSpPr>
-        <p:cNvPr id="405" name="Shape 405"/>
+        <p:cNvPr id="448" name="Shape 448"/>
         <p:cNvGrpSpPr/>
         <p:nvPr/>
       </p:nvGrpSpPr>
@@ -5419,7 +5420,7 @@
       </p:grpSpPr>
       <p:sp>
         <p:nvSpPr>
-          <p:cNvPr id="406" name="Google Shape;406;g22d58330789_0_92:notes"/>
+          <p:cNvPr id="449" name="Google Shape;449;g22d58330789_0_92:notes"/>
           <p:cNvSpPr/>
           <p:nvPr>
             <p:ph idx="2" type="sldImg"/>
@@ -5454,7 +5455,7 @@
       </p:sp>
       <p:sp>
         <p:nvSpPr>
-          <p:cNvPr id="407" name="Google Shape;407;g22d58330789_0_92:notes"/>
+          <p:cNvPr id="450" name="Google Shape;450;g22d58330789_0_92:notes"/>
           <p:cNvSpPr txBox="1"/>
           <p:nvPr>
             <p:ph idx="1" type="body"/>
@@ -5504,7 +5505,7 @@
   <p:cSld>
     <p:spTree>
       <p:nvGrpSpPr>
-        <p:cNvPr id="412" name="Shape 412"/>
+        <p:cNvPr id="455" name="Shape 455"/>
         <p:cNvGrpSpPr/>
         <p:nvPr/>
       </p:nvGrpSpPr>
@@ -5518,7 +5519,7 @@
       </p:grpSpPr>
       <p:sp>
         <p:nvSpPr>
-          <p:cNvPr id="413" name="Google Shape;413;g22d58330789_0_122:notes"/>
+          <p:cNvPr id="456" name="Google Shape;456;g22d58330789_0_122:notes"/>
           <p:cNvSpPr/>
           <p:nvPr>
             <p:ph idx="2" type="sldImg"/>
@@ -5553,7 +5554,7 @@
       </p:sp>
       <p:sp>
         <p:nvSpPr>
-          <p:cNvPr id="414" name="Google Shape;414;g22d58330789_0_122:notes"/>
+          <p:cNvPr id="457" name="Google Shape;457;g22d58330789_0_122:notes"/>
           <p:cNvSpPr txBox="1"/>
           <p:nvPr>
             <p:ph idx="1" type="body"/>
@@ -5603,7 +5604,7 @@
   <p:cSld>
     <p:spTree>
       <p:nvGrpSpPr>
-        <p:cNvPr id="419" name="Shape 419"/>
+        <p:cNvPr id="462" name="Shape 462"/>
         <p:cNvGrpSpPr/>
         <p:nvPr/>
       </p:nvGrpSpPr>
@@ -5617,7 +5618,7 @@
       </p:grpSpPr>
       <p:sp>
         <p:nvSpPr>
-          <p:cNvPr id="420" name="Google Shape;420;g22d58330789_0_116:notes"/>
+          <p:cNvPr id="463" name="Google Shape;463;g22d58330789_0_116:notes"/>
           <p:cNvSpPr/>
           <p:nvPr>
             <p:ph idx="2" type="sldImg"/>
@@ -5652,7 +5653,7 @@
       </p:sp>
       <p:sp>
         <p:nvSpPr>
-          <p:cNvPr id="421" name="Google Shape;421;g22d58330789_0_116:notes"/>
+          <p:cNvPr id="464" name="Google Shape;464;g22d58330789_0_116:notes"/>
           <p:cNvSpPr txBox="1"/>
           <p:nvPr>
             <p:ph idx="1" type="body"/>
@@ -5702,7 +5703,7 @@
   <p:cSld>
     <p:spTree>
       <p:nvGrpSpPr>
-        <p:cNvPr id="426" name="Shape 426"/>
+        <p:cNvPr id="469" name="Shape 469"/>
         <p:cNvGrpSpPr/>
         <p:nvPr/>
       </p:nvGrpSpPr>
@@ -5716,7 +5717,7 @@
       </p:grpSpPr>
       <p:sp>
         <p:nvSpPr>
-          <p:cNvPr id="427" name="Google Shape;427;g22d58330789_0_128:notes"/>
+          <p:cNvPr id="470" name="Google Shape;470;g22d58330789_0_128:notes"/>
           <p:cNvSpPr/>
           <p:nvPr>
             <p:ph idx="2" type="sldImg"/>
@@ -5751,7 +5752,7 @@
       </p:sp>
       <p:sp>
         <p:nvSpPr>
-          <p:cNvPr id="428" name="Google Shape;428;g22d58330789_0_128:notes"/>
+          <p:cNvPr id="471" name="Google Shape;471;g22d58330789_0_128:notes"/>
           <p:cNvSpPr txBox="1"/>
           <p:nvPr>
             <p:ph idx="1" type="body"/>
@@ -5801,7 +5802,7 @@
   <p:cSld>
     <p:spTree>
       <p:nvGrpSpPr>
-        <p:cNvPr id="433" name="Shape 433"/>
+        <p:cNvPr id="476" name="Shape 476"/>
         <p:cNvGrpSpPr/>
         <p:nvPr/>
       </p:nvGrpSpPr>
@@ -5815,7 +5816,7 @@
       </p:grpSpPr>
       <p:sp>
         <p:nvSpPr>
-          <p:cNvPr id="434" name="Google Shape;434;g22d0a57d65a_0_20:notes"/>
+          <p:cNvPr id="477" name="Google Shape;477;g22d0a57d65a_0_20:notes"/>
           <p:cNvSpPr/>
           <p:nvPr>
             <p:ph idx="2" type="sldImg"/>
@@ -5850,7 +5851,7 @@
       </p:sp>
       <p:sp>
         <p:nvSpPr>
-          <p:cNvPr id="435" name="Google Shape;435;g22d0a57d65a_0_20:notes"/>
+          <p:cNvPr id="478" name="Google Shape;478;g22d0a57d65a_0_20:notes"/>
           <p:cNvSpPr txBox="1"/>
           <p:nvPr>
             <p:ph idx="1" type="body"/>
@@ -5900,7 +5901,7 @@
   <p:cSld>
     <p:spTree>
       <p:nvGrpSpPr>
-        <p:cNvPr id="438" name="Shape 438"/>
+        <p:cNvPr id="481" name="Shape 481"/>
         <p:cNvGrpSpPr/>
         <p:nvPr/>
       </p:nvGrpSpPr>
@@ -5914,7 +5915,7 @@
       </p:grpSpPr>
       <p:sp>
         <p:nvSpPr>
-          <p:cNvPr id="439" name="Google Shape;439;g22e00a9b09e_0_67:notes"/>
+          <p:cNvPr id="482" name="Google Shape;482;g22e00a9b09e_0_67:notes"/>
           <p:cNvSpPr/>
           <p:nvPr>
             <p:ph idx="2" type="sldImg"/>
@@ -5949,7 +5950,7 @@
       </p:sp>
       <p:sp>
         <p:nvSpPr>
-          <p:cNvPr id="440" name="Google Shape;440;g22e00a9b09e_0_67:notes"/>
+          <p:cNvPr id="483" name="Google Shape;483;g22e00a9b09e_0_67:notes"/>
           <p:cNvSpPr txBox="1"/>
           <p:nvPr>
             <p:ph idx="1" type="body"/>
@@ -5999,7 +6000,7 @@
   <p:cSld>
     <p:spTree>
       <p:nvGrpSpPr>
-        <p:cNvPr id="445" name="Shape 445"/>
+        <p:cNvPr id="488" name="Shape 488"/>
         <p:cNvGrpSpPr/>
         <p:nvPr/>
       </p:nvGrpSpPr>
@@ -6013,7 +6014,7 @@
       </p:grpSpPr>
       <p:sp>
         <p:nvSpPr>
-          <p:cNvPr id="446" name="Google Shape;446;g22e00a9b09e_0_80:notes"/>
+          <p:cNvPr id="489" name="Google Shape;489;g22e00a9b09e_0_80:notes"/>
           <p:cNvSpPr/>
           <p:nvPr>
             <p:ph idx="2" type="sldImg"/>
@@ -6048,7 +6049,7 @@
       </p:sp>
       <p:sp>
         <p:nvSpPr>
-          <p:cNvPr id="447" name="Google Shape;447;g22e00a9b09e_0_80:notes"/>
+          <p:cNvPr id="490" name="Google Shape;490;g22e00a9b09e_0_80:notes"/>
           <p:cNvSpPr txBox="1"/>
           <p:nvPr>
             <p:ph idx="1" type="body"/>
@@ -6098,7 +6099,7 @@
   <p:cSld>
     <p:spTree>
       <p:nvGrpSpPr>
-        <p:cNvPr id="452" name="Shape 452"/>
+        <p:cNvPr id="495" name="Shape 495"/>
         <p:cNvGrpSpPr/>
         <p:nvPr/>
       </p:nvGrpSpPr>
@@ -6112,7 +6113,7 @@
       </p:grpSpPr>
       <p:sp>
         <p:nvSpPr>
-          <p:cNvPr id="453" name="Google Shape;453;g22e00a9b09e_0_74:notes"/>
+          <p:cNvPr id="496" name="Google Shape;496;g22e00a9b09e_0_74:notes"/>
           <p:cNvSpPr/>
           <p:nvPr>
             <p:ph idx="2" type="sldImg"/>
@@ -6147,7 +6148,7 @@
       </p:sp>
       <p:sp>
         <p:nvSpPr>
-          <p:cNvPr id="454" name="Google Shape;454;g22e00a9b09e_0_74:notes"/>
+          <p:cNvPr id="497" name="Google Shape;497;g22e00a9b09e_0_74:notes"/>
           <p:cNvSpPr txBox="1"/>
           <p:nvPr>
             <p:ph idx="1" type="body"/>
@@ -6197,7 +6198,7 @@
   <p:cSld>
     <p:spTree>
       <p:nvGrpSpPr>
-        <p:cNvPr id="80" name="Shape 80"/>
+        <p:cNvPr id="122" name="Shape 122"/>
         <p:cNvGrpSpPr/>
         <p:nvPr/>
       </p:nvGrpSpPr>
@@ -6211,7 +6212,7 @@
       </p:grpSpPr>
       <p:sp>
         <p:nvSpPr>
-          <p:cNvPr id="81" name="Google Shape;81;g152a3f74d0d_0_22:notes"/>
+          <p:cNvPr id="123" name="Google Shape;123;g152a3f74d0d_0_22:notes"/>
           <p:cNvSpPr/>
           <p:nvPr>
             <p:ph idx="2" type="sldImg"/>
@@ -6246,7 +6247,7 @@
       </p:sp>
       <p:sp>
         <p:nvSpPr>
-          <p:cNvPr id="82" name="Google Shape;82;g152a3f74d0d_0_22:notes"/>
+          <p:cNvPr id="124" name="Google Shape;124;g152a3f74d0d_0_22:notes"/>
           <p:cNvSpPr txBox="1"/>
           <p:nvPr>
             <p:ph idx="1" type="body"/>
@@ -6296,7 +6297,7 @@
   <p:cSld>
     <p:spTree>
       <p:nvGrpSpPr>
-        <p:cNvPr id="459" name="Shape 459"/>
+        <p:cNvPr id="502" name="Shape 502"/>
         <p:cNvGrpSpPr/>
         <p:nvPr/>
       </p:nvGrpSpPr>
@@ -6310,7 +6311,7 @@
       </p:grpSpPr>
       <p:sp>
         <p:nvSpPr>
-          <p:cNvPr id="460" name="Google Shape;460;g22d0a57d65a_0_24:notes"/>
+          <p:cNvPr id="503" name="Google Shape;503;g22d0a57d65a_0_24:notes"/>
           <p:cNvSpPr/>
           <p:nvPr>
             <p:ph idx="2" type="sldImg"/>
@@ -6345,7 +6346,7 @@
       </p:sp>
       <p:sp>
         <p:nvSpPr>
-          <p:cNvPr id="461" name="Google Shape;461;g22d0a57d65a_0_24:notes"/>
+          <p:cNvPr id="504" name="Google Shape;504;g22d0a57d65a_0_24:notes"/>
           <p:cNvSpPr txBox="1"/>
           <p:nvPr>
             <p:ph idx="1" type="body"/>
@@ -6395,7 +6396,7 @@
   <p:cSld>
     <p:spTree>
       <p:nvGrpSpPr>
-        <p:cNvPr id="466" name="Shape 466"/>
+        <p:cNvPr id="509" name="Shape 509"/>
         <p:cNvGrpSpPr/>
         <p:nvPr/>
       </p:nvGrpSpPr>
@@ -6409,7 +6410,7 @@
       </p:grpSpPr>
       <p:sp>
         <p:nvSpPr>
-          <p:cNvPr id="467" name="Google Shape;467;g1e1c15a62a5_0_38:notes"/>
+          <p:cNvPr id="510" name="Google Shape;510;g1e1c15a62a5_0_38:notes"/>
           <p:cNvSpPr/>
           <p:nvPr>
             <p:ph idx="2" type="sldImg"/>
@@ -6444,7 +6445,7 @@
       </p:sp>
       <p:sp>
         <p:nvSpPr>
-          <p:cNvPr id="468" name="Google Shape;468;g1e1c15a62a5_0_38:notes"/>
+          <p:cNvPr id="511" name="Google Shape;511;g1e1c15a62a5_0_38:notes"/>
           <p:cNvSpPr txBox="1"/>
           <p:nvPr>
             <p:ph idx="1" type="body"/>
@@ -6494,7 +6495,7 @@
   <p:cSld>
     <p:spTree>
       <p:nvGrpSpPr>
-        <p:cNvPr id="472" name="Shape 472"/>
+        <p:cNvPr id="515" name="Shape 515"/>
         <p:cNvGrpSpPr/>
         <p:nvPr/>
       </p:nvGrpSpPr>
@@ -6508,7 +6509,7 @@
       </p:grpSpPr>
       <p:sp>
         <p:nvSpPr>
-          <p:cNvPr id="473" name="Google Shape;473;g1e1c15a62a5_0_43:notes"/>
+          <p:cNvPr id="516" name="Google Shape;516;g1e1c15a62a5_0_43:notes"/>
           <p:cNvSpPr/>
           <p:nvPr>
             <p:ph idx="2" type="sldImg"/>
@@ -6543,7 +6544,7 @@
       </p:sp>
       <p:sp>
         <p:nvSpPr>
-          <p:cNvPr id="474" name="Google Shape;474;g1e1c15a62a5_0_43:notes"/>
+          <p:cNvPr id="517" name="Google Shape;517;g1e1c15a62a5_0_43:notes"/>
           <p:cNvSpPr txBox="1"/>
           <p:nvPr>
             <p:ph idx="1" type="body"/>
@@ -6593,7 +6594,7 @@
   <p:cSld>
     <p:spTree>
       <p:nvGrpSpPr>
-        <p:cNvPr id="88" name="Shape 88"/>
+        <p:cNvPr id="130" name="Shape 130"/>
         <p:cNvGrpSpPr/>
         <p:nvPr/>
       </p:nvGrpSpPr>
@@ -6607,7 +6608,7 @@
       </p:grpSpPr>
       <p:sp>
         <p:nvSpPr>
-          <p:cNvPr id="89" name="Google Shape;89;g22d0a57d65a_0_68:notes"/>
+          <p:cNvPr id="131" name="Google Shape;131;g22d0a57d65a_0_68:notes"/>
           <p:cNvSpPr/>
           <p:nvPr>
             <p:ph idx="2" type="sldImg"/>
@@ -6642,7 +6643,7 @@
       </p:sp>
       <p:sp>
         <p:nvSpPr>
-          <p:cNvPr id="90" name="Google Shape;90;g22d0a57d65a_0_68:notes"/>
+          <p:cNvPr id="132" name="Google Shape;132;g22d0a57d65a_0_68:notes"/>
           <p:cNvSpPr txBox="1"/>
           <p:nvPr>
             <p:ph idx="1" type="body"/>
@@ -6692,7 +6693,7 @@
   <p:cSld>
     <p:spTree>
       <p:nvGrpSpPr>
-        <p:cNvPr id="96" name="Shape 96"/>
+        <p:cNvPr id="138" name="Shape 138"/>
         <p:cNvGrpSpPr/>
         <p:nvPr/>
       </p:nvGrpSpPr>
@@ -6706,7 +6707,7 @@
       </p:grpSpPr>
       <p:sp>
         <p:nvSpPr>
-          <p:cNvPr id="97" name="Google Shape;97;g22d0a57d65a_0_78:notes"/>
+          <p:cNvPr id="139" name="Google Shape;139;g22d0a57d65a_0_78:notes"/>
           <p:cNvSpPr/>
           <p:nvPr>
             <p:ph idx="2" type="sldImg"/>
@@ -6741,7 +6742,7 @@
       </p:sp>
       <p:sp>
         <p:nvSpPr>
-          <p:cNvPr id="98" name="Google Shape;98;g22d0a57d65a_0_78:notes"/>
+          <p:cNvPr id="140" name="Google Shape;140;g22d0a57d65a_0_78:notes"/>
           <p:cNvSpPr txBox="1"/>
           <p:nvPr>
             <p:ph idx="1" type="body"/>
@@ -6791,7 +6792,7 @@
   <p:cSld>
     <p:spTree>
       <p:nvGrpSpPr>
-        <p:cNvPr id="103" name="Shape 103"/>
+        <p:cNvPr id="145" name="Shape 145"/>
         <p:cNvGrpSpPr/>
         <p:nvPr/>
       </p:nvGrpSpPr>
@@ -6805,7 +6806,7 @@
       </p:grpSpPr>
       <p:sp>
         <p:nvSpPr>
-          <p:cNvPr id="104" name="Google Shape;104;g22d0a57d65a_0_30:notes"/>
+          <p:cNvPr id="146" name="Google Shape;146;g22d0a57d65a_0_30:notes"/>
           <p:cNvSpPr/>
           <p:nvPr>
             <p:ph idx="2" type="sldImg"/>
@@ -6840,7 +6841,7 @@
       </p:sp>
       <p:sp>
         <p:nvSpPr>
-          <p:cNvPr id="105" name="Google Shape;105;g22d0a57d65a_0_30:notes"/>
+          <p:cNvPr id="147" name="Google Shape;147;g22d0a57d65a_0_30:notes"/>
           <p:cNvSpPr txBox="1"/>
           <p:nvPr>
             <p:ph idx="1" type="body"/>
@@ -7331,6 +7332,1169 @@
           </p:txBody>
         </p:sp>
       </p:grpSp>
+    </p:spTree>
+  </p:cSld>
+  <p:clrMapOvr>
+    <a:masterClrMapping/>
+  </p:clrMapOvr>
+</p:sldLayout>
+</file>
+
+<file path=ppt/slideLayouts/slideLayout10.xml><?xml version="1.0" encoding="utf-8"?>
+<p:sldLayout xmlns:a="http://schemas.openxmlformats.org/drawingml/2006/main" xmlns:r="http://schemas.openxmlformats.org/officeDocument/2006/relationships" xmlns:mc="http://schemas.openxmlformats.org/markup-compatibility/2006" xmlns:mv="urn:schemas-microsoft-com:mac:vml" xmlns:p="http://schemas.openxmlformats.org/presentationml/2006/main" xmlns:c="http://schemas.openxmlformats.org/drawingml/2006/chart" xmlns:dgm="http://schemas.openxmlformats.org/drawingml/2006/diagram" xmlns:o="urn:schemas-microsoft-com:office:office" xmlns:v="urn:schemas-microsoft-com:vml" xmlns:pvml="urn:schemas-microsoft-com:office:powerpoint" xmlns:com="http://schemas.openxmlformats.org/drawingml/2006/compatibility" xmlns:p14="http://schemas.microsoft.com/office/powerpoint/2010/main" xmlns:p15="http://schemas.microsoft.com/office/powerpoint/2012/main" xmlns:ahyp="http://schemas.microsoft.com/office/drawing/2018/hyperlinkcolor" matchingName="Title and two columns" type="twoColTx">
+  <p:cSld name="TITLE_AND_TWO_COLUMNS">
+    <p:spTree>
+      <p:nvGrpSpPr>
+        <p:cNvPr id="72" name="Shape 72"/>
+        <p:cNvGrpSpPr/>
+        <p:nvPr/>
+      </p:nvGrpSpPr>
+      <p:grpSpPr>
+        <a:xfrm>
+          <a:off x="0" y="0"/>
+          <a:ext cx="0" cy="0"/>
+          <a:chOff x="0" y="0"/>
+          <a:chExt cx="0" cy="0"/>
+        </a:xfrm>
+      </p:grpSpPr>
+      <p:sp>
+        <p:nvSpPr>
+          <p:cNvPr id="73" name="Google Shape;73;p12"/>
+          <p:cNvSpPr txBox="1"/>
+          <p:nvPr>
+            <p:ph type="title"/>
+          </p:nvPr>
+        </p:nvSpPr>
+        <p:spPr>
+          <a:xfrm>
+            <a:off x="0" y="0"/>
+            <a:ext cx="9144000" cy="685800"/>
+          </a:xfrm>
+          <a:prstGeom prst="rect">
+            <a:avLst/>
+          </a:prstGeom>
+          <a:ln>
+            <a:noFill/>
+          </a:ln>
+        </p:spPr>
+        <p:txBody>
+          <a:bodyPr anchorCtr="0" anchor="ctr" bIns="0" lIns="274300" spcFirstLastPara="1" rIns="0" wrap="square" tIns="0">
+            <a:noAutofit/>
+          </a:bodyPr>
+          <a:lstStyle>
+            <a:lvl1pPr lvl="0">
+              <a:spcBef>
+                <a:spcPts val="0"/>
+              </a:spcBef>
+              <a:spcAft>
+                <a:spcPts val="0"/>
+              </a:spcAft>
+              <a:buSzPts val="2400"/>
+              <a:buNone/>
+              <a:defRPr/>
+            </a:lvl1pPr>
+            <a:lvl2pPr lvl="1">
+              <a:spcBef>
+                <a:spcPts val="0"/>
+              </a:spcBef>
+              <a:spcAft>
+                <a:spcPts val="0"/>
+              </a:spcAft>
+              <a:buSzPts val="2800"/>
+              <a:buNone/>
+              <a:defRPr/>
+            </a:lvl2pPr>
+            <a:lvl3pPr lvl="2">
+              <a:spcBef>
+                <a:spcPts val="0"/>
+              </a:spcBef>
+              <a:spcAft>
+                <a:spcPts val="0"/>
+              </a:spcAft>
+              <a:buSzPts val="2800"/>
+              <a:buNone/>
+              <a:defRPr/>
+            </a:lvl3pPr>
+            <a:lvl4pPr lvl="3">
+              <a:spcBef>
+                <a:spcPts val="0"/>
+              </a:spcBef>
+              <a:spcAft>
+                <a:spcPts val="0"/>
+              </a:spcAft>
+              <a:buSzPts val="2800"/>
+              <a:buNone/>
+              <a:defRPr/>
+            </a:lvl4pPr>
+            <a:lvl5pPr lvl="4">
+              <a:spcBef>
+                <a:spcPts val="0"/>
+              </a:spcBef>
+              <a:spcAft>
+                <a:spcPts val="0"/>
+              </a:spcAft>
+              <a:buSzPts val="2800"/>
+              <a:buNone/>
+              <a:defRPr/>
+            </a:lvl5pPr>
+            <a:lvl6pPr lvl="5">
+              <a:spcBef>
+                <a:spcPts val="0"/>
+              </a:spcBef>
+              <a:spcAft>
+                <a:spcPts val="0"/>
+              </a:spcAft>
+              <a:buSzPts val="2800"/>
+              <a:buNone/>
+              <a:defRPr/>
+            </a:lvl6pPr>
+            <a:lvl7pPr lvl="6">
+              <a:spcBef>
+                <a:spcPts val="0"/>
+              </a:spcBef>
+              <a:spcAft>
+                <a:spcPts val="0"/>
+              </a:spcAft>
+              <a:buSzPts val="2800"/>
+              <a:buNone/>
+              <a:defRPr/>
+            </a:lvl7pPr>
+            <a:lvl8pPr lvl="7">
+              <a:spcBef>
+                <a:spcPts val="0"/>
+              </a:spcBef>
+              <a:spcAft>
+                <a:spcPts val="0"/>
+              </a:spcAft>
+              <a:buSzPts val="2800"/>
+              <a:buNone/>
+              <a:defRPr/>
+            </a:lvl8pPr>
+            <a:lvl9pPr lvl="8">
+              <a:spcBef>
+                <a:spcPts val="0"/>
+              </a:spcBef>
+              <a:spcAft>
+                <a:spcPts val="0"/>
+              </a:spcAft>
+              <a:buSzPts val="2800"/>
+              <a:buNone/>
+              <a:defRPr/>
+            </a:lvl9pPr>
+          </a:lstStyle>
+          <a:p/>
+        </p:txBody>
+      </p:sp>
+      <p:sp>
+        <p:nvSpPr>
+          <p:cNvPr id="74" name="Google Shape;74;p12"/>
+          <p:cNvSpPr txBox="1"/>
+          <p:nvPr>
+            <p:ph idx="1" type="body"/>
+          </p:nvPr>
+        </p:nvSpPr>
+        <p:spPr>
+          <a:xfrm>
+            <a:off x="274320" y="914400"/>
+            <a:ext cx="4114800" cy="4114800"/>
+          </a:xfrm>
+          <a:prstGeom prst="rect">
+            <a:avLst/>
+          </a:prstGeom>
+        </p:spPr>
+        <p:txBody>
+          <a:bodyPr anchorCtr="0" anchor="t" bIns="91425" lIns="0" spcFirstLastPara="1" rIns="91425" wrap="square" tIns="0">
+            <a:noAutofit/>
+          </a:bodyPr>
+          <a:lstStyle>
+            <a:lvl1pPr indent="-342900" lvl="0" marL="457200">
+              <a:spcBef>
+                <a:spcPts val="0"/>
+              </a:spcBef>
+              <a:spcAft>
+                <a:spcPts val="0"/>
+              </a:spcAft>
+              <a:buSzPts val="1800"/>
+              <a:buChar char="●"/>
+              <a:defRPr/>
+            </a:lvl1pPr>
+            <a:lvl2pPr indent="-317500" lvl="1" marL="914400">
+              <a:spcBef>
+                <a:spcPts val="0"/>
+              </a:spcBef>
+              <a:spcAft>
+                <a:spcPts val="0"/>
+              </a:spcAft>
+              <a:buSzPts val="1400"/>
+              <a:buChar char="○"/>
+              <a:defRPr/>
+            </a:lvl2pPr>
+            <a:lvl3pPr indent="-317500" lvl="2" marL="1371600">
+              <a:spcBef>
+                <a:spcPts val="0"/>
+              </a:spcBef>
+              <a:spcAft>
+                <a:spcPts val="0"/>
+              </a:spcAft>
+              <a:buSzPts val="1400"/>
+              <a:buChar char="■"/>
+              <a:defRPr/>
+            </a:lvl3pPr>
+            <a:lvl4pPr indent="-317500" lvl="3" marL="1828800">
+              <a:spcBef>
+                <a:spcPts val="0"/>
+              </a:spcBef>
+              <a:spcAft>
+                <a:spcPts val="0"/>
+              </a:spcAft>
+              <a:buSzPts val="1400"/>
+              <a:buChar char="●"/>
+              <a:defRPr/>
+            </a:lvl4pPr>
+            <a:lvl5pPr indent="-317500" lvl="4" marL="2286000">
+              <a:spcBef>
+                <a:spcPts val="0"/>
+              </a:spcBef>
+              <a:spcAft>
+                <a:spcPts val="0"/>
+              </a:spcAft>
+              <a:buSzPts val="1400"/>
+              <a:buChar char="○"/>
+              <a:defRPr/>
+            </a:lvl5pPr>
+            <a:lvl6pPr indent="-317500" lvl="5" marL="2743200">
+              <a:spcBef>
+                <a:spcPts val="0"/>
+              </a:spcBef>
+              <a:spcAft>
+                <a:spcPts val="0"/>
+              </a:spcAft>
+              <a:buSzPts val="1400"/>
+              <a:buChar char="■"/>
+              <a:defRPr/>
+            </a:lvl6pPr>
+            <a:lvl7pPr indent="-317500" lvl="6" marL="3200400">
+              <a:spcBef>
+                <a:spcPts val="0"/>
+              </a:spcBef>
+              <a:spcAft>
+                <a:spcPts val="0"/>
+              </a:spcAft>
+              <a:buSzPts val="1400"/>
+              <a:buChar char="●"/>
+              <a:defRPr/>
+            </a:lvl7pPr>
+            <a:lvl8pPr indent="-317500" lvl="7" marL="3657600">
+              <a:spcBef>
+                <a:spcPts val="0"/>
+              </a:spcBef>
+              <a:spcAft>
+                <a:spcPts val="0"/>
+              </a:spcAft>
+              <a:buSzPts val="1400"/>
+              <a:buChar char="○"/>
+              <a:defRPr/>
+            </a:lvl8pPr>
+            <a:lvl9pPr indent="-317500" lvl="8" marL="4114800">
+              <a:spcBef>
+                <a:spcPts val="0"/>
+              </a:spcBef>
+              <a:spcAft>
+                <a:spcPts val="0"/>
+              </a:spcAft>
+              <a:buSzPts val="1400"/>
+              <a:buChar char="■"/>
+              <a:defRPr/>
+            </a:lvl9pPr>
+          </a:lstStyle>
+          <a:p/>
+        </p:txBody>
+      </p:sp>
+      <p:sp>
+        <p:nvSpPr>
+          <p:cNvPr id="75" name="Google Shape;75;p12"/>
+          <p:cNvSpPr txBox="1"/>
+          <p:nvPr>
+            <p:ph idx="2" type="body"/>
+          </p:nvPr>
+        </p:nvSpPr>
+        <p:spPr>
+          <a:xfrm>
+            <a:off x="4846320" y="914400"/>
+            <a:ext cx="4114800" cy="4114800"/>
+          </a:xfrm>
+          <a:prstGeom prst="rect">
+            <a:avLst/>
+          </a:prstGeom>
+        </p:spPr>
+        <p:txBody>
+          <a:bodyPr anchorCtr="0" anchor="t" bIns="0" lIns="0" spcFirstLastPara="1" rIns="0" wrap="square" tIns="0">
+            <a:noAutofit/>
+          </a:bodyPr>
+          <a:lstStyle>
+            <a:lvl1pPr indent="-342900" lvl="0" marL="457200">
+              <a:spcBef>
+                <a:spcPts val="0"/>
+              </a:spcBef>
+              <a:spcAft>
+                <a:spcPts val="0"/>
+              </a:spcAft>
+              <a:buSzPts val="1800"/>
+              <a:buChar char="●"/>
+              <a:defRPr/>
+            </a:lvl1pPr>
+            <a:lvl2pPr indent="-317500" lvl="1" marL="914400">
+              <a:spcBef>
+                <a:spcPts val="0"/>
+              </a:spcBef>
+              <a:spcAft>
+                <a:spcPts val="0"/>
+              </a:spcAft>
+              <a:buSzPts val="1400"/>
+              <a:buChar char="○"/>
+              <a:defRPr/>
+            </a:lvl2pPr>
+            <a:lvl3pPr indent="-317500" lvl="2" marL="1371600">
+              <a:spcBef>
+                <a:spcPts val="0"/>
+              </a:spcBef>
+              <a:spcAft>
+                <a:spcPts val="0"/>
+              </a:spcAft>
+              <a:buSzPts val="1400"/>
+              <a:buChar char="■"/>
+              <a:defRPr/>
+            </a:lvl3pPr>
+            <a:lvl4pPr indent="-317500" lvl="3" marL="1828800">
+              <a:spcBef>
+                <a:spcPts val="0"/>
+              </a:spcBef>
+              <a:spcAft>
+                <a:spcPts val="0"/>
+              </a:spcAft>
+              <a:buSzPts val="1400"/>
+              <a:buChar char="●"/>
+              <a:defRPr/>
+            </a:lvl4pPr>
+            <a:lvl5pPr indent="-317500" lvl="4" marL="2286000">
+              <a:spcBef>
+                <a:spcPts val="0"/>
+              </a:spcBef>
+              <a:spcAft>
+                <a:spcPts val="0"/>
+              </a:spcAft>
+              <a:buSzPts val="1400"/>
+              <a:buChar char="○"/>
+              <a:defRPr/>
+            </a:lvl5pPr>
+            <a:lvl6pPr indent="-317500" lvl="5" marL="2743200">
+              <a:spcBef>
+                <a:spcPts val="0"/>
+              </a:spcBef>
+              <a:spcAft>
+                <a:spcPts val="0"/>
+              </a:spcAft>
+              <a:buSzPts val="1400"/>
+              <a:buChar char="■"/>
+              <a:defRPr/>
+            </a:lvl6pPr>
+            <a:lvl7pPr indent="-317500" lvl="6" marL="3200400">
+              <a:spcBef>
+                <a:spcPts val="0"/>
+              </a:spcBef>
+              <a:spcAft>
+                <a:spcPts val="0"/>
+              </a:spcAft>
+              <a:buSzPts val="1400"/>
+              <a:buChar char="●"/>
+              <a:defRPr/>
+            </a:lvl7pPr>
+            <a:lvl8pPr indent="-317500" lvl="7" marL="3657600">
+              <a:spcBef>
+                <a:spcPts val="0"/>
+              </a:spcBef>
+              <a:spcAft>
+                <a:spcPts val="0"/>
+              </a:spcAft>
+              <a:buSzPts val="1400"/>
+              <a:buChar char="○"/>
+              <a:defRPr/>
+            </a:lvl8pPr>
+            <a:lvl9pPr indent="-317500" lvl="8" marL="4114800">
+              <a:spcBef>
+                <a:spcPts val="0"/>
+              </a:spcBef>
+              <a:spcAft>
+                <a:spcPts val="0"/>
+              </a:spcAft>
+              <a:buSzPts val="1400"/>
+              <a:buChar char="■"/>
+              <a:defRPr/>
+            </a:lvl9pPr>
+          </a:lstStyle>
+          <a:p/>
+        </p:txBody>
+      </p:sp>
+      <p:sp>
+        <p:nvSpPr>
+          <p:cNvPr id="76" name="Google Shape;76;p12"/>
+          <p:cNvSpPr txBox="1"/>
+          <p:nvPr>
+            <p:ph idx="12" type="sldNum"/>
+          </p:nvPr>
+        </p:nvSpPr>
+        <p:spPr>
+          <a:xfrm>
+            <a:off x="7315202" y="4416550"/>
+            <a:ext cx="1828800" cy="731400"/>
+          </a:xfrm>
+          <a:prstGeom prst="rect">
+            <a:avLst/>
+          </a:prstGeom>
+        </p:spPr>
+        <p:txBody>
+          <a:bodyPr anchorCtr="0" anchor="b" bIns="91425" lIns="91425" spcFirstLastPara="1" rIns="91425" wrap="square" tIns="91425">
+            <a:noAutofit/>
+          </a:bodyPr>
+          <a:lstStyle>
+            <a:lvl1pPr lvl="0">
+              <a:buNone/>
+              <a:defRPr>
+                <a:solidFill>
+                  <a:schemeClr val="dk1"/>
+                </a:solidFill>
+              </a:defRPr>
+            </a:lvl1pPr>
+            <a:lvl2pPr lvl="1">
+              <a:buNone/>
+              <a:defRPr>
+                <a:solidFill>
+                  <a:schemeClr val="dk1"/>
+                </a:solidFill>
+              </a:defRPr>
+            </a:lvl2pPr>
+            <a:lvl3pPr lvl="2">
+              <a:buNone/>
+              <a:defRPr>
+                <a:solidFill>
+                  <a:schemeClr val="dk1"/>
+                </a:solidFill>
+              </a:defRPr>
+            </a:lvl3pPr>
+            <a:lvl4pPr lvl="3">
+              <a:buNone/>
+              <a:defRPr>
+                <a:solidFill>
+                  <a:schemeClr val="dk1"/>
+                </a:solidFill>
+              </a:defRPr>
+            </a:lvl4pPr>
+            <a:lvl5pPr lvl="4">
+              <a:buNone/>
+              <a:defRPr>
+                <a:solidFill>
+                  <a:schemeClr val="dk1"/>
+                </a:solidFill>
+              </a:defRPr>
+            </a:lvl5pPr>
+            <a:lvl6pPr lvl="5">
+              <a:buNone/>
+              <a:defRPr>
+                <a:solidFill>
+                  <a:schemeClr val="dk1"/>
+                </a:solidFill>
+              </a:defRPr>
+            </a:lvl6pPr>
+            <a:lvl7pPr lvl="6">
+              <a:buNone/>
+              <a:defRPr>
+                <a:solidFill>
+                  <a:schemeClr val="dk1"/>
+                </a:solidFill>
+              </a:defRPr>
+            </a:lvl7pPr>
+            <a:lvl8pPr lvl="7">
+              <a:buNone/>
+              <a:defRPr>
+                <a:solidFill>
+                  <a:schemeClr val="dk1"/>
+                </a:solidFill>
+              </a:defRPr>
+            </a:lvl8pPr>
+            <a:lvl9pPr lvl="8">
+              <a:buNone/>
+              <a:defRPr>
+                <a:solidFill>
+                  <a:schemeClr val="dk1"/>
+                </a:solidFill>
+              </a:defRPr>
+            </a:lvl9pPr>
+          </a:lstStyle>
+          <a:p>
+            <a:pPr indent="0" lvl="0" marL="0" rtl="0" algn="r">
+              <a:spcBef>
+                <a:spcPts val="0"/>
+              </a:spcBef>
+              <a:spcAft>
+                <a:spcPts val="0"/>
+              </a:spcAft>
+              <a:buNone/>
+            </a:pPr>
+            <a:fld id="{00000000-1234-1234-1234-123412341234}" type="slidenum">
+              <a:rPr lang="en"/>
+              <a:t>‹#›</a:t>
+            </a:fld>
+            <a:endParaRPr/>
+          </a:p>
+          <a:p>
+            <a:pPr indent="0" lvl="0" marL="0" rtl="0" algn="r">
+              <a:spcBef>
+                <a:spcPts val="0"/>
+              </a:spcBef>
+              <a:spcAft>
+                <a:spcPts val="0"/>
+              </a:spcAft>
+              <a:buClr>
+                <a:schemeClr val="dk1"/>
+              </a:buClr>
+              <a:buSzPts val="1100"/>
+              <a:buFont typeface="Arial"/>
+              <a:buNone/>
+            </a:pPr>
+            <a:r>
+              <a:rPr b="0" lang="en" sz="900" u="sng">
+                <a:solidFill>
+                  <a:schemeClr val="hlink"/>
+                </a:solidFill>
+                <a:hlinkClick r:id="rId2"/>
+              </a:rPr>
+              <a:t>https://uni1.de/amos</a:t>
+            </a:r>
+            <a:r>
+              <a:rPr b="0" lang="en" sz="900">
+                <a:solidFill>
+                  <a:schemeClr val="dk2"/>
+                </a:solidFill>
+              </a:rPr>
+              <a:t> </a:t>
+            </a:r>
+            <a:endParaRPr b="0" sz="900">
+              <a:solidFill>
+                <a:schemeClr val="dk2"/>
+              </a:solidFill>
+            </a:endParaRPr>
+          </a:p>
+        </p:txBody>
+      </p:sp>
+      <p:grpSp>
+        <p:nvGrpSpPr>
+          <p:cNvPr id="77" name="Google Shape;77;p12"/>
+          <p:cNvGrpSpPr/>
+          <p:nvPr/>
+        </p:nvGrpSpPr>
+        <p:grpSpPr>
+          <a:xfrm>
+            <a:off x="0" y="685800"/>
+            <a:ext cx="9144000" cy="91500"/>
+            <a:chOff x="0" y="2386584"/>
+            <a:chExt cx="9144000" cy="91500"/>
+          </a:xfrm>
+        </p:grpSpPr>
+        <p:sp>
+          <p:nvSpPr>
+            <p:cNvPr id="78" name="Google Shape;78;p12"/>
+            <p:cNvSpPr/>
+            <p:nvPr/>
+          </p:nvSpPr>
+          <p:spPr>
+            <a:xfrm>
+              <a:off x="0" y="2386584"/>
+              <a:ext cx="914400" cy="91500"/>
+            </a:xfrm>
+            <a:prstGeom prst="rect">
+              <a:avLst/>
+            </a:prstGeom>
+            <a:solidFill>
+              <a:schemeClr val="accent2"/>
+            </a:solidFill>
+            <a:ln>
+              <a:noFill/>
+            </a:ln>
+          </p:spPr>
+          <p:txBody>
+            <a:bodyPr anchorCtr="0" anchor="ctr" bIns="91425" lIns="91425" spcFirstLastPara="1" rIns="91425" wrap="square" tIns="91425">
+              <a:noAutofit/>
+            </a:bodyPr>
+            <a:lstStyle/>
+            <a:p>
+              <a:pPr indent="0" lvl="0" marL="0" rtl="0" algn="l">
+                <a:spcBef>
+                  <a:spcPts val="0"/>
+                </a:spcBef>
+                <a:spcAft>
+                  <a:spcPts val="0"/>
+                </a:spcAft>
+                <a:buNone/>
+              </a:pPr>
+              <a:r>
+                <a:t/>
+              </a:r>
+              <a:endParaRPr/>
+            </a:p>
+          </p:txBody>
+        </p:sp>
+        <p:sp>
+          <p:nvSpPr>
+            <p:cNvPr id="79" name="Google Shape;79;p12"/>
+            <p:cNvSpPr/>
+            <p:nvPr/>
+          </p:nvSpPr>
+          <p:spPr>
+            <a:xfrm>
+              <a:off x="914400" y="2386584"/>
+              <a:ext cx="1828800" cy="91500"/>
+            </a:xfrm>
+            <a:prstGeom prst="rect">
+              <a:avLst/>
+            </a:prstGeom>
+            <a:solidFill>
+              <a:schemeClr val="accent3"/>
+            </a:solidFill>
+            <a:ln>
+              <a:noFill/>
+            </a:ln>
+          </p:spPr>
+          <p:txBody>
+            <a:bodyPr anchorCtr="0" anchor="ctr" bIns="91425" lIns="91425" spcFirstLastPara="1" rIns="91425" wrap="square" tIns="91425">
+              <a:noAutofit/>
+            </a:bodyPr>
+            <a:lstStyle/>
+            <a:p>
+              <a:pPr indent="0" lvl="0" marL="0" rtl="0" algn="l">
+                <a:spcBef>
+                  <a:spcPts val="0"/>
+                </a:spcBef>
+                <a:spcAft>
+                  <a:spcPts val="0"/>
+                </a:spcAft>
+                <a:buNone/>
+              </a:pPr>
+              <a:r>
+                <a:t/>
+              </a:r>
+              <a:endParaRPr/>
+            </a:p>
+          </p:txBody>
+        </p:sp>
+        <p:sp>
+          <p:nvSpPr>
+            <p:cNvPr id="80" name="Google Shape;80;p12"/>
+            <p:cNvSpPr/>
+            <p:nvPr/>
+          </p:nvSpPr>
+          <p:spPr>
+            <a:xfrm>
+              <a:off x="2743200" y="2386584"/>
+              <a:ext cx="6400800" cy="91500"/>
+            </a:xfrm>
+            <a:prstGeom prst="rect">
+              <a:avLst/>
+            </a:prstGeom>
+            <a:solidFill>
+              <a:schemeClr val="accent4"/>
+            </a:solidFill>
+            <a:ln>
+              <a:noFill/>
+            </a:ln>
+          </p:spPr>
+          <p:txBody>
+            <a:bodyPr anchorCtr="0" anchor="ctr" bIns="91425" lIns="91425" spcFirstLastPara="1" rIns="91425" wrap="square" tIns="91425">
+              <a:noAutofit/>
+            </a:bodyPr>
+            <a:lstStyle/>
+            <a:p>
+              <a:pPr indent="0" lvl="0" marL="0" rtl="0" algn="l">
+                <a:spcBef>
+                  <a:spcPts val="0"/>
+                </a:spcBef>
+                <a:spcAft>
+                  <a:spcPts val="0"/>
+                </a:spcAft>
+                <a:buNone/>
+              </a:pPr>
+              <a:r>
+                <a:t/>
+              </a:r>
+              <a:endParaRPr/>
+            </a:p>
+          </p:txBody>
+        </p:sp>
+      </p:grpSp>
+    </p:spTree>
+  </p:cSld>
+  <p:clrMapOvr>
+    <a:masterClrMapping/>
+  </p:clrMapOvr>
+</p:sldLayout>
+</file>
+
+<file path=ppt/slideLayouts/slideLayout11.xml><?xml version="1.0" encoding="utf-8"?>
+<p:sldLayout xmlns:a="http://schemas.openxmlformats.org/drawingml/2006/main" xmlns:r="http://schemas.openxmlformats.org/officeDocument/2006/relationships" xmlns:mc="http://schemas.openxmlformats.org/markup-compatibility/2006" xmlns:mv="urn:schemas-microsoft-com:mac:vml" xmlns:p="http://schemas.openxmlformats.org/presentationml/2006/main" xmlns:c="http://schemas.openxmlformats.org/drawingml/2006/chart" xmlns:dgm="http://schemas.openxmlformats.org/drawingml/2006/diagram" xmlns:o="urn:schemas-microsoft-com:office:office" xmlns:v="urn:schemas-microsoft-com:vml" xmlns:pvml="urn:schemas-microsoft-com:office:powerpoint" xmlns:com="http://schemas.openxmlformats.org/drawingml/2006/compatibility" xmlns:p14="http://schemas.microsoft.com/office/powerpoint/2010/main" xmlns:p15="http://schemas.microsoft.com/office/powerpoint/2012/main" xmlns:ahyp="http://schemas.microsoft.com/office/drawing/2018/hyperlinkcolor" matchingName="Title only" type="titleOnly">
+  <p:cSld name="TITLE_ONLY">
+    <p:spTree>
+      <p:nvGrpSpPr>
+        <p:cNvPr id="81" name="Shape 81"/>
+        <p:cNvGrpSpPr/>
+        <p:nvPr/>
+      </p:nvGrpSpPr>
+      <p:grpSpPr>
+        <a:xfrm>
+          <a:off x="0" y="0"/>
+          <a:ext cx="0" cy="0"/>
+          <a:chOff x="0" y="0"/>
+          <a:chExt cx="0" cy="0"/>
+        </a:xfrm>
+      </p:grpSpPr>
+      <p:sp>
+        <p:nvSpPr>
+          <p:cNvPr id="82" name="Google Shape;82;p13"/>
+          <p:cNvSpPr txBox="1"/>
+          <p:nvPr>
+            <p:ph type="title"/>
+          </p:nvPr>
+        </p:nvSpPr>
+        <p:spPr>
+          <a:xfrm>
+            <a:off x="0" y="0"/>
+            <a:ext cx="9144000" cy="685800"/>
+          </a:xfrm>
+          <a:prstGeom prst="rect">
+            <a:avLst/>
+          </a:prstGeom>
+        </p:spPr>
+        <p:txBody>
+          <a:bodyPr anchorCtr="0" anchor="ctr" bIns="0" lIns="274300" spcFirstLastPara="1" rIns="0" wrap="square" tIns="0">
+            <a:noAutofit/>
+          </a:bodyPr>
+          <a:lstStyle>
+            <a:lvl1pPr lvl="0">
+              <a:spcBef>
+                <a:spcPts val="0"/>
+              </a:spcBef>
+              <a:spcAft>
+                <a:spcPts val="0"/>
+              </a:spcAft>
+              <a:buSzPts val="2400"/>
+              <a:buNone/>
+              <a:defRPr/>
+            </a:lvl1pPr>
+            <a:lvl2pPr lvl="1">
+              <a:spcBef>
+                <a:spcPts val="0"/>
+              </a:spcBef>
+              <a:spcAft>
+                <a:spcPts val="0"/>
+              </a:spcAft>
+              <a:buSzPts val="2800"/>
+              <a:buNone/>
+              <a:defRPr/>
+            </a:lvl2pPr>
+            <a:lvl3pPr lvl="2">
+              <a:spcBef>
+                <a:spcPts val="0"/>
+              </a:spcBef>
+              <a:spcAft>
+                <a:spcPts val="0"/>
+              </a:spcAft>
+              <a:buSzPts val="2800"/>
+              <a:buNone/>
+              <a:defRPr/>
+            </a:lvl3pPr>
+            <a:lvl4pPr lvl="3">
+              <a:spcBef>
+                <a:spcPts val="0"/>
+              </a:spcBef>
+              <a:spcAft>
+                <a:spcPts val="0"/>
+              </a:spcAft>
+              <a:buSzPts val="2800"/>
+              <a:buNone/>
+              <a:defRPr/>
+            </a:lvl4pPr>
+            <a:lvl5pPr lvl="4">
+              <a:spcBef>
+                <a:spcPts val="0"/>
+              </a:spcBef>
+              <a:spcAft>
+                <a:spcPts val="0"/>
+              </a:spcAft>
+              <a:buSzPts val="2800"/>
+              <a:buNone/>
+              <a:defRPr/>
+            </a:lvl5pPr>
+            <a:lvl6pPr lvl="5">
+              <a:spcBef>
+                <a:spcPts val="0"/>
+              </a:spcBef>
+              <a:spcAft>
+                <a:spcPts val="0"/>
+              </a:spcAft>
+              <a:buSzPts val="2800"/>
+              <a:buNone/>
+              <a:defRPr/>
+            </a:lvl6pPr>
+            <a:lvl7pPr lvl="6">
+              <a:spcBef>
+                <a:spcPts val="0"/>
+              </a:spcBef>
+              <a:spcAft>
+                <a:spcPts val="0"/>
+              </a:spcAft>
+              <a:buSzPts val="2800"/>
+              <a:buNone/>
+              <a:defRPr/>
+            </a:lvl7pPr>
+            <a:lvl8pPr lvl="7">
+              <a:spcBef>
+                <a:spcPts val="0"/>
+              </a:spcBef>
+              <a:spcAft>
+                <a:spcPts val="0"/>
+              </a:spcAft>
+              <a:buSzPts val="2800"/>
+              <a:buNone/>
+              <a:defRPr/>
+            </a:lvl8pPr>
+            <a:lvl9pPr lvl="8">
+              <a:spcBef>
+                <a:spcPts val="0"/>
+              </a:spcBef>
+              <a:spcAft>
+                <a:spcPts val="0"/>
+              </a:spcAft>
+              <a:buSzPts val="2800"/>
+              <a:buNone/>
+              <a:defRPr/>
+            </a:lvl9pPr>
+          </a:lstStyle>
+          <a:p/>
+        </p:txBody>
+      </p:sp>
+      <p:sp>
+        <p:nvSpPr>
+          <p:cNvPr id="83" name="Google Shape;83;p13"/>
+          <p:cNvSpPr txBox="1"/>
+          <p:nvPr>
+            <p:ph idx="12" type="sldNum"/>
+          </p:nvPr>
+        </p:nvSpPr>
+        <p:spPr>
+          <a:xfrm>
+            <a:off x="7315202" y="4416550"/>
+            <a:ext cx="1828800" cy="731400"/>
+          </a:xfrm>
+          <a:prstGeom prst="rect">
+            <a:avLst/>
+          </a:prstGeom>
+        </p:spPr>
+        <p:txBody>
+          <a:bodyPr anchorCtr="0" anchor="b" bIns="91425" lIns="91425" spcFirstLastPara="1" rIns="91425" wrap="square" tIns="91425">
+            <a:noAutofit/>
+          </a:bodyPr>
+          <a:lstStyle>
+            <a:lvl1pPr lvl="0" rtl="0">
+              <a:buNone/>
+              <a:defRPr>
+                <a:solidFill>
+                  <a:schemeClr val="dk1"/>
+                </a:solidFill>
+              </a:defRPr>
+            </a:lvl1pPr>
+            <a:lvl2pPr lvl="1" rtl="0">
+              <a:buNone/>
+              <a:defRPr>
+                <a:solidFill>
+                  <a:schemeClr val="dk1"/>
+                </a:solidFill>
+              </a:defRPr>
+            </a:lvl2pPr>
+            <a:lvl3pPr lvl="2" rtl="0">
+              <a:buNone/>
+              <a:defRPr>
+                <a:solidFill>
+                  <a:schemeClr val="dk1"/>
+                </a:solidFill>
+              </a:defRPr>
+            </a:lvl3pPr>
+            <a:lvl4pPr lvl="3" rtl="0">
+              <a:buNone/>
+              <a:defRPr>
+                <a:solidFill>
+                  <a:schemeClr val="dk1"/>
+                </a:solidFill>
+              </a:defRPr>
+            </a:lvl4pPr>
+            <a:lvl5pPr lvl="4" rtl="0">
+              <a:buNone/>
+              <a:defRPr>
+                <a:solidFill>
+                  <a:schemeClr val="dk1"/>
+                </a:solidFill>
+              </a:defRPr>
+            </a:lvl5pPr>
+            <a:lvl6pPr lvl="5" rtl="0">
+              <a:buNone/>
+              <a:defRPr>
+                <a:solidFill>
+                  <a:schemeClr val="dk1"/>
+                </a:solidFill>
+              </a:defRPr>
+            </a:lvl6pPr>
+            <a:lvl7pPr lvl="6" rtl="0">
+              <a:buNone/>
+              <a:defRPr>
+                <a:solidFill>
+                  <a:schemeClr val="dk1"/>
+                </a:solidFill>
+              </a:defRPr>
+            </a:lvl7pPr>
+            <a:lvl8pPr lvl="7" rtl="0">
+              <a:buNone/>
+              <a:defRPr>
+                <a:solidFill>
+                  <a:schemeClr val="dk1"/>
+                </a:solidFill>
+              </a:defRPr>
+            </a:lvl8pPr>
+            <a:lvl9pPr lvl="8" rtl="0">
+              <a:buNone/>
+              <a:defRPr>
+                <a:solidFill>
+                  <a:schemeClr val="dk1"/>
+                </a:solidFill>
+              </a:defRPr>
+            </a:lvl9pPr>
+          </a:lstStyle>
+          <a:p>
+            <a:pPr indent="0" lvl="0" marL="0" rtl="0" algn="r">
+              <a:spcBef>
+                <a:spcPts val="0"/>
+              </a:spcBef>
+              <a:spcAft>
+                <a:spcPts val="0"/>
+              </a:spcAft>
+              <a:buNone/>
+            </a:pPr>
+            <a:fld id="{00000000-1234-1234-1234-123412341234}" type="slidenum">
+              <a:rPr lang="en"/>
+              <a:t>‹#›</a:t>
+            </a:fld>
+            <a:endParaRPr/>
+          </a:p>
+          <a:p>
+            <a:pPr indent="0" lvl="0" marL="0" rtl="0" algn="r">
+              <a:spcBef>
+                <a:spcPts val="0"/>
+              </a:spcBef>
+              <a:spcAft>
+                <a:spcPts val="0"/>
+              </a:spcAft>
+              <a:buNone/>
+            </a:pPr>
+            <a:r>
+              <a:rPr b="0" lang="en" sz="900" u="sng">
+                <a:solidFill>
+                  <a:schemeClr val="hlink"/>
+                </a:solidFill>
+                <a:hlinkClick r:id="rId2"/>
+              </a:rPr>
+              <a:t>https://uni1.de/amos</a:t>
+            </a:r>
+            <a:r>
+              <a:rPr b="0" lang="en" sz="900">
+                <a:solidFill>
+                  <a:schemeClr val="dk2"/>
+                </a:solidFill>
+              </a:rPr>
+              <a:t> </a:t>
+            </a:r>
+            <a:endParaRPr>
+              <a:solidFill>
+                <a:schemeClr val="dk2"/>
+              </a:solidFill>
+            </a:endParaRPr>
+          </a:p>
+        </p:txBody>
+      </p:sp>
+      <p:grpSp>
+        <p:nvGrpSpPr>
+          <p:cNvPr id="84" name="Google Shape;84;p13"/>
+          <p:cNvGrpSpPr/>
+          <p:nvPr/>
+        </p:nvGrpSpPr>
+        <p:grpSpPr>
+          <a:xfrm>
+            <a:off x="0" y="685800"/>
+            <a:ext cx="9144000" cy="91500"/>
+            <a:chOff x="0" y="2386584"/>
+            <a:chExt cx="9144000" cy="91500"/>
+          </a:xfrm>
+        </p:grpSpPr>
+        <p:sp>
+          <p:nvSpPr>
+            <p:cNvPr id="85" name="Google Shape;85;p13"/>
+            <p:cNvSpPr/>
+            <p:nvPr/>
+          </p:nvSpPr>
+          <p:spPr>
+            <a:xfrm>
+              <a:off x="0" y="2386584"/>
+              <a:ext cx="914400" cy="91500"/>
+            </a:xfrm>
+            <a:prstGeom prst="rect">
+              <a:avLst/>
+            </a:prstGeom>
+            <a:solidFill>
+              <a:schemeClr val="accent2"/>
+            </a:solidFill>
+            <a:ln>
+              <a:noFill/>
+            </a:ln>
+          </p:spPr>
+          <p:txBody>
+            <a:bodyPr anchorCtr="0" anchor="ctr" bIns="91425" lIns="91425" spcFirstLastPara="1" rIns="91425" wrap="square" tIns="91425">
+              <a:noAutofit/>
+            </a:bodyPr>
+            <a:lstStyle/>
+            <a:p>
+              <a:pPr indent="0" lvl="0" marL="0" rtl="0" algn="l">
+                <a:spcBef>
+                  <a:spcPts val="0"/>
+                </a:spcBef>
+                <a:spcAft>
+                  <a:spcPts val="0"/>
+                </a:spcAft>
+                <a:buNone/>
+              </a:pPr>
+              <a:r>
+                <a:t/>
+              </a:r>
+              <a:endParaRPr/>
+            </a:p>
+          </p:txBody>
+        </p:sp>
+        <p:sp>
+          <p:nvSpPr>
+            <p:cNvPr id="86" name="Google Shape;86;p13"/>
+            <p:cNvSpPr/>
+            <p:nvPr/>
+          </p:nvSpPr>
+          <p:spPr>
+            <a:xfrm>
+              <a:off x="914400" y="2386584"/>
+              <a:ext cx="1828800" cy="91500"/>
+            </a:xfrm>
+            <a:prstGeom prst="rect">
+              <a:avLst/>
+            </a:prstGeom>
+            <a:solidFill>
+              <a:schemeClr val="accent3"/>
+            </a:solidFill>
+            <a:ln>
+              <a:noFill/>
+            </a:ln>
+          </p:spPr>
+          <p:txBody>
+            <a:bodyPr anchorCtr="0" anchor="ctr" bIns="91425" lIns="91425" spcFirstLastPara="1" rIns="91425" wrap="square" tIns="91425">
+              <a:noAutofit/>
+            </a:bodyPr>
+            <a:lstStyle/>
+            <a:p>
+              <a:pPr indent="0" lvl="0" marL="0" rtl="0" algn="l">
+                <a:spcBef>
+                  <a:spcPts val="0"/>
+                </a:spcBef>
+                <a:spcAft>
+                  <a:spcPts val="0"/>
+                </a:spcAft>
+                <a:buNone/>
+              </a:pPr>
+              <a:r>
+                <a:t/>
+              </a:r>
+              <a:endParaRPr/>
+            </a:p>
+          </p:txBody>
+        </p:sp>
+        <p:sp>
+          <p:nvSpPr>
+            <p:cNvPr id="87" name="Google Shape;87;p13"/>
+            <p:cNvSpPr/>
+            <p:nvPr/>
+          </p:nvSpPr>
+          <p:spPr>
+            <a:xfrm>
+              <a:off x="2743200" y="2386584"/>
+              <a:ext cx="6400800" cy="91500"/>
+            </a:xfrm>
+            <a:prstGeom prst="rect">
+              <a:avLst/>
+            </a:prstGeom>
+            <a:solidFill>
+              <a:schemeClr val="accent4"/>
+            </a:solidFill>
+            <a:ln>
+              <a:noFill/>
+            </a:ln>
+          </p:spPr>
+          <p:txBody>
+            <a:bodyPr anchorCtr="0" anchor="ctr" bIns="91425" lIns="91425" spcFirstLastPara="1" rIns="91425" wrap="square" tIns="91425">
+              <a:noAutofit/>
+            </a:bodyPr>
+            <a:lstStyle/>
+            <a:p>
+              <a:pPr indent="0" lvl="0" marL="0" rtl="0" algn="l">
+                <a:spcBef>
+                  <a:spcPts val="0"/>
+                </a:spcBef>
+                <a:spcAft>
+                  <a:spcPts val="0"/>
+                </a:spcAft>
+                <a:buNone/>
+              </a:pPr>
+              <a:r>
+                <a:t/>
+              </a:r>
+              <a:endParaRPr/>
+            </a:p>
+          </p:txBody>
+        </p:sp>
+      </p:grpSp>
+    </p:spTree>
+  </p:cSld>
+  <p:clrMapOvr>
+    <a:masterClrMapping/>
+  </p:clrMapOvr>
+</p:sldLayout>
+</file>
+
+<file path=ppt/slideLayouts/slideLayout12.xml><?xml version="1.0" encoding="utf-8"?>
+<p:sldLayout xmlns:a="http://schemas.openxmlformats.org/drawingml/2006/main" xmlns:r="http://schemas.openxmlformats.org/officeDocument/2006/relationships" xmlns:mc="http://schemas.openxmlformats.org/markup-compatibility/2006" xmlns:mv="urn:schemas-microsoft-com:mac:vml" xmlns:p="http://schemas.openxmlformats.org/presentationml/2006/main" xmlns:c="http://schemas.openxmlformats.org/drawingml/2006/chart" xmlns:dgm="http://schemas.openxmlformats.org/drawingml/2006/diagram" xmlns:o="urn:schemas-microsoft-com:office:office" xmlns:v="urn:schemas-microsoft-com:vml" xmlns:pvml="urn:schemas-microsoft-com:office:powerpoint" xmlns:com="http://schemas.openxmlformats.org/drawingml/2006/compatibility" xmlns:p14="http://schemas.microsoft.com/office/powerpoint/2010/main" xmlns:p15="http://schemas.microsoft.com/office/powerpoint/2012/main" xmlns:ahyp="http://schemas.microsoft.com/office/drawing/2018/hyperlinkcolor" matchingName="Blank" type="blank">
+  <p:cSld name="BLANK">
+    <p:spTree>
+      <p:nvGrpSpPr>
+        <p:cNvPr id="88" name="Shape 88"/>
+        <p:cNvGrpSpPr/>
+        <p:nvPr/>
+      </p:nvGrpSpPr>
+      <p:grpSpPr>
+        <a:xfrm>
+          <a:off x="0" y="0"/>
+          <a:ext cx="0" cy="0"/>
+          <a:chOff x="0" y="0"/>
+          <a:chExt cx="0" cy="0"/>
+        </a:xfrm>
+      </p:grpSpPr>
     </p:spTree>
   </p:cSld>
   <p:clrMapOvr>
@@ -9345,6 +10509,1319 @@
           <a:chExt cx="0" cy="0"/>
         </a:xfrm>
       </p:grpSpPr>
+    </p:spTree>
+  </p:cSld>
+  <p:clrMapOvr>
+    <a:masterClrMapping/>
+  </p:clrMapOvr>
+</p:sldLayout>
+</file>
+
+<file path=ppt/slideLayouts/slideLayout7.xml><?xml version="1.0" encoding="utf-8"?>
+<p:sldLayout xmlns:a="http://schemas.openxmlformats.org/drawingml/2006/main" xmlns:r="http://schemas.openxmlformats.org/officeDocument/2006/relationships" xmlns:mc="http://schemas.openxmlformats.org/markup-compatibility/2006" xmlns:mv="urn:schemas-microsoft-com:mac:vml" xmlns:p="http://schemas.openxmlformats.org/presentationml/2006/main" xmlns:c="http://schemas.openxmlformats.org/drawingml/2006/chart" xmlns:dgm="http://schemas.openxmlformats.org/drawingml/2006/diagram" xmlns:o="urn:schemas-microsoft-com:office:office" xmlns:v="urn:schemas-microsoft-com:vml" xmlns:pvml="urn:schemas-microsoft-com:office:powerpoint" xmlns:com="http://schemas.openxmlformats.org/drawingml/2006/compatibility" xmlns:p14="http://schemas.microsoft.com/office/powerpoint/2010/main" xmlns:p15="http://schemas.microsoft.com/office/powerpoint/2012/main" xmlns:ahyp="http://schemas.microsoft.com/office/drawing/2018/hyperlinkcolor" matchingName="Title slide" type="title">
+  <p:cSld name="TITLE">
+    <p:spTree>
+      <p:nvGrpSpPr>
+        <p:cNvPr id="51" name="Shape 51"/>
+        <p:cNvGrpSpPr/>
+        <p:nvPr/>
+      </p:nvGrpSpPr>
+      <p:grpSpPr>
+        <a:xfrm>
+          <a:off x="0" y="0"/>
+          <a:ext cx="0" cy="0"/>
+          <a:chOff x="0" y="0"/>
+          <a:chExt cx="0" cy="0"/>
+        </a:xfrm>
+      </p:grpSpPr>
+      <p:sp>
+        <p:nvSpPr>
+          <p:cNvPr id="52" name="Google Shape;52;p9"/>
+          <p:cNvSpPr txBox="1"/>
+          <p:nvPr>
+            <p:ph type="ctrTitle"/>
+          </p:nvPr>
+        </p:nvSpPr>
+        <p:spPr>
+          <a:xfrm>
+            <a:off x="0" y="0"/>
+            <a:ext cx="9144000" cy="2388900"/>
+          </a:xfrm>
+          <a:prstGeom prst="rect">
+            <a:avLst/>
+          </a:prstGeom>
+          <a:noFill/>
+        </p:spPr>
+        <p:txBody>
+          <a:bodyPr anchorCtr="0" anchor="b" bIns="274300" lIns="91425" spcFirstLastPara="1" rIns="91425" wrap="square" tIns="91425">
+            <a:noAutofit/>
+          </a:bodyPr>
+          <a:lstStyle>
+            <a:lvl1pPr lvl="0" algn="ctr">
+              <a:spcBef>
+                <a:spcPts val="0"/>
+              </a:spcBef>
+              <a:spcAft>
+                <a:spcPts val="0"/>
+              </a:spcAft>
+              <a:buClr>
+                <a:schemeClr val="dk1"/>
+              </a:buClr>
+              <a:buSzPts val="4200"/>
+              <a:buNone/>
+              <a:defRPr sz="4200">
+                <a:solidFill>
+                  <a:schemeClr val="dk1"/>
+                </a:solidFill>
+              </a:defRPr>
+            </a:lvl1pPr>
+            <a:lvl2pPr lvl="1" algn="ctr">
+              <a:spcBef>
+                <a:spcPts val="0"/>
+              </a:spcBef>
+              <a:spcAft>
+                <a:spcPts val="0"/>
+              </a:spcAft>
+              <a:buSzPts val="5200"/>
+              <a:buNone/>
+              <a:defRPr sz="5200"/>
+            </a:lvl2pPr>
+            <a:lvl3pPr lvl="2" algn="ctr">
+              <a:spcBef>
+                <a:spcPts val="0"/>
+              </a:spcBef>
+              <a:spcAft>
+                <a:spcPts val="0"/>
+              </a:spcAft>
+              <a:buSzPts val="5200"/>
+              <a:buNone/>
+              <a:defRPr sz="5200"/>
+            </a:lvl3pPr>
+            <a:lvl4pPr lvl="3" algn="ctr">
+              <a:spcBef>
+                <a:spcPts val="0"/>
+              </a:spcBef>
+              <a:spcAft>
+                <a:spcPts val="0"/>
+              </a:spcAft>
+              <a:buSzPts val="5200"/>
+              <a:buNone/>
+              <a:defRPr sz="5200"/>
+            </a:lvl4pPr>
+            <a:lvl5pPr lvl="4" algn="ctr">
+              <a:spcBef>
+                <a:spcPts val="0"/>
+              </a:spcBef>
+              <a:spcAft>
+                <a:spcPts val="0"/>
+              </a:spcAft>
+              <a:buSzPts val="5200"/>
+              <a:buNone/>
+              <a:defRPr sz="5200"/>
+            </a:lvl5pPr>
+            <a:lvl6pPr lvl="5" algn="ctr">
+              <a:spcBef>
+                <a:spcPts val="0"/>
+              </a:spcBef>
+              <a:spcAft>
+                <a:spcPts val="0"/>
+              </a:spcAft>
+              <a:buSzPts val="5200"/>
+              <a:buNone/>
+              <a:defRPr sz="5200"/>
+            </a:lvl6pPr>
+            <a:lvl7pPr lvl="6" algn="ctr">
+              <a:spcBef>
+                <a:spcPts val="0"/>
+              </a:spcBef>
+              <a:spcAft>
+                <a:spcPts val="0"/>
+              </a:spcAft>
+              <a:buSzPts val="5200"/>
+              <a:buNone/>
+              <a:defRPr sz="5200"/>
+            </a:lvl7pPr>
+            <a:lvl8pPr lvl="7" algn="ctr">
+              <a:spcBef>
+                <a:spcPts val="0"/>
+              </a:spcBef>
+              <a:spcAft>
+                <a:spcPts val="0"/>
+              </a:spcAft>
+              <a:buSzPts val="5200"/>
+              <a:buNone/>
+              <a:defRPr sz="5200"/>
+            </a:lvl8pPr>
+            <a:lvl9pPr lvl="8" algn="ctr">
+              <a:spcBef>
+                <a:spcPts val="0"/>
+              </a:spcBef>
+              <a:spcAft>
+                <a:spcPts val="0"/>
+              </a:spcAft>
+              <a:buSzPts val="5200"/>
+              <a:buNone/>
+              <a:defRPr sz="5200"/>
+            </a:lvl9pPr>
+          </a:lstStyle>
+          <a:p/>
+        </p:txBody>
+      </p:sp>
+      <p:sp>
+        <p:nvSpPr>
+          <p:cNvPr id="53" name="Google Shape;53;p9"/>
+          <p:cNvSpPr txBox="1"/>
+          <p:nvPr>
+            <p:ph idx="1" type="subTitle"/>
+          </p:nvPr>
+        </p:nvSpPr>
+        <p:spPr>
+          <a:xfrm>
+            <a:off x="0" y="2569475"/>
+            <a:ext cx="9144000" cy="2574000"/>
+          </a:xfrm>
+          <a:prstGeom prst="rect">
+            <a:avLst/>
+          </a:prstGeom>
+        </p:spPr>
+        <p:txBody>
+          <a:bodyPr anchorCtr="0" anchor="t" bIns="91425" lIns="91425" spcFirstLastPara="1" rIns="91425" wrap="square" tIns="274300">
+            <a:noAutofit/>
+          </a:bodyPr>
+          <a:lstStyle>
+            <a:lvl1pPr lvl="0" algn="ctr">
+              <a:lnSpc>
+                <a:spcPct val="115000"/>
+              </a:lnSpc>
+              <a:spcBef>
+                <a:spcPts val="0"/>
+              </a:spcBef>
+              <a:spcAft>
+                <a:spcPts val="0"/>
+              </a:spcAft>
+              <a:buSzPts val="3000"/>
+              <a:buNone/>
+              <a:defRPr sz="3000"/>
+            </a:lvl1pPr>
+            <a:lvl2pPr lvl="1" algn="ctr">
+              <a:lnSpc>
+                <a:spcPct val="115000"/>
+              </a:lnSpc>
+              <a:spcBef>
+                <a:spcPts val="0"/>
+              </a:spcBef>
+              <a:spcAft>
+                <a:spcPts val="0"/>
+              </a:spcAft>
+              <a:buSzPts val="3200"/>
+              <a:buNone/>
+              <a:defRPr sz="3200"/>
+            </a:lvl2pPr>
+            <a:lvl3pPr lvl="2" algn="ctr">
+              <a:lnSpc>
+                <a:spcPct val="115000"/>
+              </a:lnSpc>
+              <a:spcBef>
+                <a:spcPts val="0"/>
+              </a:spcBef>
+              <a:spcAft>
+                <a:spcPts val="0"/>
+              </a:spcAft>
+              <a:buSzPts val="3200"/>
+              <a:buNone/>
+              <a:defRPr sz="3200"/>
+            </a:lvl3pPr>
+            <a:lvl4pPr lvl="3" algn="ctr">
+              <a:lnSpc>
+                <a:spcPct val="115000"/>
+              </a:lnSpc>
+              <a:spcBef>
+                <a:spcPts val="0"/>
+              </a:spcBef>
+              <a:spcAft>
+                <a:spcPts val="0"/>
+              </a:spcAft>
+              <a:buSzPts val="3200"/>
+              <a:buNone/>
+              <a:defRPr sz="3200"/>
+            </a:lvl4pPr>
+            <a:lvl5pPr lvl="4" algn="ctr">
+              <a:lnSpc>
+                <a:spcPct val="115000"/>
+              </a:lnSpc>
+              <a:spcBef>
+                <a:spcPts val="0"/>
+              </a:spcBef>
+              <a:spcAft>
+                <a:spcPts val="0"/>
+              </a:spcAft>
+              <a:buSzPts val="3200"/>
+              <a:buNone/>
+              <a:defRPr sz="3200"/>
+            </a:lvl5pPr>
+            <a:lvl6pPr lvl="5" algn="ctr">
+              <a:lnSpc>
+                <a:spcPct val="115000"/>
+              </a:lnSpc>
+              <a:spcBef>
+                <a:spcPts val="0"/>
+              </a:spcBef>
+              <a:spcAft>
+                <a:spcPts val="0"/>
+              </a:spcAft>
+              <a:buSzPts val="3200"/>
+              <a:buNone/>
+              <a:defRPr sz="3200"/>
+            </a:lvl6pPr>
+            <a:lvl7pPr lvl="6" algn="ctr">
+              <a:lnSpc>
+                <a:spcPct val="115000"/>
+              </a:lnSpc>
+              <a:spcBef>
+                <a:spcPts val="0"/>
+              </a:spcBef>
+              <a:spcAft>
+                <a:spcPts val="0"/>
+              </a:spcAft>
+              <a:buSzPts val="3200"/>
+              <a:buNone/>
+              <a:defRPr sz="3200"/>
+            </a:lvl7pPr>
+            <a:lvl8pPr lvl="7" algn="ctr">
+              <a:lnSpc>
+                <a:spcPct val="115000"/>
+              </a:lnSpc>
+              <a:spcBef>
+                <a:spcPts val="0"/>
+              </a:spcBef>
+              <a:spcAft>
+                <a:spcPts val="0"/>
+              </a:spcAft>
+              <a:buSzPts val="3200"/>
+              <a:buNone/>
+              <a:defRPr sz="3200"/>
+            </a:lvl8pPr>
+            <a:lvl9pPr lvl="8" algn="ctr">
+              <a:lnSpc>
+                <a:spcPct val="115000"/>
+              </a:lnSpc>
+              <a:spcBef>
+                <a:spcPts val="0"/>
+              </a:spcBef>
+              <a:spcAft>
+                <a:spcPts val="0"/>
+              </a:spcAft>
+              <a:buSzPts val="3200"/>
+              <a:buNone/>
+              <a:defRPr sz="3200"/>
+            </a:lvl9pPr>
+          </a:lstStyle>
+          <a:p/>
+        </p:txBody>
+      </p:sp>
+      <p:grpSp>
+        <p:nvGrpSpPr>
+          <p:cNvPr id="54" name="Google Shape;54;p9"/>
+          <p:cNvGrpSpPr/>
+          <p:nvPr/>
+        </p:nvGrpSpPr>
+        <p:grpSpPr>
+          <a:xfrm>
+            <a:off x="0" y="2388810"/>
+            <a:ext cx="9144000" cy="183000"/>
+            <a:chOff x="0" y="2388810"/>
+            <a:chExt cx="9144000" cy="183000"/>
+          </a:xfrm>
+        </p:grpSpPr>
+        <p:sp>
+          <p:nvSpPr>
+            <p:cNvPr id="55" name="Google Shape;55;p9"/>
+            <p:cNvSpPr/>
+            <p:nvPr/>
+          </p:nvSpPr>
+          <p:spPr>
+            <a:xfrm>
+              <a:off x="0" y="2388810"/>
+              <a:ext cx="914400" cy="183000"/>
+            </a:xfrm>
+            <a:prstGeom prst="rect">
+              <a:avLst/>
+            </a:prstGeom>
+            <a:solidFill>
+              <a:schemeClr val="accent2"/>
+            </a:solidFill>
+            <a:ln>
+              <a:noFill/>
+            </a:ln>
+          </p:spPr>
+          <p:txBody>
+            <a:bodyPr anchorCtr="0" anchor="ctr" bIns="91425" lIns="91425" spcFirstLastPara="1" rIns="91425" wrap="square" tIns="91425">
+              <a:noAutofit/>
+            </a:bodyPr>
+            <a:lstStyle/>
+            <a:p>
+              <a:pPr indent="0" lvl="0" marL="0" rtl="0" algn="l">
+                <a:spcBef>
+                  <a:spcPts val="0"/>
+                </a:spcBef>
+                <a:spcAft>
+                  <a:spcPts val="0"/>
+                </a:spcAft>
+                <a:buNone/>
+              </a:pPr>
+              <a:r>
+                <a:t/>
+              </a:r>
+              <a:endParaRPr/>
+            </a:p>
+          </p:txBody>
+        </p:sp>
+        <p:sp>
+          <p:nvSpPr>
+            <p:cNvPr id="56" name="Google Shape;56;p9"/>
+            <p:cNvSpPr/>
+            <p:nvPr/>
+          </p:nvSpPr>
+          <p:spPr>
+            <a:xfrm>
+              <a:off x="914400" y="2388810"/>
+              <a:ext cx="1828800" cy="183000"/>
+            </a:xfrm>
+            <a:prstGeom prst="rect">
+              <a:avLst/>
+            </a:prstGeom>
+            <a:solidFill>
+              <a:schemeClr val="accent3"/>
+            </a:solidFill>
+            <a:ln>
+              <a:noFill/>
+            </a:ln>
+          </p:spPr>
+          <p:txBody>
+            <a:bodyPr anchorCtr="0" anchor="ctr" bIns="91425" lIns="91425" spcFirstLastPara="1" rIns="91425" wrap="square" tIns="91425">
+              <a:noAutofit/>
+            </a:bodyPr>
+            <a:lstStyle/>
+            <a:p>
+              <a:pPr indent="0" lvl="0" marL="0" rtl="0" algn="l">
+                <a:spcBef>
+                  <a:spcPts val="0"/>
+                </a:spcBef>
+                <a:spcAft>
+                  <a:spcPts val="0"/>
+                </a:spcAft>
+                <a:buNone/>
+              </a:pPr>
+              <a:r>
+                <a:t/>
+              </a:r>
+              <a:endParaRPr/>
+            </a:p>
+          </p:txBody>
+        </p:sp>
+        <p:sp>
+          <p:nvSpPr>
+            <p:cNvPr id="57" name="Google Shape;57;p9"/>
+            <p:cNvSpPr/>
+            <p:nvPr/>
+          </p:nvSpPr>
+          <p:spPr>
+            <a:xfrm>
+              <a:off x="2743200" y="2388810"/>
+              <a:ext cx="6400800" cy="183000"/>
+            </a:xfrm>
+            <a:prstGeom prst="rect">
+              <a:avLst/>
+            </a:prstGeom>
+            <a:solidFill>
+              <a:schemeClr val="accent4"/>
+            </a:solidFill>
+            <a:ln>
+              <a:noFill/>
+            </a:ln>
+          </p:spPr>
+          <p:txBody>
+            <a:bodyPr anchorCtr="0" anchor="ctr" bIns="91425" lIns="91425" spcFirstLastPara="1" rIns="91425" wrap="square" tIns="91425">
+              <a:noAutofit/>
+            </a:bodyPr>
+            <a:lstStyle/>
+            <a:p>
+              <a:pPr indent="0" lvl="0" marL="0" rtl="0" algn="l">
+                <a:spcBef>
+                  <a:spcPts val="0"/>
+                </a:spcBef>
+                <a:spcAft>
+                  <a:spcPts val="0"/>
+                </a:spcAft>
+                <a:buNone/>
+              </a:pPr>
+              <a:r>
+                <a:t/>
+              </a:r>
+              <a:endParaRPr/>
+            </a:p>
+          </p:txBody>
+        </p:sp>
+      </p:grpSp>
+    </p:spTree>
+  </p:cSld>
+  <p:clrMapOvr>
+    <a:masterClrMapping/>
+  </p:clrMapOvr>
+</p:sldLayout>
+</file>
+
+<file path=ppt/slideLayouts/slideLayout8.xml><?xml version="1.0" encoding="utf-8"?>
+<p:sldLayout xmlns:a="http://schemas.openxmlformats.org/drawingml/2006/main" xmlns:r="http://schemas.openxmlformats.org/officeDocument/2006/relationships" xmlns:mc="http://schemas.openxmlformats.org/markup-compatibility/2006" xmlns:mv="urn:schemas-microsoft-com:mac:vml" xmlns:p="http://schemas.openxmlformats.org/presentationml/2006/main" xmlns:c="http://schemas.openxmlformats.org/drawingml/2006/chart" xmlns:dgm="http://schemas.openxmlformats.org/drawingml/2006/diagram" xmlns:o="urn:schemas-microsoft-com:office:office" xmlns:v="urn:schemas-microsoft-com:vml" xmlns:pvml="urn:schemas-microsoft-com:office:powerpoint" xmlns:com="http://schemas.openxmlformats.org/drawingml/2006/compatibility" xmlns:p14="http://schemas.microsoft.com/office/powerpoint/2010/main" xmlns:p15="http://schemas.microsoft.com/office/powerpoint/2012/main" xmlns:ahyp="http://schemas.microsoft.com/office/drawing/2018/hyperlinkcolor" matchingName="Section header" type="secHead">
+  <p:cSld name="SECTION_HEADER">
+    <p:spTree>
+      <p:nvGrpSpPr>
+        <p:cNvPr id="58" name="Shape 58"/>
+        <p:cNvGrpSpPr/>
+        <p:nvPr/>
+      </p:nvGrpSpPr>
+      <p:grpSpPr>
+        <a:xfrm>
+          <a:off x="0" y="0"/>
+          <a:ext cx="0" cy="0"/>
+          <a:chOff x="0" y="0"/>
+          <a:chExt cx="0" cy="0"/>
+        </a:xfrm>
+      </p:grpSpPr>
+      <p:sp>
+        <p:nvSpPr>
+          <p:cNvPr id="59" name="Google Shape;59;p10"/>
+          <p:cNvSpPr txBox="1"/>
+          <p:nvPr>
+            <p:ph type="title"/>
+          </p:nvPr>
+        </p:nvSpPr>
+        <p:spPr>
+          <a:xfrm>
+            <a:off x="0" y="-7"/>
+            <a:ext cx="9144000" cy="2386500"/>
+          </a:xfrm>
+          <a:prstGeom prst="rect">
+            <a:avLst/>
+          </a:prstGeom>
+        </p:spPr>
+        <p:txBody>
+          <a:bodyPr anchorCtr="0" anchor="b" bIns="274300" lIns="91425" spcFirstLastPara="1" rIns="91425" wrap="square" tIns="91425">
+            <a:noAutofit/>
+          </a:bodyPr>
+          <a:lstStyle>
+            <a:lvl1pPr lvl="0" algn="ctr">
+              <a:spcBef>
+                <a:spcPts val="0"/>
+              </a:spcBef>
+              <a:spcAft>
+                <a:spcPts val="0"/>
+              </a:spcAft>
+              <a:buSzPts val="3000"/>
+              <a:buNone/>
+              <a:defRPr sz="3000"/>
+            </a:lvl1pPr>
+            <a:lvl2pPr lvl="1" algn="ctr">
+              <a:spcBef>
+                <a:spcPts val="0"/>
+              </a:spcBef>
+              <a:spcAft>
+                <a:spcPts val="0"/>
+              </a:spcAft>
+              <a:buSzPts val="3600"/>
+              <a:buNone/>
+              <a:defRPr sz="3600"/>
+            </a:lvl2pPr>
+            <a:lvl3pPr lvl="2" algn="ctr">
+              <a:spcBef>
+                <a:spcPts val="0"/>
+              </a:spcBef>
+              <a:spcAft>
+                <a:spcPts val="0"/>
+              </a:spcAft>
+              <a:buSzPts val="3600"/>
+              <a:buNone/>
+              <a:defRPr sz="3600"/>
+            </a:lvl3pPr>
+            <a:lvl4pPr lvl="3" algn="ctr">
+              <a:spcBef>
+                <a:spcPts val="0"/>
+              </a:spcBef>
+              <a:spcAft>
+                <a:spcPts val="0"/>
+              </a:spcAft>
+              <a:buSzPts val="3600"/>
+              <a:buNone/>
+              <a:defRPr sz="3600"/>
+            </a:lvl4pPr>
+            <a:lvl5pPr lvl="4" algn="ctr">
+              <a:spcBef>
+                <a:spcPts val="0"/>
+              </a:spcBef>
+              <a:spcAft>
+                <a:spcPts val="0"/>
+              </a:spcAft>
+              <a:buSzPts val="3600"/>
+              <a:buNone/>
+              <a:defRPr sz="3600"/>
+            </a:lvl5pPr>
+            <a:lvl6pPr lvl="5" algn="ctr">
+              <a:spcBef>
+                <a:spcPts val="0"/>
+              </a:spcBef>
+              <a:spcAft>
+                <a:spcPts val="0"/>
+              </a:spcAft>
+              <a:buSzPts val="3600"/>
+              <a:buNone/>
+              <a:defRPr sz="3600"/>
+            </a:lvl6pPr>
+            <a:lvl7pPr lvl="6" algn="ctr">
+              <a:spcBef>
+                <a:spcPts val="0"/>
+              </a:spcBef>
+              <a:spcAft>
+                <a:spcPts val="0"/>
+              </a:spcAft>
+              <a:buSzPts val="3600"/>
+              <a:buNone/>
+              <a:defRPr sz="3600"/>
+            </a:lvl7pPr>
+            <a:lvl8pPr lvl="7" algn="ctr">
+              <a:spcBef>
+                <a:spcPts val="0"/>
+              </a:spcBef>
+              <a:spcAft>
+                <a:spcPts val="0"/>
+              </a:spcAft>
+              <a:buSzPts val="3600"/>
+              <a:buNone/>
+              <a:defRPr sz="3600"/>
+            </a:lvl8pPr>
+            <a:lvl9pPr lvl="8" algn="ctr">
+              <a:spcBef>
+                <a:spcPts val="0"/>
+              </a:spcBef>
+              <a:spcAft>
+                <a:spcPts val="0"/>
+              </a:spcAft>
+              <a:buSzPts val="3600"/>
+              <a:buNone/>
+              <a:defRPr sz="3600"/>
+            </a:lvl9pPr>
+          </a:lstStyle>
+          <a:p/>
+        </p:txBody>
+      </p:sp>
+      <p:grpSp>
+        <p:nvGrpSpPr>
+          <p:cNvPr id="60" name="Google Shape;60;p10"/>
+          <p:cNvGrpSpPr/>
+          <p:nvPr/>
+        </p:nvGrpSpPr>
+        <p:grpSpPr>
+          <a:xfrm>
+            <a:off x="0" y="2432304"/>
+            <a:ext cx="9144000" cy="91500"/>
+            <a:chOff x="0" y="2386584"/>
+            <a:chExt cx="9144000" cy="91500"/>
+          </a:xfrm>
+        </p:grpSpPr>
+        <p:sp>
+          <p:nvSpPr>
+            <p:cNvPr id="61" name="Google Shape;61;p10"/>
+            <p:cNvSpPr/>
+            <p:nvPr/>
+          </p:nvSpPr>
+          <p:spPr>
+            <a:xfrm>
+              <a:off x="0" y="2386584"/>
+              <a:ext cx="914400" cy="91500"/>
+            </a:xfrm>
+            <a:prstGeom prst="rect">
+              <a:avLst/>
+            </a:prstGeom>
+            <a:solidFill>
+              <a:schemeClr val="accent2"/>
+            </a:solidFill>
+            <a:ln>
+              <a:noFill/>
+            </a:ln>
+          </p:spPr>
+          <p:txBody>
+            <a:bodyPr anchorCtr="0" anchor="ctr" bIns="91425" lIns="91425" spcFirstLastPara="1" rIns="91425" wrap="square" tIns="91425">
+              <a:noAutofit/>
+            </a:bodyPr>
+            <a:lstStyle/>
+            <a:p>
+              <a:pPr indent="0" lvl="0" marL="0" rtl="0" algn="l">
+                <a:spcBef>
+                  <a:spcPts val="0"/>
+                </a:spcBef>
+                <a:spcAft>
+                  <a:spcPts val="0"/>
+                </a:spcAft>
+                <a:buNone/>
+              </a:pPr>
+              <a:r>
+                <a:t/>
+              </a:r>
+              <a:endParaRPr/>
+            </a:p>
+          </p:txBody>
+        </p:sp>
+        <p:sp>
+          <p:nvSpPr>
+            <p:cNvPr id="62" name="Google Shape;62;p10"/>
+            <p:cNvSpPr/>
+            <p:nvPr/>
+          </p:nvSpPr>
+          <p:spPr>
+            <a:xfrm>
+              <a:off x="914400" y="2386584"/>
+              <a:ext cx="1828800" cy="91500"/>
+            </a:xfrm>
+            <a:prstGeom prst="rect">
+              <a:avLst/>
+            </a:prstGeom>
+            <a:solidFill>
+              <a:schemeClr val="accent3"/>
+            </a:solidFill>
+            <a:ln>
+              <a:noFill/>
+            </a:ln>
+          </p:spPr>
+          <p:txBody>
+            <a:bodyPr anchorCtr="0" anchor="ctr" bIns="91425" lIns="91425" spcFirstLastPara="1" rIns="91425" wrap="square" tIns="91425">
+              <a:noAutofit/>
+            </a:bodyPr>
+            <a:lstStyle/>
+            <a:p>
+              <a:pPr indent="0" lvl="0" marL="0" rtl="0" algn="l">
+                <a:spcBef>
+                  <a:spcPts val="0"/>
+                </a:spcBef>
+                <a:spcAft>
+                  <a:spcPts val="0"/>
+                </a:spcAft>
+                <a:buNone/>
+              </a:pPr>
+              <a:r>
+                <a:t/>
+              </a:r>
+              <a:endParaRPr/>
+            </a:p>
+          </p:txBody>
+        </p:sp>
+        <p:sp>
+          <p:nvSpPr>
+            <p:cNvPr id="63" name="Google Shape;63;p10"/>
+            <p:cNvSpPr/>
+            <p:nvPr/>
+          </p:nvSpPr>
+          <p:spPr>
+            <a:xfrm>
+              <a:off x="2743200" y="2386584"/>
+              <a:ext cx="6400800" cy="91500"/>
+            </a:xfrm>
+            <a:prstGeom prst="rect">
+              <a:avLst/>
+            </a:prstGeom>
+            <a:solidFill>
+              <a:schemeClr val="accent4"/>
+            </a:solidFill>
+            <a:ln>
+              <a:noFill/>
+            </a:ln>
+          </p:spPr>
+          <p:txBody>
+            <a:bodyPr anchorCtr="0" anchor="ctr" bIns="91425" lIns="91425" spcFirstLastPara="1" rIns="91425" wrap="square" tIns="91425">
+              <a:noAutofit/>
+            </a:bodyPr>
+            <a:lstStyle/>
+            <a:p>
+              <a:pPr indent="0" lvl="0" marL="0" rtl="0" algn="l">
+                <a:spcBef>
+                  <a:spcPts val="0"/>
+                </a:spcBef>
+                <a:spcAft>
+                  <a:spcPts val="0"/>
+                </a:spcAft>
+                <a:buNone/>
+              </a:pPr>
+              <a:r>
+                <a:t/>
+              </a:r>
+              <a:endParaRPr/>
+            </a:p>
+          </p:txBody>
+        </p:sp>
+      </p:grpSp>
+    </p:spTree>
+  </p:cSld>
+  <p:clrMapOvr>
+    <a:masterClrMapping/>
+  </p:clrMapOvr>
+</p:sldLayout>
+</file>
+
+<file path=ppt/slideLayouts/slideLayout9.xml><?xml version="1.0" encoding="utf-8"?>
+<p:sldLayout xmlns:a="http://schemas.openxmlformats.org/drawingml/2006/main" xmlns:r="http://schemas.openxmlformats.org/officeDocument/2006/relationships" xmlns:mc="http://schemas.openxmlformats.org/markup-compatibility/2006" xmlns:mv="urn:schemas-microsoft-com:mac:vml" xmlns:p="http://schemas.openxmlformats.org/presentationml/2006/main" xmlns:c="http://schemas.openxmlformats.org/drawingml/2006/chart" xmlns:dgm="http://schemas.openxmlformats.org/drawingml/2006/diagram" xmlns:o="urn:schemas-microsoft-com:office:office" xmlns:v="urn:schemas-microsoft-com:vml" xmlns:pvml="urn:schemas-microsoft-com:office:powerpoint" xmlns:com="http://schemas.openxmlformats.org/drawingml/2006/compatibility" xmlns:p14="http://schemas.microsoft.com/office/powerpoint/2010/main" xmlns:p15="http://schemas.microsoft.com/office/powerpoint/2012/main" xmlns:ahyp="http://schemas.microsoft.com/office/drawing/2018/hyperlinkcolor" matchingName="Title and body" type="tx">
+  <p:cSld name="TITLE_AND_BODY">
+    <p:spTree>
+      <p:nvGrpSpPr>
+        <p:cNvPr id="64" name="Shape 64"/>
+        <p:cNvGrpSpPr/>
+        <p:nvPr/>
+      </p:nvGrpSpPr>
+      <p:grpSpPr>
+        <a:xfrm>
+          <a:off x="0" y="0"/>
+          <a:ext cx="0" cy="0"/>
+          <a:chOff x="0" y="0"/>
+          <a:chExt cx="0" cy="0"/>
+        </a:xfrm>
+      </p:grpSpPr>
+      <p:sp>
+        <p:nvSpPr>
+          <p:cNvPr id="65" name="Google Shape;65;p11"/>
+          <p:cNvSpPr txBox="1"/>
+          <p:nvPr>
+            <p:ph type="title"/>
+          </p:nvPr>
+        </p:nvSpPr>
+        <p:spPr>
+          <a:xfrm>
+            <a:off x="0" y="0"/>
+            <a:ext cx="9144000" cy="685800"/>
+          </a:xfrm>
+          <a:prstGeom prst="rect">
+            <a:avLst/>
+          </a:prstGeom>
+        </p:spPr>
+        <p:txBody>
+          <a:bodyPr anchorCtr="0" anchor="ctr" bIns="91425" lIns="274300" spcFirstLastPara="1" rIns="91425" wrap="square" tIns="91425">
+            <a:noAutofit/>
+          </a:bodyPr>
+          <a:lstStyle>
+            <a:lvl1pPr lvl="0">
+              <a:spcBef>
+                <a:spcPts val="0"/>
+              </a:spcBef>
+              <a:spcAft>
+                <a:spcPts val="0"/>
+              </a:spcAft>
+              <a:buSzPts val="2400"/>
+              <a:buNone/>
+              <a:defRPr/>
+            </a:lvl1pPr>
+            <a:lvl2pPr lvl="1">
+              <a:spcBef>
+                <a:spcPts val="0"/>
+              </a:spcBef>
+              <a:spcAft>
+                <a:spcPts val="0"/>
+              </a:spcAft>
+              <a:buSzPts val="2800"/>
+              <a:buNone/>
+              <a:defRPr/>
+            </a:lvl2pPr>
+            <a:lvl3pPr lvl="2">
+              <a:spcBef>
+                <a:spcPts val="0"/>
+              </a:spcBef>
+              <a:spcAft>
+                <a:spcPts val="0"/>
+              </a:spcAft>
+              <a:buSzPts val="2800"/>
+              <a:buNone/>
+              <a:defRPr/>
+            </a:lvl3pPr>
+            <a:lvl4pPr lvl="3">
+              <a:spcBef>
+                <a:spcPts val="0"/>
+              </a:spcBef>
+              <a:spcAft>
+                <a:spcPts val="0"/>
+              </a:spcAft>
+              <a:buSzPts val="2800"/>
+              <a:buNone/>
+              <a:defRPr/>
+            </a:lvl4pPr>
+            <a:lvl5pPr lvl="4">
+              <a:spcBef>
+                <a:spcPts val="0"/>
+              </a:spcBef>
+              <a:spcAft>
+                <a:spcPts val="0"/>
+              </a:spcAft>
+              <a:buSzPts val="2800"/>
+              <a:buNone/>
+              <a:defRPr/>
+            </a:lvl5pPr>
+            <a:lvl6pPr lvl="5">
+              <a:spcBef>
+                <a:spcPts val="0"/>
+              </a:spcBef>
+              <a:spcAft>
+                <a:spcPts val="0"/>
+              </a:spcAft>
+              <a:buSzPts val="2800"/>
+              <a:buNone/>
+              <a:defRPr/>
+            </a:lvl6pPr>
+            <a:lvl7pPr lvl="6">
+              <a:spcBef>
+                <a:spcPts val="0"/>
+              </a:spcBef>
+              <a:spcAft>
+                <a:spcPts val="0"/>
+              </a:spcAft>
+              <a:buSzPts val="2800"/>
+              <a:buNone/>
+              <a:defRPr/>
+            </a:lvl7pPr>
+            <a:lvl8pPr lvl="7">
+              <a:spcBef>
+                <a:spcPts val="0"/>
+              </a:spcBef>
+              <a:spcAft>
+                <a:spcPts val="0"/>
+              </a:spcAft>
+              <a:buSzPts val="2800"/>
+              <a:buNone/>
+              <a:defRPr/>
+            </a:lvl8pPr>
+            <a:lvl9pPr lvl="8">
+              <a:spcBef>
+                <a:spcPts val="0"/>
+              </a:spcBef>
+              <a:spcAft>
+                <a:spcPts val="0"/>
+              </a:spcAft>
+              <a:buSzPts val="2800"/>
+              <a:buNone/>
+              <a:defRPr/>
+            </a:lvl9pPr>
+          </a:lstStyle>
+          <a:p/>
+        </p:txBody>
+      </p:sp>
+      <p:sp>
+        <p:nvSpPr>
+          <p:cNvPr id="66" name="Google Shape;66;p11"/>
+          <p:cNvSpPr txBox="1"/>
+          <p:nvPr>
+            <p:ph idx="1" type="body"/>
+          </p:nvPr>
+        </p:nvSpPr>
+        <p:spPr>
+          <a:xfrm>
+            <a:off x="274320" y="914400"/>
+            <a:ext cx="8595300" cy="4114800"/>
+          </a:xfrm>
+          <a:prstGeom prst="rect">
+            <a:avLst/>
+          </a:prstGeom>
+        </p:spPr>
+        <p:txBody>
+          <a:bodyPr anchorCtr="0" anchor="t" bIns="0" lIns="0" spcFirstLastPara="1" rIns="0" wrap="square" tIns="0">
+            <a:noAutofit/>
+          </a:bodyPr>
+          <a:lstStyle>
+            <a:lvl1pPr indent="-342900" lvl="0" marL="457200">
+              <a:spcBef>
+                <a:spcPts val="0"/>
+              </a:spcBef>
+              <a:spcAft>
+                <a:spcPts val="0"/>
+              </a:spcAft>
+              <a:buSzPts val="1800"/>
+              <a:buChar char="●"/>
+              <a:defRPr/>
+            </a:lvl1pPr>
+            <a:lvl2pPr indent="-317500" lvl="1" marL="914400">
+              <a:spcBef>
+                <a:spcPts val="0"/>
+              </a:spcBef>
+              <a:spcAft>
+                <a:spcPts val="0"/>
+              </a:spcAft>
+              <a:buSzPts val="1400"/>
+              <a:buChar char="○"/>
+              <a:defRPr/>
+            </a:lvl2pPr>
+            <a:lvl3pPr indent="-317500" lvl="2" marL="1371600">
+              <a:spcBef>
+                <a:spcPts val="0"/>
+              </a:spcBef>
+              <a:spcAft>
+                <a:spcPts val="0"/>
+              </a:spcAft>
+              <a:buSzPts val="1400"/>
+              <a:buChar char="■"/>
+              <a:defRPr/>
+            </a:lvl3pPr>
+            <a:lvl4pPr indent="-317500" lvl="3" marL="1828800">
+              <a:spcBef>
+                <a:spcPts val="0"/>
+              </a:spcBef>
+              <a:spcAft>
+                <a:spcPts val="0"/>
+              </a:spcAft>
+              <a:buSzPts val="1400"/>
+              <a:buChar char="●"/>
+              <a:defRPr/>
+            </a:lvl4pPr>
+            <a:lvl5pPr indent="-317500" lvl="4" marL="2286000">
+              <a:spcBef>
+                <a:spcPts val="0"/>
+              </a:spcBef>
+              <a:spcAft>
+                <a:spcPts val="0"/>
+              </a:spcAft>
+              <a:buSzPts val="1400"/>
+              <a:buChar char="○"/>
+              <a:defRPr/>
+            </a:lvl5pPr>
+            <a:lvl6pPr indent="-317500" lvl="5" marL="2743200">
+              <a:spcBef>
+                <a:spcPts val="0"/>
+              </a:spcBef>
+              <a:spcAft>
+                <a:spcPts val="0"/>
+              </a:spcAft>
+              <a:buSzPts val="1400"/>
+              <a:buChar char="■"/>
+              <a:defRPr/>
+            </a:lvl6pPr>
+            <a:lvl7pPr indent="-317500" lvl="6" marL="3200400">
+              <a:spcBef>
+                <a:spcPts val="0"/>
+              </a:spcBef>
+              <a:spcAft>
+                <a:spcPts val="0"/>
+              </a:spcAft>
+              <a:buSzPts val="1400"/>
+              <a:buChar char="●"/>
+              <a:defRPr/>
+            </a:lvl7pPr>
+            <a:lvl8pPr indent="-317500" lvl="7" marL="3657600">
+              <a:spcBef>
+                <a:spcPts val="0"/>
+              </a:spcBef>
+              <a:spcAft>
+                <a:spcPts val="0"/>
+              </a:spcAft>
+              <a:buSzPts val="1400"/>
+              <a:buChar char="○"/>
+              <a:defRPr/>
+            </a:lvl8pPr>
+            <a:lvl9pPr indent="-317500" lvl="8" marL="4114800">
+              <a:spcBef>
+                <a:spcPts val="0"/>
+              </a:spcBef>
+              <a:spcAft>
+                <a:spcPts val="0"/>
+              </a:spcAft>
+              <a:buSzPts val="1400"/>
+              <a:buChar char="■"/>
+              <a:defRPr/>
+            </a:lvl9pPr>
+          </a:lstStyle>
+          <a:p/>
+        </p:txBody>
+      </p:sp>
+      <p:sp>
+        <p:nvSpPr>
+          <p:cNvPr id="67" name="Google Shape;67;p11"/>
+          <p:cNvSpPr txBox="1"/>
+          <p:nvPr>
+            <p:ph idx="12" type="sldNum"/>
+          </p:nvPr>
+        </p:nvSpPr>
+        <p:spPr>
+          <a:xfrm>
+            <a:off x="7315202" y="4416550"/>
+            <a:ext cx="1828800" cy="731400"/>
+          </a:xfrm>
+          <a:prstGeom prst="rect">
+            <a:avLst/>
+          </a:prstGeom>
+        </p:spPr>
+        <p:txBody>
+          <a:bodyPr anchorCtr="0" anchor="b" bIns="91425" lIns="91425" spcFirstLastPara="1" rIns="91425" wrap="square" tIns="91425">
+            <a:noAutofit/>
+          </a:bodyPr>
+          <a:lstStyle>
+            <a:lvl1pPr lvl="0" rtl="0">
+              <a:buNone/>
+              <a:defRPr>
+                <a:solidFill>
+                  <a:schemeClr val="dk1"/>
+                </a:solidFill>
+              </a:defRPr>
+            </a:lvl1pPr>
+            <a:lvl2pPr lvl="1" rtl="0">
+              <a:buNone/>
+              <a:defRPr>
+                <a:solidFill>
+                  <a:schemeClr val="dk1"/>
+                </a:solidFill>
+              </a:defRPr>
+            </a:lvl2pPr>
+            <a:lvl3pPr lvl="2" rtl="0">
+              <a:buNone/>
+              <a:defRPr>
+                <a:solidFill>
+                  <a:schemeClr val="dk1"/>
+                </a:solidFill>
+              </a:defRPr>
+            </a:lvl3pPr>
+            <a:lvl4pPr lvl="3" rtl="0">
+              <a:buNone/>
+              <a:defRPr>
+                <a:solidFill>
+                  <a:schemeClr val="dk1"/>
+                </a:solidFill>
+              </a:defRPr>
+            </a:lvl4pPr>
+            <a:lvl5pPr lvl="4" rtl="0">
+              <a:buNone/>
+              <a:defRPr>
+                <a:solidFill>
+                  <a:schemeClr val="dk1"/>
+                </a:solidFill>
+              </a:defRPr>
+            </a:lvl5pPr>
+            <a:lvl6pPr lvl="5" rtl="0">
+              <a:buNone/>
+              <a:defRPr>
+                <a:solidFill>
+                  <a:schemeClr val="dk1"/>
+                </a:solidFill>
+              </a:defRPr>
+            </a:lvl6pPr>
+            <a:lvl7pPr lvl="6" rtl="0">
+              <a:buNone/>
+              <a:defRPr>
+                <a:solidFill>
+                  <a:schemeClr val="dk1"/>
+                </a:solidFill>
+              </a:defRPr>
+            </a:lvl7pPr>
+            <a:lvl8pPr lvl="7" rtl="0">
+              <a:buNone/>
+              <a:defRPr>
+                <a:solidFill>
+                  <a:schemeClr val="dk1"/>
+                </a:solidFill>
+              </a:defRPr>
+            </a:lvl8pPr>
+            <a:lvl9pPr lvl="8" rtl="0">
+              <a:buNone/>
+              <a:defRPr>
+                <a:solidFill>
+                  <a:schemeClr val="dk1"/>
+                </a:solidFill>
+              </a:defRPr>
+            </a:lvl9pPr>
+          </a:lstStyle>
+          <a:p>
+            <a:pPr indent="0" lvl="0" marL="0" rtl="0" algn="r">
+              <a:spcBef>
+                <a:spcPts val="0"/>
+              </a:spcBef>
+              <a:spcAft>
+                <a:spcPts val="0"/>
+              </a:spcAft>
+              <a:buNone/>
+            </a:pPr>
+            <a:fld id="{00000000-1234-1234-1234-123412341234}" type="slidenum">
+              <a:rPr lang="en"/>
+              <a:t>‹#›</a:t>
+            </a:fld>
+            <a:endParaRPr/>
+          </a:p>
+          <a:p>
+            <a:pPr indent="0" lvl="0" marL="0" rtl="0" algn="r">
+              <a:spcBef>
+                <a:spcPts val="0"/>
+              </a:spcBef>
+              <a:spcAft>
+                <a:spcPts val="0"/>
+              </a:spcAft>
+              <a:buNone/>
+            </a:pPr>
+            <a:r>
+              <a:rPr b="0" lang="en" sz="900" u="sng">
+                <a:solidFill>
+                  <a:schemeClr val="hlink"/>
+                </a:solidFill>
+                <a:hlinkClick r:id="rId2"/>
+              </a:rPr>
+              <a:t>https://uni1.de/amos</a:t>
+            </a:r>
+            <a:r>
+              <a:rPr b="0" lang="en" sz="900">
+                <a:solidFill>
+                  <a:schemeClr val="dk2"/>
+                </a:solidFill>
+              </a:rPr>
+              <a:t> </a:t>
+            </a:r>
+            <a:endParaRPr b="0" sz="900">
+              <a:solidFill>
+                <a:schemeClr val="dk2"/>
+              </a:solidFill>
+            </a:endParaRPr>
+          </a:p>
+        </p:txBody>
+      </p:sp>
+      <p:grpSp>
+        <p:nvGrpSpPr>
+          <p:cNvPr id="68" name="Google Shape;68;p11"/>
+          <p:cNvGrpSpPr/>
+          <p:nvPr/>
+        </p:nvGrpSpPr>
+        <p:grpSpPr>
+          <a:xfrm>
+            <a:off x="0" y="685800"/>
+            <a:ext cx="9144000" cy="91500"/>
+            <a:chOff x="0" y="2386584"/>
+            <a:chExt cx="9144000" cy="91500"/>
+          </a:xfrm>
+        </p:grpSpPr>
+        <p:sp>
+          <p:nvSpPr>
+            <p:cNvPr id="69" name="Google Shape;69;p11"/>
+            <p:cNvSpPr/>
+            <p:nvPr/>
+          </p:nvSpPr>
+          <p:spPr>
+            <a:xfrm>
+              <a:off x="0" y="2386584"/>
+              <a:ext cx="914400" cy="91500"/>
+            </a:xfrm>
+            <a:prstGeom prst="rect">
+              <a:avLst/>
+            </a:prstGeom>
+            <a:solidFill>
+              <a:schemeClr val="accent2"/>
+            </a:solidFill>
+            <a:ln>
+              <a:noFill/>
+            </a:ln>
+          </p:spPr>
+          <p:txBody>
+            <a:bodyPr anchorCtr="0" anchor="ctr" bIns="91425" lIns="91425" spcFirstLastPara="1" rIns="91425" wrap="square" tIns="91425">
+              <a:noAutofit/>
+            </a:bodyPr>
+            <a:lstStyle/>
+            <a:p>
+              <a:pPr indent="0" lvl="0" marL="0" rtl="0" algn="l">
+                <a:spcBef>
+                  <a:spcPts val="0"/>
+                </a:spcBef>
+                <a:spcAft>
+                  <a:spcPts val="0"/>
+                </a:spcAft>
+                <a:buNone/>
+              </a:pPr>
+              <a:r>
+                <a:t/>
+              </a:r>
+              <a:endParaRPr/>
+            </a:p>
+          </p:txBody>
+        </p:sp>
+        <p:sp>
+          <p:nvSpPr>
+            <p:cNvPr id="70" name="Google Shape;70;p11"/>
+            <p:cNvSpPr/>
+            <p:nvPr/>
+          </p:nvSpPr>
+          <p:spPr>
+            <a:xfrm>
+              <a:off x="914400" y="2386584"/>
+              <a:ext cx="1828800" cy="91500"/>
+            </a:xfrm>
+            <a:prstGeom prst="rect">
+              <a:avLst/>
+            </a:prstGeom>
+            <a:solidFill>
+              <a:schemeClr val="accent3"/>
+            </a:solidFill>
+            <a:ln>
+              <a:noFill/>
+            </a:ln>
+          </p:spPr>
+          <p:txBody>
+            <a:bodyPr anchorCtr="0" anchor="ctr" bIns="91425" lIns="91425" spcFirstLastPara="1" rIns="91425" wrap="square" tIns="91425">
+              <a:noAutofit/>
+            </a:bodyPr>
+            <a:lstStyle/>
+            <a:p>
+              <a:pPr indent="0" lvl="0" marL="0" rtl="0" algn="l">
+                <a:spcBef>
+                  <a:spcPts val="0"/>
+                </a:spcBef>
+                <a:spcAft>
+                  <a:spcPts val="0"/>
+                </a:spcAft>
+                <a:buNone/>
+              </a:pPr>
+              <a:r>
+                <a:t/>
+              </a:r>
+              <a:endParaRPr/>
+            </a:p>
+          </p:txBody>
+        </p:sp>
+        <p:sp>
+          <p:nvSpPr>
+            <p:cNvPr id="71" name="Google Shape;71;p11"/>
+            <p:cNvSpPr/>
+            <p:nvPr/>
+          </p:nvSpPr>
+          <p:spPr>
+            <a:xfrm>
+              <a:off x="2743200" y="2386584"/>
+              <a:ext cx="6400800" cy="91500"/>
+            </a:xfrm>
+            <a:prstGeom prst="rect">
+              <a:avLst/>
+            </a:prstGeom>
+            <a:solidFill>
+              <a:schemeClr val="accent4"/>
+            </a:solidFill>
+            <a:ln>
+              <a:noFill/>
+            </a:ln>
+          </p:spPr>
+          <p:txBody>
+            <a:bodyPr anchorCtr="0" anchor="ctr" bIns="91425" lIns="91425" spcFirstLastPara="1" rIns="91425" wrap="square" tIns="91425">
+              <a:noAutofit/>
+            </a:bodyPr>
+            <a:lstStyle/>
+            <a:p>
+              <a:pPr indent="0" lvl="0" marL="0" rtl="0" algn="l">
+                <a:spcBef>
+                  <a:spcPts val="0"/>
+                </a:spcBef>
+                <a:spcAft>
+                  <a:spcPts val="0"/>
+                </a:spcAft>
+                <a:buNone/>
+              </a:pPr>
+              <a:r>
+                <a:t/>
+              </a:r>
+              <a:endParaRPr/>
+            </a:p>
+          </p:txBody>
+        </p:sp>
+      </p:grpSp>
     </p:spTree>
   </p:cSld>
   <p:clrMapOvr>
@@ -10634,12 +13111,19 @@
 </p:sldMaster>
 </file>
 
-<file path=ppt/slides/slide1.xml><?xml version="1.0" encoding="utf-8"?>
-<p:sld xmlns:a="http://schemas.openxmlformats.org/drawingml/2006/main" xmlns:r="http://schemas.openxmlformats.org/officeDocument/2006/relationships" xmlns:mc="http://schemas.openxmlformats.org/markup-compatibility/2006" xmlns:mv="urn:schemas-microsoft-com:mac:vml" xmlns:p="http://schemas.openxmlformats.org/presentationml/2006/main" xmlns:c="http://schemas.openxmlformats.org/drawingml/2006/chart" xmlns:dgm="http://schemas.openxmlformats.org/drawingml/2006/diagram" xmlns:o="urn:schemas-microsoft-com:office:office" xmlns:v="urn:schemas-microsoft-com:vml" xmlns:pvml="urn:schemas-microsoft-com:office:powerpoint" xmlns:com="http://schemas.openxmlformats.org/drawingml/2006/compatibility" xmlns:p14="http://schemas.microsoft.com/office/powerpoint/2010/main" xmlns:p15="http://schemas.microsoft.com/office/powerpoint/2012/main" xmlns:ahyp="http://schemas.microsoft.com/office/drawing/2018/hyperlinkcolor">
-  <p:cSld>
+<file path=ppt/slideMasters/slideMaster2.xml><?xml version="1.0" encoding="utf-8"?>
+<p:sldMaster xmlns:a="http://schemas.openxmlformats.org/drawingml/2006/main" xmlns:r="http://schemas.openxmlformats.org/officeDocument/2006/relationships" xmlns:mc="http://schemas.openxmlformats.org/markup-compatibility/2006" xmlns:mv="urn:schemas-microsoft-com:mac:vml" xmlns:p="http://schemas.openxmlformats.org/presentationml/2006/main" xmlns:c="http://schemas.openxmlformats.org/drawingml/2006/chart" xmlns:dgm="http://schemas.openxmlformats.org/drawingml/2006/diagram" xmlns:o="urn:schemas-microsoft-com:office:office" xmlns:v="urn:schemas-microsoft-com:vml" xmlns:pvml="urn:schemas-microsoft-com:office:powerpoint" xmlns:com="http://schemas.openxmlformats.org/drawingml/2006/compatibility" xmlns:p14="http://schemas.microsoft.com/office/powerpoint/2010/main" xmlns:p15="http://schemas.microsoft.com/office/powerpoint/2012/main" xmlns:ahyp="http://schemas.microsoft.com/office/drawing/2018/hyperlinkcolor">
+  <p:cSld name="simple-light-2">
+    <p:bg>
+      <p:bgPr>
+        <a:solidFill>
+          <a:schemeClr val="lt1"/>
+        </a:solidFill>
+      </p:bgPr>
+    </p:bg>
     <p:spTree>
       <p:nvGrpSpPr>
-        <p:cNvPr id="50" name="Shape 50"/>
+        <p:cNvPr id="47" name="Shape 47"/>
         <p:cNvGrpSpPr/>
         <p:nvPr/>
       </p:nvGrpSpPr>
@@ -10653,7 +13137,1281 @@
       </p:grpSpPr>
       <p:sp>
         <p:nvSpPr>
-          <p:cNvPr id="51" name="Google Shape;51;p8"/>
+          <p:cNvPr id="48" name="Google Shape;48;p8"/>
+          <p:cNvSpPr txBox="1"/>
+          <p:nvPr>
+            <p:ph type="title"/>
+          </p:nvPr>
+        </p:nvSpPr>
+        <p:spPr>
+          <a:xfrm>
+            <a:off x="0" y="0"/>
+            <a:ext cx="9144000" cy="685800"/>
+          </a:xfrm>
+          <a:prstGeom prst="rect">
+            <a:avLst/>
+          </a:prstGeom>
+          <a:noFill/>
+          <a:ln>
+            <a:noFill/>
+          </a:ln>
+        </p:spPr>
+        <p:txBody>
+          <a:bodyPr anchorCtr="0" anchor="ctr" bIns="0" lIns="274300" spcFirstLastPara="1" rIns="0" wrap="square" tIns="0">
+            <a:noAutofit/>
+          </a:bodyPr>
+          <a:lstStyle>
+            <a:lvl1pPr lvl="0">
+              <a:spcBef>
+                <a:spcPts val="0"/>
+              </a:spcBef>
+              <a:spcAft>
+                <a:spcPts val="0"/>
+              </a:spcAft>
+              <a:buClr>
+                <a:schemeClr val="dk1"/>
+              </a:buClr>
+              <a:buSzPts val="2400"/>
+              <a:buNone/>
+              <a:defRPr b="1" sz="2400">
+                <a:solidFill>
+                  <a:schemeClr val="dk1"/>
+                </a:solidFill>
+              </a:defRPr>
+            </a:lvl1pPr>
+            <a:lvl2pPr lvl="1">
+              <a:spcBef>
+                <a:spcPts val="0"/>
+              </a:spcBef>
+              <a:spcAft>
+                <a:spcPts val="0"/>
+              </a:spcAft>
+              <a:buClr>
+                <a:schemeClr val="dk1"/>
+              </a:buClr>
+              <a:buSzPts val="2800"/>
+              <a:buNone/>
+              <a:defRPr sz="2800">
+                <a:solidFill>
+                  <a:schemeClr val="dk1"/>
+                </a:solidFill>
+              </a:defRPr>
+            </a:lvl2pPr>
+            <a:lvl3pPr lvl="2">
+              <a:spcBef>
+                <a:spcPts val="0"/>
+              </a:spcBef>
+              <a:spcAft>
+                <a:spcPts val="0"/>
+              </a:spcAft>
+              <a:buClr>
+                <a:schemeClr val="dk1"/>
+              </a:buClr>
+              <a:buSzPts val="2800"/>
+              <a:buNone/>
+              <a:defRPr sz="2800">
+                <a:solidFill>
+                  <a:schemeClr val="dk1"/>
+                </a:solidFill>
+              </a:defRPr>
+            </a:lvl3pPr>
+            <a:lvl4pPr lvl="3">
+              <a:spcBef>
+                <a:spcPts val="0"/>
+              </a:spcBef>
+              <a:spcAft>
+                <a:spcPts val="0"/>
+              </a:spcAft>
+              <a:buClr>
+                <a:schemeClr val="dk1"/>
+              </a:buClr>
+              <a:buSzPts val="2800"/>
+              <a:buNone/>
+              <a:defRPr sz="2800">
+                <a:solidFill>
+                  <a:schemeClr val="dk1"/>
+                </a:solidFill>
+              </a:defRPr>
+            </a:lvl4pPr>
+            <a:lvl5pPr lvl="4">
+              <a:spcBef>
+                <a:spcPts val="0"/>
+              </a:spcBef>
+              <a:spcAft>
+                <a:spcPts val="0"/>
+              </a:spcAft>
+              <a:buClr>
+                <a:schemeClr val="dk1"/>
+              </a:buClr>
+              <a:buSzPts val="2800"/>
+              <a:buNone/>
+              <a:defRPr sz="2800">
+                <a:solidFill>
+                  <a:schemeClr val="dk1"/>
+                </a:solidFill>
+              </a:defRPr>
+            </a:lvl5pPr>
+            <a:lvl6pPr lvl="5">
+              <a:spcBef>
+                <a:spcPts val="0"/>
+              </a:spcBef>
+              <a:spcAft>
+                <a:spcPts val="0"/>
+              </a:spcAft>
+              <a:buClr>
+                <a:schemeClr val="dk1"/>
+              </a:buClr>
+              <a:buSzPts val="2800"/>
+              <a:buNone/>
+              <a:defRPr sz="2800">
+                <a:solidFill>
+                  <a:schemeClr val="dk1"/>
+                </a:solidFill>
+              </a:defRPr>
+            </a:lvl6pPr>
+            <a:lvl7pPr lvl="6">
+              <a:spcBef>
+                <a:spcPts val="0"/>
+              </a:spcBef>
+              <a:spcAft>
+                <a:spcPts val="0"/>
+              </a:spcAft>
+              <a:buClr>
+                <a:schemeClr val="dk1"/>
+              </a:buClr>
+              <a:buSzPts val="2800"/>
+              <a:buNone/>
+              <a:defRPr sz="2800">
+                <a:solidFill>
+                  <a:schemeClr val="dk1"/>
+                </a:solidFill>
+              </a:defRPr>
+            </a:lvl7pPr>
+            <a:lvl8pPr lvl="7">
+              <a:spcBef>
+                <a:spcPts val="0"/>
+              </a:spcBef>
+              <a:spcAft>
+                <a:spcPts val="0"/>
+              </a:spcAft>
+              <a:buClr>
+                <a:schemeClr val="dk1"/>
+              </a:buClr>
+              <a:buSzPts val="2800"/>
+              <a:buNone/>
+              <a:defRPr sz="2800">
+                <a:solidFill>
+                  <a:schemeClr val="dk1"/>
+                </a:solidFill>
+              </a:defRPr>
+            </a:lvl8pPr>
+            <a:lvl9pPr lvl="8">
+              <a:spcBef>
+                <a:spcPts val="0"/>
+              </a:spcBef>
+              <a:spcAft>
+                <a:spcPts val="0"/>
+              </a:spcAft>
+              <a:buClr>
+                <a:schemeClr val="dk1"/>
+              </a:buClr>
+              <a:buSzPts val="2800"/>
+              <a:buNone/>
+              <a:defRPr sz="2800">
+                <a:solidFill>
+                  <a:schemeClr val="dk1"/>
+                </a:solidFill>
+              </a:defRPr>
+            </a:lvl9pPr>
+          </a:lstStyle>
+          <a:p/>
+        </p:txBody>
+      </p:sp>
+      <p:sp>
+        <p:nvSpPr>
+          <p:cNvPr id="49" name="Google Shape;49;p8"/>
+          <p:cNvSpPr txBox="1"/>
+          <p:nvPr>
+            <p:ph idx="1" type="body"/>
+          </p:nvPr>
+        </p:nvSpPr>
+        <p:spPr>
+          <a:xfrm>
+            <a:off x="274320" y="914400"/>
+            <a:ext cx="8595300" cy="4114800"/>
+          </a:xfrm>
+          <a:prstGeom prst="rect">
+            <a:avLst/>
+          </a:prstGeom>
+          <a:noFill/>
+          <a:ln>
+            <a:noFill/>
+          </a:ln>
+        </p:spPr>
+        <p:txBody>
+          <a:bodyPr anchorCtr="0" anchor="t" bIns="0" lIns="0" spcFirstLastPara="1" rIns="0" wrap="square" tIns="0">
+            <a:noAutofit/>
+          </a:bodyPr>
+          <a:lstStyle>
+            <a:lvl1pPr indent="-342900" lvl="0" marL="457200">
+              <a:lnSpc>
+                <a:spcPct val="115000"/>
+              </a:lnSpc>
+              <a:spcBef>
+                <a:spcPts val="0"/>
+              </a:spcBef>
+              <a:spcAft>
+                <a:spcPts val="0"/>
+              </a:spcAft>
+              <a:buClr>
+                <a:schemeClr val="dk1"/>
+              </a:buClr>
+              <a:buSzPts val="1800"/>
+              <a:buChar char="●"/>
+              <a:defRPr sz="1800">
+                <a:solidFill>
+                  <a:schemeClr val="dk1"/>
+                </a:solidFill>
+              </a:defRPr>
+            </a:lvl1pPr>
+            <a:lvl2pPr indent="-317500" lvl="1" marL="914400">
+              <a:lnSpc>
+                <a:spcPct val="115000"/>
+              </a:lnSpc>
+              <a:spcBef>
+                <a:spcPts val="0"/>
+              </a:spcBef>
+              <a:spcAft>
+                <a:spcPts val="0"/>
+              </a:spcAft>
+              <a:buClr>
+                <a:schemeClr val="dk1"/>
+              </a:buClr>
+              <a:buSzPts val="1400"/>
+              <a:buChar char="○"/>
+              <a:defRPr>
+                <a:solidFill>
+                  <a:schemeClr val="dk1"/>
+                </a:solidFill>
+              </a:defRPr>
+            </a:lvl2pPr>
+            <a:lvl3pPr indent="-317500" lvl="2" marL="1371600">
+              <a:lnSpc>
+                <a:spcPct val="115000"/>
+              </a:lnSpc>
+              <a:spcBef>
+                <a:spcPts val="0"/>
+              </a:spcBef>
+              <a:spcAft>
+                <a:spcPts val="0"/>
+              </a:spcAft>
+              <a:buClr>
+                <a:schemeClr val="dk1"/>
+              </a:buClr>
+              <a:buSzPts val="1400"/>
+              <a:buChar char="■"/>
+              <a:defRPr>
+                <a:solidFill>
+                  <a:schemeClr val="dk1"/>
+                </a:solidFill>
+              </a:defRPr>
+            </a:lvl3pPr>
+            <a:lvl4pPr indent="-317500" lvl="3" marL="1828800">
+              <a:lnSpc>
+                <a:spcPct val="115000"/>
+              </a:lnSpc>
+              <a:spcBef>
+                <a:spcPts val="0"/>
+              </a:spcBef>
+              <a:spcAft>
+                <a:spcPts val="0"/>
+              </a:spcAft>
+              <a:buClr>
+                <a:schemeClr val="dk1"/>
+              </a:buClr>
+              <a:buSzPts val="1400"/>
+              <a:buChar char="●"/>
+              <a:defRPr>
+                <a:solidFill>
+                  <a:schemeClr val="dk1"/>
+                </a:solidFill>
+              </a:defRPr>
+            </a:lvl4pPr>
+            <a:lvl5pPr indent="-317500" lvl="4" marL="2286000">
+              <a:lnSpc>
+                <a:spcPct val="115000"/>
+              </a:lnSpc>
+              <a:spcBef>
+                <a:spcPts val="0"/>
+              </a:spcBef>
+              <a:spcAft>
+                <a:spcPts val="0"/>
+              </a:spcAft>
+              <a:buClr>
+                <a:schemeClr val="dk1"/>
+              </a:buClr>
+              <a:buSzPts val="1400"/>
+              <a:buChar char="○"/>
+              <a:defRPr>
+                <a:solidFill>
+                  <a:schemeClr val="dk1"/>
+                </a:solidFill>
+              </a:defRPr>
+            </a:lvl5pPr>
+            <a:lvl6pPr indent="-317500" lvl="5" marL="2743200">
+              <a:lnSpc>
+                <a:spcPct val="115000"/>
+              </a:lnSpc>
+              <a:spcBef>
+                <a:spcPts val="0"/>
+              </a:spcBef>
+              <a:spcAft>
+                <a:spcPts val="0"/>
+              </a:spcAft>
+              <a:buClr>
+                <a:schemeClr val="dk1"/>
+              </a:buClr>
+              <a:buSzPts val="1400"/>
+              <a:buChar char="■"/>
+              <a:defRPr>
+                <a:solidFill>
+                  <a:schemeClr val="dk1"/>
+                </a:solidFill>
+              </a:defRPr>
+            </a:lvl6pPr>
+            <a:lvl7pPr indent="-317500" lvl="6" marL="3200400">
+              <a:lnSpc>
+                <a:spcPct val="115000"/>
+              </a:lnSpc>
+              <a:spcBef>
+                <a:spcPts val="0"/>
+              </a:spcBef>
+              <a:spcAft>
+                <a:spcPts val="0"/>
+              </a:spcAft>
+              <a:buClr>
+                <a:schemeClr val="dk1"/>
+              </a:buClr>
+              <a:buSzPts val="1400"/>
+              <a:buChar char="●"/>
+              <a:defRPr>
+                <a:solidFill>
+                  <a:schemeClr val="dk1"/>
+                </a:solidFill>
+              </a:defRPr>
+            </a:lvl7pPr>
+            <a:lvl8pPr indent="-317500" lvl="7" marL="3657600">
+              <a:lnSpc>
+                <a:spcPct val="115000"/>
+              </a:lnSpc>
+              <a:spcBef>
+                <a:spcPts val="0"/>
+              </a:spcBef>
+              <a:spcAft>
+                <a:spcPts val="0"/>
+              </a:spcAft>
+              <a:buClr>
+                <a:schemeClr val="dk1"/>
+              </a:buClr>
+              <a:buSzPts val="1400"/>
+              <a:buChar char="○"/>
+              <a:defRPr>
+                <a:solidFill>
+                  <a:schemeClr val="dk1"/>
+                </a:solidFill>
+              </a:defRPr>
+            </a:lvl8pPr>
+            <a:lvl9pPr indent="-317500" lvl="8" marL="4114800">
+              <a:lnSpc>
+                <a:spcPct val="115000"/>
+              </a:lnSpc>
+              <a:spcBef>
+                <a:spcPts val="0"/>
+              </a:spcBef>
+              <a:spcAft>
+                <a:spcPts val="0"/>
+              </a:spcAft>
+              <a:buClr>
+                <a:schemeClr val="dk1"/>
+              </a:buClr>
+              <a:buSzPts val="1400"/>
+              <a:buChar char="■"/>
+              <a:defRPr>
+                <a:solidFill>
+                  <a:schemeClr val="dk1"/>
+                </a:solidFill>
+              </a:defRPr>
+            </a:lvl9pPr>
+          </a:lstStyle>
+          <a:p/>
+        </p:txBody>
+      </p:sp>
+      <p:sp>
+        <p:nvSpPr>
+          <p:cNvPr id="50" name="Google Shape;50;p8"/>
+          <p:cNvSpPr txBox="1"/>
+          <p:nvPr>
+            <p:ph idx="12" type="sldNum"/>
+          </p:nvPr>
+        </p:nvSpPr>
+        <p:spPr>
+          <a:xfrm>
+            <a:off x="7315202" y="4416550"/>
+            <a:ext cx="1828800" cy="731400"/>
+          </a:xfrm>
+          <a:prstGeom prst="rect">
+            <a:avLst/>
+          </a:prstGeom>
+          <a:noFill/>
+          <a:ln>
+            <a:noFill/>
+          </a:ln>
+        </p:spPr>
+        <p:txBody>
+          <a:bodyPr anchorCtr="0" anchor="b" bIns="91425" lIns="91425" spcFirstLastPara="1" rIns="91425" wrap="square" tIns="91425">
+            <a:noAutofit/>
+          </a:bodyPr>
+          <a:lstStyle>
+            <a:lvl1pPr lvl="0" rtl="0" algn="r">
+              <a:buNone/>
+              <a:defRPr b="1" sz="2400">
+                <a:solidFill>
+                  <a:schemeClr val="dk2"/>
+                </a:solidFill>
+              </a:defRPr>
+            </a:lvl1pPr>
+            <a:lvl2pPr lvl="1" rtl="0" algn="r">
+              <a:buNone/>
+              <a:defRPr b="1" sz="2400">
+                <a:solidFill>
+                  <a:schemeClr val="dk2"/>
+                </a:solidFill>
+              </a:defRPr>
+            </a:lvl2pPr>
+            <a:lvl3pPr lvl="2" rtl="0" algn="r">
+              <a:buNone/>
+              <a:defRPr b="1" sz="2400">
+                <a:solidFill>
+                  <a:schemeClr val="dk2"/>
+                </a:solidFill>
+              </a:defRPr>
+            </a:lvl3pPr>
+            <a:lvl4pPr lvl="3" rtl="0" algn="r">
+              <a:buNone/>
+              <a:defRPr b="1" sz="2400">
+                <a:solidFill>
+                  <a:schemeClr val="dk2"/>
+                </a:solidFill>
+              </a:defRPr>
+            </a:lvl4pPr>
+            <a:lvl5pPr lvl="4" rtl="0" algn="r">
+              <a:buNone/>
+              <a:defRPr b="1" sz="2400">
+                <a:solidFill>
+                  <a:schemeClr val="dk2"/>
+                </a:solidFill>
+              </a:defRPr>
+            </a:lvl5pPr>
+            <a:lvl6pPr lvl="5" rtl="0" algn="r">
+              <a:buNone/>
+              <a:defRPr b="1" sz="2400">
+                <a:solidFill>
+                  <a:schemeClr val="dk2"/>
+                </a:solidFill>
+              </a:defRPr>
+            </a:lvl6pPr>
+            <a:lvl7pPr lvl="6" rtl="0" algn="r">
+              <a:buNone/>
+              <a:defRPr b="1" sz="2400">
+                <a:solidFill>
+                  <a:schemeClr val="dk2"/>
+                </a:solidFill>
+              </a:defRPr>
+            </a:lvl7pPr>
+            <a:lvl8pPr lvl="7" rtl="0" algn="r">
+              <a:buNone/>
+              <a:defRPr b="1" sz="2400">
+                <a:solidFill>
+                  <a:schemeClr val="dk2"/>
+                </a:solidFill>
+              </a:defRPr>
+            </a:lvl8pPr>
+            <a:lvl9pPr lvl="8" rtl="0" algn="r">
+              <a:buNone/>
+              <a:defRPr b="1" sz="2400">
+                <a:solidFill>
+                  <a:schemeClr val="dk2"/>
+                </a:solidFill>
+              </a:defRPr>
+            </a:lvl9pPr>
+          </a:lstStyle>
+          <a:p>
+            <a:pPr indent="0" lvl="0" marL="0" rtl="0" algn="r">
+              <a:spcBef>
+                <a:spcPts val="0"/>
+              </a:spcBef>
+              <a:spcAft>
+                <a:spcPts val="0"/>
+              </a:spcAft>
+              <a:buNone/>
+            </a:pPr>
+            <a:fld id="{00000000-1234-1234-1234-123412341234}" type="slidenum">
+              <a:rPr lang="en"/>
+              <a:t>‹#›</a:t>
+            </a:fld>
+            <a:endParaRPr/>
+          </a:p>
+          <a:p>
+            <a:pPr indent="0" lvl="0" marL="0" rtl="0" algn="r">
+              <a:spcBef>
+                <a:spcPts val="0"/>
+              </a:spcBef>
+              <a:spcAft>
+                <a:spcPts val="0"/>
+              </a:spcAft>
+              <a:buNone/>
+            </a:pPr>
+            <a:r>
+              <a:rPr b="0" lang="en" sz="900" u="sng">
+                <a:solidFill>
+                  <a:schemeClr val="hlink"/>
+                </a:solidFill>
+                <a:hlinkClick r:id="rId1"/>
+              </a:rPr>
+              <a:t>https://uni1.de/amos</a:t>
+            </a:r>
+            <a:r>
+              <a:rPr b="0" lang="en" sz="900"/>
+              <a:t> </a:t>
+            </a:r>
+            <a:endParaRPr b="0" sz="900"/>
+          </a:p>
+        </p:txBody>
+      </p:sp>
+    </p:spTree>
+  </p:cSld>
+  <p:clrMap accent1="accent1" accent2="accent2" accent3="accent3" accent4="accent4" accent5="accent5" accent6="accent6" bg1="lt1" bg2="dk2" tx1="dk1" tx2="lt2" folHlink="folHlink" hlink="hlink"/>
+  <p:sldLayoutIdLst>
+    <p:sldLayoutId id="2147483654" r:id="rId2"/>
+    <p:sldLayoutId id="2147483655" r:id="rId3"/>
+    <p:sldLayoutId id="2147483656" r:id="rId4"/>
+    <p:sldLayoutId id="2147483657" r:id="rId5"/>
+    <p:sldLayoutId id="2147483658" r:id="rId6"/>
+    <p:sldLayoutId id="2147483659" r:id="rId7"/>
+  </p:sldLayoutIdLst>
+  <p:hf dt="0" ftr="0" hdr="0"/>
+  <p:txStyles>
+    <p:titleStyle>
+      <a:defPPr lvl="0" marR="0" rtl="0" algn="l">
+        <a:lnSpc>
+          <a:spcPct val="100000"/>
+        </a:lnSpc>
+        <a:spcBef>
+          <a:spcPts val="0"/>
+        </a:spcBef>
+        <a:spcAft>
+          <a:spcPts val="0"/>
+        </a:spcAft>
+      </a:defPPr>
+      <a:lvl1pPr lvl="0" marR="0" rtl="0" algn="l">
+        <a:lnSpc>
+          <a:spcPct val="100000"/>
+        </a:lnSpc>
+        <a:spcBef>
+          <a:spcPts val="0"/>
+        </a:spcBef>
+        <a:spcAft>
+          <a:spcPts val="0"/>
+        </a:spcAft>
+        <a:buClr>
+          <a:srgbClr val="000000"/>
+        </a:buClr>
+        <a:buFont typeface="Arial"/>
+        <a:defRPr b="0" i="0" sz="1400" u="none" cap="none" strike="noStrike">
+          <a:solidFill>
+            <a:srgbClr val="000000"/>
+          </a:solidFill>
+          <a:latin typeface="Arial"/>
+          <a:ea typeface="Arial"/>
+          <a:cs typeface="Arial"/>
+          <a:sym typeface="Arial"/>
+        </a:defRPr>
+      </a:lvl1pPr>
+      <a:lvl2pPr lvl="1" marR="0" rtl="0" algn="l">
+        <a:lnSpc>
+          <a:spcPct val="100000"/>
+        </a:lnSpc>
+        <a:spcBef>
+          <a:spcPts val="0"/>
+        </a:spcBef>
+        <a:spcAft>
+          <a:spcPts val="0"/>
+        </a:spcAft>
+        <a:buClr>
+          <a:srgbClr val="000000"/>
+        </a:buClr>
+        <a:buFont typeface="Arial"/>
+        <a:defRPr b="0" i="0" sz="1400" u="none" cap="none" strike="noStrike">
+          <a:solidFill>
+            <a:srgbClr val="000000"/>
+          </a:solidFill>
+          <a:latin typeface="Arial"/>
+          <a:ea typeface="Arial"/>
+          <a:cs typeface="Arial"/>
+          <a:sym typeface="Arial"/>
+        </a:defRPr>
+      </a:lvl2pPr>
+      <a:lvl3pPr lvl="2" marR="0" rtl="0" algn="l">
+        <a:lnSpc>
+          <a:spcPct val="100000"/>
+        </a:lnSpc>
+        <a:spcBef>
+          <a:spcPts val="0"/>
+        </a:spcBef>
+        <a:spcAft>
+          <a:spcPts val="0"/>
+        </a:spcAft>
+        <a:buClr>
+          <a:srgbClr val="000000"/>
+        </a:buClr>
+        <a:buFont typeface="Arial"/>
+        <a:defRPr b="0" i="0" sz="1400" u="none" cap="none" strike="noStrike">
+          <a:solidFill>
+            <a:srgbClr val="000000"/>
+          </a:solidFill>
+          <a:latin typeface="Arial"/>
+          <a:ea typeface="Arial"/>
+          <a:cs typeface="Arial"/>
+          <a:sym typeface="Arial"/>
+        </a:defRPr>
+      </a:lvl3pPr>
+      <a:lvl4pPr lvl="3" marR="0" rtl="0" algn="l">
+        <a:lnSpc>
+          <a:spcPct val="100000"/>
+        </a:lnSpc>
+        <a:spcBef>
+          <a:spcPts val="0"/>
+        </a:spcBef>
+        <a:spcAft>
+          <a:spcPts val="0"/>
+        </a:spcAft>
+        <a:buClr>
+          <a:srgbClr val="000000"/>
+        </a:buClr>
+        <a:buFont typeface="Arial"/>
+        <a:defRPr b="0" i="0" sz="1400" u="none" cap="none" strike="noStrike">
+          <a:solidFill>
+            <a:srgbClr val="000000"/>
+          </a:solidFill>
+          <a:latin typeface="Arial"/>
+          <a:ea typeface="Arial"/>
+          <a:cs typeface="Arial"/>
+          <a:sym typeface="Arial"/>
+        </a:defRPr>
+      </a:lvl4pPr>
+      <a:lvl5pPr lvl="4" marR="0" rtl="0" algn="l">
+        <a:lnSpc>
+          <a:spcPct val="100000"/>
+        </a:lnSpc>
+        <a:spcBef>
+          <a:spcPts val="0"/>
+        </a:spcBef>
+        <a:spcAft>
+          <a:spcPts val="0"/>
+        </a:spcAft>
+        <a:buClr>
+          <a:srgbClr val="000000"/>
+        </a:buClr>
+        <a:buFont typeface="Arial"/>
+        <a:defRPr b="0" i="0" sz="1400" u="none" cap="none" strike="noStrike">
+          <a:solidFill>
+            <a:srgbClr val="000000"/>
+          </a:solidFill>
+          <a:latin typeface="Arial"/>
+          <a:ea typeface="Arial"/>
+          <a:cs typeface="Arial"/>
+          <a:sym typeface="Arial"/>
+        </a:defRPr>
+      </a:lvl5pPr>
+      <a:lvl6pPr lvl="5" marR="0" rtl="0" algn="l">
+        <a:lnSpc>
+          <a:spcPct val="100000"/>
+        </a:lnSpc>
+        <a:spcBef>
+          <a:spcPts val="0"/>
+        </a:spcBef>
+        <a:spcAft>
+          <a:spcPts val="0"/>
+        </a:spcAft>
+        <a:buClr>
+          <a:srgbClr val="000000"/>
+        </a:buClr>
+        <a:buFont typeface="Arial"/>
+        <a:defRPr b="0" i="0" sz="1400" u="none" cap="none" strike="noStrike">
+          <a:solidFill>
+            <a:srgbClr val="000000"/>
+          </a:solidFill>
+          <a:latin typeface="Arial"/>
+          <a:ea typeface="Arial"/>
+          <a:cs typeface="Arial"/>
+          <a:sym typeface="Arial"/>
+        </a:defRPr>
+      </a:lvl6pPr>
+      <a:lvl7pPr lvl="6" marR="0" rtl="0" algn="l">
+        <a:lnSpc>
+          <a:spcPct val="100000"/>
+        </a:lnSpc>
+        <a:spcBef>
+          <a:spcPts val="0"/>
+        </a:spcBef>
+        <a:spcAft>
+          <a:spcPts val="0"/>
+        </a:spcAft>
+        <a:buClr>
+          <a:srgbClr val="000000"/>
+        </a:buClr>
+        <a:buFont typeface="Arial"/>
+        <a:defRPr b="0" i="0" sz="1400" u="none" cap="none" strike="noStrike">
+          <a:solidFill>
+            <a:srgbClr val="000000"/>
+          </a:solidFill>
+          <a:latin typeface="Arial"/>
+          <a:ea typeface="Arial"/>
+          <a:cs typeface="Arial"/>
+          <a:sym typeface="Arial"/>
+        </a:defRPr>
+      </a:lvl7pPr>
+      <a:lvl8pPr lvl="7" marR="0" rtl="0" algn="l">
+        <a:lnSpc>
+          <a:spcPct val="100000"/>
+        </a:lnSpc>
+        <a:spcBef>
+          <a:spcPts val="0"/>
+        </a:spcBef>
+        <a:spcAft>
+          <a:spcPts val="0"/>
+        </a:spcAft>
+        <a:buClr>
+          <a:srgbClr val="000000"/>
+        </a:buClr>
+        <a:buFont typeface="Arial"/>
+        <a:defRPr b="0" i="0" sz="1400" u="none" cap="none" strike="noStrike">
+          <a:solidFill>
+            <a:srgbClr val="000000"/>
+          </a:solidFill>
+          <a:latin typeface="Arial"/>
+          <a:ea typeface="Arial"/>
+          <a:cs typeface="Arial"/>
+          <a:sym typeface="Arial"/>
+        </a:defRPr>
+      </a:lvl8pPr>
+      <a:lvl9pPr lvl="8" marR="0" rtl="0" algn="l">
+        <a:lnSpc>
+          <a:spcPct val="100000"/>
+        </a:lnSpc>
+        <a:spcBef>
+          <a:spcPts val="0"/>
+        </a:spcBef>
+        <a:spcAft>
+          <a:spcPts val="0"/>
+        </a:spcAft>
+        <a:buClr>
+          <a:srgbClr val="000000"/>
+        </a:buClr>
+        <a:buFont typeface="Arial"/>
+        <a:defRPr b="0" i="0" sz="1400" u="none" cap="none" strike="noStrike">
+          <a:solidFill>
+            <a:srgbClr val="000000"/>
+          </a:solidFill>
+          <a:latin typeface="Arial"/>
+          <a:ea typeface="Arial"/>
+          <a:cs typeface="Arial"/>
+          <a:sym typeface="Arial"/>
+        </a:defRPr>
+      </a:lvl9pPr>
+    </p:titleStyle>
+    <p:bodyStyle>
+      <a:defPPr lvl="0" marR="0" rtl="0" algn="l">
+        <a:lnSpc>
+          <a:spcPct val="100000"/>
+        </a:lnSpc>
+        <a:spcBef>
+          <a:spcPts val="0"/>
+        </a:spcBef>
+        <a:spcAft>
+          <a:spcPts val="0"/>
+        </a:spcAft>
+      </a:defPPr>
+      <a:lvl1pPr lvl="0" marR="0" rtl="0" algn="l">
+        <a:lnSpc>
+          <a:spcPct val="100000"/>
+        </a:lnSpc>
+        <a:spcBef>
+          <a:spcPts val="0"/>
+        </a:spcBef>
+        <a:spcAft>
+          <a:spcPts val="0"/>
+        </a:spcAft>
+        <a:buClr>
+          <a:srgbClr val="000000"/>
+        </a:buClr>
+        <a:buFont typeface="Arial"/>
+        <a:defRPr b="0" i="0" sz="1400" u="none" cap="none" strike="noStrike">
+          <a:solidFill>
+            <a:srgbClr val="000000"/>
+          </a:solidFill>
+          <a:latin typeface="Arial"/>
+          <a:ea typeface="Arial"/>
+          <a:cs typeface="Arial"/>
+          <a:sym typeface="Arial"/>
+        </a:defRPr>
+      </a:lvl1pPr>
+      <a:lvl2pPr lvl="1" marR="0" rtl="0" algn="l">
+        <a:lnSpc>
+          <a:spcPct val="100000"/>
+        </a:lnSpc>
+        <a:spcBef>
+          <a:spcPts val="0"/>
+        </a:spcBef>
+        <a:spcAft>
+          <a:spcPts val="0"/>
+        </a:spcAft>
+        <a:buClr>
+          <a:srgbClr val="000000"/>
+        </a:buClr>
+        <a:buFont typeface="Arial"/>
+        <a:defRPr b="0" i="0" sz="1400" u="none" cap="none" strike="noStrike">
+          <a:solidFill>
+            <a:srgbClr val="000000"/>
+          </a:solidFill>
+          <a:latin typeface="Arial"/>
+          <a:ea typeface="Arial"/>
+          <a:cs typeface="Arial"/>
+          <a:sym typeface="Arial"/>
+        </a:defRPr>
+      </a:lvl2pPr>
+      <a:lvl3pPr lvl="2" marR="0" rtl="0" algn="l">
+        <a:lnSpc>
+          <a:spcPct val="100000"/>
+        </a:lnSpc>
+        <a:spcBef>
+          <a:spcPts val="0"/>
+        </a:spcBef>
+        <a:spcAft>
+          <a:spcPts val="0"/>
+        </a:spcAft>
+        <a:buClr>
+          <a:srgbClr val="000000"/>
+        </a:buClr>
+        <a:buFont typeface="Arial"/>
+        <a:defRPr b="0" i="0" sz="1400" u="none" cap="none" strike="noStrike">
+          <a:solidFill>
+            <a:srgbClr val="000000"/>
+          </a:solidFill>
+          <a:latin typeface="Arial"/>
+          <a:ea typeface="Arial"/>
+          <a:cs typeface="Arial"/>
+          <a:sym typeface="Arial"/>
+        </a:defRPr>
+      </a:lvl3pPr>
+      <a:lvl4pPr lvl="3" marR="0" rtl="0" algn="l">
+        <a:lnSpc>
+          <a:spcPct val="100000"/>
+        </a:lnSpc>
+        <a:spcBef>
+          <a:spcPts val="0"/>
+        </a:spcBef>
+        <a:spcAft>
+          <a:spcPts val="0"/>
+        </a:spcAft>
+        <a:buClr>
+          <a:srgbClr val="000000"/>
+        </a:buClr>
+        <a:buFont typeface="Arial"/>
+        <a:defRPr b="0" i="0" sz="1400" u="none" cap="none" strike="noStrike">
+          <a:solidFill>
+            <a:srgbClr val="000000"/>
+          </a:solidFill>
+          <a:latin typeface="Arial"/>
+          <a:ea typeface="Arial"/>
+          <a:cs typeface="Arial"/>
+          <a:sym typeface="Arial"/>
+        </a:defRPr>
+      </a:lvl4pPr>
+      <a:lvl5pPr lvl="4" marR="0" rtl="0" algn="l">
+        <a:lnSpc>
+          <a:spcPct val="100000"/>
+        </a:lnSpc>
+        <a:spcBef>
+          <a:spcPts val="0"/>
+        </a:spcBef>
+        <a:spcAft>
+          <a:spcPts val="0"/>
+        </a:spcAft>
+        <a:buClr>
+          <a:srgbClr val="000000"/>
+        </a:buClr>
+        <a:buFont typeface="Arial"/>
+        <a:defRPr b="0" i="0" sz="1400" u="none" cap="none" strike="noStrike">
+          <a:solidFill>
+            <a:srgbClr val="000000"/>
+          </a:solidFill>
+          <a:latin typeface="Arial"/>
+          <a:ea typeface="Arial"/>
+          <a:cs typeface="Arial"/>
+          <a:sym typeface="Arial"/>
+        </a:defRPr>
+      </a:lvl5pPr>
+      <a:lvl6pPr lvl="5" marR="0" rtl="0" algn="l">
+        <a:lnSpc>
+          <a:spcPct val="100000"/>
+        </a:lnSpc>
+        <a:spcBef>
+          <a:spcPts val="0"/>
+        </a:spcBef>
+        <a:spcAft>
+          <a:spcPts val="0"/>
+        </a:spcAft>
+        <a:buClr>
+          <a:srgbClr val="000000"/>
+        </a:buClr>
+        <a:buFont typeface="Arial"/>
+        <a:defRPr b="0" i="0" sz="1400" u="none" cap="none" strike="noStrike">
+          <a:solidFill>
+            <a:srgbClr val="000000"/>
+          </a:solidFill>
+          <a:latin typeface="Arial"/>
+          <a:ea typeface="Arial"/>
+          <a:cs typeface="Arial"/>
+          <a:sym typeface="Arial"/>
+        </a:defRPr>
+      </a:lvl6pPr>
+      <a:lvl7pPr lvl="6" marR="0" rtl="0" algn="l">
+        <a:lnSpc>
+          <a:spcPct val="100000"/>
+        </a:lnSpc>
+        <a:spcBef>
+          <a:spcPts val="0"/>
+        </a:spcBef>
+        <a:spcAft>
+          <a:spcPts val="0"/>
+        </a:spcAft>
+        <a:buClr>
+          <a:srgbClr val="000000"/>
+        </a:buClr>
+        <a:buFont typeface="Arial"/>
+        <a:defRPr b="0" i="0" sz="1400" u="none" cap="none" strike="noStrike">
+          <a:solidFill>
+            <a:srgbClr val="000000"/>
+          </a:solidFill>
+          <a:latin typeface="Arial"/>
+          <a:ea typeface="Arial"/>
+          <a:cs typeface="Arial"/>
+          <a:sym typeface="Arial"/>
+        </a:defRPr>
+      </a:lvl7pPr>
+      <a:lvl8pPr lvl="7" marR="0" rtl="0" algn="l">
+        <a:lnSpc>
+          <a:spcPct val="100000"/>
+        </a:lnSpc>
+        <a:spcBef>
+          <a:spcPts val="0"/>
+        </a:spcBef>
+        <a:spcAft>
+          <a:spcPts val="0"/>
+        </a:spcAft>
+        <a:buClr>
+          <a:srgbClr val="000000"/>
+        </a:buClr>
+        <a:buFont typeface="Arial"/>
+        <a:defRPr b="0" i="0" sz="1400" u="none" cap="none" strike="noStrike">
+          <a:solidFill>
+            <a:srgbClr val="000000"/>
+          </a:solidFill>
+          <a:latin typeface="Arial"/>
+          <a:ea typeface="Arial"/>
+          <a:cs typeface="Arial"/>
+          <a:sym typeface="Arial"/>
+        </a:defRPr>
+      </a:lvl8pPr>
+      <a:lvl9pPr lvl="8" marR="0" rtl="0" algn="l">
+        <a:lnSpc>
+          <a:spcPct val="100000"/>
+        </a:lnSpc>
+        <a:spcBef>
+          <a:spcPts val="0"/>
+        </a:spcBef>
+        <a:spcAft>
+          <a:spcPts val="0"/>
+        </a:spcAft>
+        <a:buClr>
+          <a:srgbClr val="000000"/>
+        </a:buClr>
+        <a:buFont typeface="Arial"/>
+        <a:defRPr b="0" i="0" sz="1400" u="none" cap="none" strike="noStrike">
+          <a:solidFill>
+            <a:srgbClr val="000000"/>
+          </a:solidFill>
+          <a:latin typeface="Arial"/>
+          <a:ea typeface="Arial"/>
+          <a:cs typeface="Arial"/>
+          <a:sym typeface="Arial"/>
+        </a:defRPr>
+      </a:lvl9pPr>
+    </p:bodyStyle>
+    <p:otherStyle>
+      <a:defPPr lvl="0" marR="0" rtl="0" algn="l">
+        <a:lnSpc>
+          <a:spcPct val="100000"/>
+        </a:lnSpc>
+        <a:spcBef>
+          <a:spcPts val="0"/>
+        </a:spcBef>
+        <a:spcAft>
+          <a:spcPts val="0"/>
+        </a:spcAft>
+      </a:defPPr>
+      <a:lvl1pPr lvl="0" marR="0" rtl="0" algn="l">
+        <a:lnSpc>
+          <a:spcPct val="100000"/>
+        </a:lnSpc>
+        <a:spcBef>
+          <a:spcPts val="0"/>
+        </a:spcBef>
+        <a:spcAft>
+          <a:spcPts val="0"/>
+        </a:spcAft>
+        <a:buClr>
+          <a:srgbClr val="000000"/>
+        </a:buClr>
+        <a:buFont typeface="Arial"/>
+        <a:defRPr b="0" i="0" sz="1400" u="none" cap="none" strike="noStrike">
+          <a:solidFill>
+            <a:srgbClr val="000000"/>
+          </a:solidFill>
+          <a:latin typeface="Arial"/>
+          <a:ea typeface="Arial"/>
+          <a:cs typeface="Arial"/>
+          <a:sym typeface="Arial"/>
+        </a:defRPr>
+      </a:lvl1pPr>
+      <a:lvl2pPr lvl="1" marR="0" rtl="0" algn="l">
+        <a:lnSpc>
+          <a:spcPct val="100000"/>
+        </a:lnSpc>
+        <a:spcBef>
+          <a:spcPts val="0"/>
+        </a:spcBef>
+        <a:spcAft>
+          <a:spcPts val="0"/>
+        </a:spcAft>
+        <a:buClr>
+          <a:srgbClr val="000000"/>
+        </a:buClr>
+        <a:buFont typeface="Arial"/>
+        <a:defRPr b="0" i="0" sz="1400" u="none" cap="none" strike="noStrike">
+          <a:solidFill>
+            <a:srgbClr val="000000"/>
+          </a:solidFill>
+          <a:latin typeface="Arial"/>
+          <a:ea typeface="Arial"/>
+          <a:cs typeface="Arial"/>
+          <a:sym typeface="Arial"/>
+        </a:defRPr>
+      </a:lvl2pPr>
+      <a:lvl3pPr lvl="2" marR="0" rtl="0" algn="l">
+        <a:lnSpc>
+          <a:spcPct val="100000"/>
+        </a:lnSpc>
+        <a:spcBef>
+          <a:spcPts val="0"/>
+        </a:spcBef>
+        <a:spcAft>
+          <a:spcPts val="0"/>
+        </a:spcAft>
+        <a:buClr>
+          <a:srgbClr val="000000"/>
+        </a:buClr>
+        <a:buFont typeface="Arial"/>
+        <a:defRPr b="0" i="0" sz="1400" u="none" cap="none" strike="noStrike">
+          <a:solidFill>
+            <a:srgbClr val="000000"/>
+          </a:solidFill>
+          <a:latin typeface="Arial"/>
+          <a:ea typeface="Arial"/>
+          <a:cs typeface="Arial"/>
+          <a:sym typeface="Arial"/>
+        </a:defRPr>
+      </a:lvl3pPr>
+      <a:lvl4pPr lvl="3" marR="0" rtl="0" algn="l">
+        <a:lnSpc>
+          <a:spcPct val="100000"/>
+        </a:lnSpc>
+        <a:spcBef>
+          <a:spcPts val="0"/>
+        </a:spcBef>
+        <a:spcAft>
+          <a:spcPts val="0"/>
+        </a:spcAft>
+        <a:buClr>
+          <a:srgbClr val="000000"/>
+        </a:buClr>
+        <a:buFont typeface="Arial"/>
+        <a:defRPr b="0" i="0" sz="1400" u="none" cap="none" strike="noStrike">
+          <a:solidFill>
+            <a:srgbClr val="000000"/>
+          </a:solidFill>
+          <a:latin typeface="Arial"/>
+          <a:ea typeface="Arial"/>
+          <a:cs typeface="Arial"/>
+          <a:sym typeface="Arial"/>
+        </a:defRPr>
+      </a:lvl4pPr>
+      <a:lvl5pPr lvl="4" marR="0" rtl="0" algn="l">
+        <a:lnSpc>
+          <a:spcPct val="100000"/>
+        </a:lnSpc>
+        <a:spcBef>
+          <a:spcPts val="0"/>
+        </a:spcBef>
+        <a:spcAft>
+          <a:spcPts val="0"/>
+        </a:spcAft>
+        <a:buClr>
+          <a:srgbClr val="000000"/>
+        </a:buClr>
+        <a:buFont typeface="Arial"/>
+        <a:defRPr b="0" i="0" sz="1400" u="none" cap="none" strike="noStrike">
+          <a:solidFill>
+            <a:srgbClr val="000000"/>
+          </a:solidFill>
+          <a:latin typeface="Arial"/>
+          <a:ea typeface="Arial"/>
+          <a:cs typeface="Arial"/>
+          <a:sym typeface="Arial"/>
+        </a:defRPr>
+      </a:lvl5pPr>
+      <a:lvl6pPr lvl="5" marR="0" rtl="0" algn="l">
+        <a:lnSpc>
+          <a:spcPct val="100000"/>
+        </a:lnSpc>
+        <a:spcBef>
+          <a:spcPts val="0"/>
+        </a:spcBef>
+        <a:spcAft>
+          <a:spcPts val="0"/>
+        </a:spcAft>
+        <a:buClr>
+          <a:srgbClr val="000000"/>
+        </a:buClr>
+        <a:buFont typeface="Arial"/>
+        <a:defRPr b="0" i="0" sz="1400" u="none" cap="none" strike="noStrike">
+          <a:solidFill>
+            <a:srgbClr val="000000"/>
+          </a:solidFill>
+          <a:latin typeface="Arial"/>
+          <a:ea typeface="Arial"/>
+          <a:cs typeface="Arial"/>
+          <a:sym typeface="Arial"/>
+        </a:defRPr>
+      </a:lvl6pPr>
+      <a:lvl7pPr lvl="6" marR="0" rtl="0" algn="l">
+        <a:lnSpc>
+          <a:spcPct val="100000"/>
+        </a:lnSpc>
+        <a:spcBef>
+          <a:spcPts val="0"/>
+        </a:spcBef>
+        <a:spcAft>
+          <a:spcPts val="0"/>
+        </a:spcAft>
+        <a:buClr>
+          <a:srgbClr val="000000"/>
+        </a:buClr>
+        <a:buFont typeface="Arial"/>
+        <a:defRPr b="0" i="0" sz="1400" u="none" cap="none" strike="noStrike">
+          <a:solidFill>
+            <a:srgbClr val="000000"/>
+          </a:solidFill>
+          <a:latin typeface="Arial"/>
+          <a:ea typeface="Arial"/>
+          <a:cs typeface="Arial"/>
+          <a:sym typeface="Arial"/>
+        </a:defRPr>
+      </a:lvl7pPr>
+      <a:lvl8pPr lvl="7" marR="0" rtl="0" algn="l">
+        <a:lnSpc>
+          <a:spcPct val="100000"/>
+        </a:lnSpc>
+        <a:spcBef>
+          <a:spcPts val="0"/>
+        </a:spcBef>
+        <a:spcAft>
+          <a:spcPts val="0"/>
+        </a:spcAft>
+        <a:buClr>
+          <a:srgbClr val="000000"/>
+        </a:buClr>
+        <a:buFont typeface="Arial"/>
+        <a:defRPr b="0" i="0" sz="1400" u="none" cap="none" strike="noStrike">
+          <a:solidFill>
+            <a:srgbClr val="000000"/>
+          </a:solidFill>
+          <a:latin typeface="Arial"/>
+          <a:ea typeface="Arial"/>
+          <a:cs typeface="Arial"/>
+          <a:sym typeface="Arial"/>
+        </a:defRPr>
+      </a:lvl8pPr>
+      <a:lvl9pPr lvl="8" marR="0" rtl="0" algn="l">
+        <a:lnSpc>
+          <a:spcPct val="100000"/>
+        </a:lnSpc>
+        <a:spcBef>
+          <a:spcPts val="0"/>
+        </a:spcBef>
+        <a:spcAft>
+          <a:spcPts val="0"/>
+        </a:spcAft>
+        <a:buClr>
+          <a:srgbClr val="000000"/>
+        </a:buClr>
+        <a:buFont typeface="Arial"/>
+        <a:defRPr b="0" i="0" sz="1400" u="none" cap="none" strike="noStrike">
+          <a:solidFill>
+            <a:srgbClr val="000000"/>
+          </a:solidFill>
+          <a:latin typeface="Arial"/>
+          <a:ea typeface="Arial"/>
+          <a:cs typeface="Arial"/>
+          <a:sym typeface="Arial"/>
+        </a:defRPr>
+      </a:lvl9pPr>
+    </p:otherStyle>
+  </p:txStyles>
+</p:sldMaster>
+</file>
+
+<file path=ppt/slides/slide1.xml><?xml version="1.0" encoding="utf-8"?>
+<p:sld xmlns:a="http://schemas.openxmlformats.org/drawingml/2006/main" xmlns:r="http://schemas.openxmlformats.org/officeDocument/2006/relationships" xmlns:mc="http://schemas.openxmlformats.org/markup-compatibility/2006" xmlns:mv="urn:schemas-microsoft-com:mac:vml" xmlns:p="http://schemas.openxmlformats.org/presentationml/2006/main" xmlns:c="http://schemas.openxmlformats.org/drawingml/2006/chart" xmlns:dgm="http://schemas.openxmlformats.org/drawingml/2006/diagram" xmlns:o="urn:schemas-microsoft-com:office:office" xmlns:v="urn:schemas-microsoft-com:vml" xmlns:pvml="urn:schemas-microsoft-com:office:powerpoint" xmlns:com="http://schemas.openxmlformats.org/drawingml/2006/compatibility" xmlns:p14="http://schemas.microsoft.com/office/powerpoint/2010/main" xmlns:p15="http://schemas.microsoft.com/office/powerpoint/2012/main" xmlns:ahyp="http://schemas.microsoft.com/office/drawing/2018/hyperlinkcolor">
+  <p:cSld>
+    <p:spTree>
+      <p:nvGrpSpPr>
+        <p:cNvPr id="92" name="Shape 92"/>
+        <p:cNvGrpSpPr/>
+        <p:nvPr/>
+      </p:nvGrpSpPr>
+      <p:grpSpPr>
+        <a:xfrm>
+          <a:off x="0" y="0"/>
+          <a:ext cx="0" cy="0"/>
+          <a:chOff x="0" y="0"/>
+          <a:chExt cx="0" cy="0"/>
+        </a:xfrm>
+      </p:grpSpPr>
+      <p:sp>
+        <p:nvSpPr>
+          <p:cNvPr id="93" name="Google Shape;93;p15"/>
           <p:cNvSpPr txBox="1"/>
           <p:nvPr>
             <p:ph type="ctrTitle"/>
@@ -10693,7 +14451,7 @@
       </p:sp>
       <p:sp>
         <p:nvSpPr>
-          <p:cNvPr id="52" name="Google Shape;52;p8"/>
+          <p:cNvPr id="94" name="Google Shape;94;p15"/>
           <p:cNvSpPr txBox="1"/>
           <p:nvPr>
             <p:ph idx="1" type="subTitle"/>
@@ -10800,7 +14558,7 @@
   <p:cSld>
     <p:spTree>
       <p:nvGrpSpPr>
-        <p:cNvPr id="113" name="Shape 113"/>
+        <p:cNvPr id="155" name="Shape 155"/>
         <p:cNvGrpSpPr/>
         <p:nvPr/>
       </p:nvGrpSpPr>
@@ -10814,7 +14572,7 @@
       </p:grpSpPr>
       <p:sp>
         <p:nvSpPr>
-          <p:cNvPr id="114" name="Google Shape;114;p17"/>
+          <p:cNvPr id="156" name="Google Shape;156;p24"/>
           <p:cNvSpPr txBox="1"/>
           <p:nvPr>
             <p:ph type="title"/>
@@ -10865,7 +14623,7 @@
   <p:cSld>
     <p:spTree>
       <p:nvGrpSpPr>
-        <p:cNvPr id="118" name="Shape 118"/>
+        <p:cNvPr id="160" name="Shape 160"/>
         <p:cNvGrpSpPr/>
         <p:nvPr/>
       </p:nvGrpSpPr>
@@ -10879,7 +14637,7 @@
       </p:grpSpPr>
       <p:sp>
         <p:nvSpPr>
-          <p:cNvPr id="119" name="Google Shape;119;p18"/>
+          <p:cNvPr id="161" name="Google Shape;161;p25"/>
           <p:cNvSpPr txBox="1"/>
           <p:nvPr>
             <p:ph type="title"/>
@@ -10919,7 +14677,7 @@
       </p:sp>
       <p:sp>
         <p:nvSpPr>
-          <p:cNvPr id="120" name="Google Shape;120;p18"/>
+          <p:cNvPr id="162" name="Google Shape;162;p25"/>
           <p:cNvSpPr txBox="1"/>
           <p:nvPr>
             <p:ph idx="12" type="sldNum"/>
@@ -10992,7 +14750,7 @@
       </p:sp>
       <p:sp>
         <p:nvSpPr>
-          <p:cNvPr id="121" name="Google Shape;121;p18"/>
+          <p:cNvPr id="163" name="Google Shape;163;p25"/>
           <p:cNvSpPr txBox="1"/>
           <p:nvPr>
             <p:ph idx="1" type="body"/>
@@ -11154,7 +14912,7 @@
   <p:cSld>
     <p:spTree>
       <p:nvGrpSpPr>
-        <p:cNvPr id="125" name="Shape 125"/>
+        <p:cNvPr id="167" name="Shape 167"/>
         <p:cNvGrpSpPr/>
         <p:nvPr/>
       </p:nvGrpSpPr>
@@ -11168,7 +14926,7 @@
       </p:grpSpPr>
       <p:sp>
         <p:nvSpPr>
-          <p:cNvPr id="126" name="Google Shape;126;p19"/>
+          <p:cNvPr id="168" name="Google Shape;168;p26"/>
           <p:cNvSpPr txBox="1"/>
           <p:nvPr>
             <p:ph type="title"/>
@@ -11208,7 +14966,7 @@
       </p:sp>
       <p:sp>
         <p:nvSpPr>
-          <p:cNvPr id="127" name="Google Shape;127;p19"/>
+          <p:cNvPr id="169" name="Google Shape;169;p26"/>
           <p:cNvSpPr txBox="1"/>
           <p:nvPr>
             <p:ph idx="12" type="sldNum"/>
@@ -11281,7 +15039,7 @@
       </p:sp>
       <p:graphicFrame>
         <p:nvGraphicFramePr>
-          <p:cNvPr id="128" name="Google Shape;128;p19"/>
+          <p:cNvPr id="170" name="Google Shape;170;p26"/>
           <p:cNvGraphicFramePr/>
           <p:nvPr/>
         </p:nvGraphicFramePr>
@@ -11294,7 +15052,7 @@
             <a:tbl>
               <a:tblPr>
                 <a:noFill/>
-                <a:tableStyleId>{C8642286-7339-4B29-B360-2DF6F540B912}</a:tableStyleId>
+                <a:tableStyleId>{06765188-D505-4E99-84A0-020E74BA5E39}</a:tableStyleId>
               </a:tblPr>
               <a:tblGrid>
                 <a:gridCol w="2466575"/>
@@ -12093,7 +15851,7 @@
   <p:cSld>
     <p:spTree>
       <p:nvGrpSpPr>
-        <p:cNvPr id="132" name="Shape 132"/>
+        <p:cNvPr id="174" name="Shape 174"/>
         <p:cNvGrpSpPr/>
         <p:nvPr/>
       </p:nvGrpSpPr>
@@ -12107,7 +15865,7 @@
       </p:grpSpPr>
       <p:sp>
         <p:nvSpPr>
-          <p:cNvPr id="133" name="Google Shape;133;p20"/>
+          <p:cNvPr id="175" name="Google Shape;175;p27"/>
           <p:cNvSpPr txBox="1"/>
           <p:nvPr>
             <p:ph type="title"/>
@@ -12147,7 +15905,7 @@
       </p:sp>
       <p:sp>
         <p:nvSpPr>
-          <p:cNvPr id="134" name="Google Shape;134;p20"/>
+          <p:cNvPr id="176" name="Google Shape;176;p27"/>
           <p:cNvSpPr txBox="1"/>
           <p:nvPr>
             <p:ph idx="1" type="body"/>
@@ -12213,7 +15971,7 @@
             </a:pPr>
             <a:r>
               <a:rPr lang="en"/>
-              <a:t>Confusing application with technical domain</a:t>
+              <a:t>Confusing application with implementation domain [1]</a:t>
             </a:r>
             <a:endParaRPr/>
           </a:p>
@@ -12305,7 +16063,7 @@
       </p:sp>
       <p:sp>
         <p:nvSpPr>
-          <p:cNvPr id="135" name="Google Shape;135;p20"/>
+          <p:cNvPr id="177" name="Google Shape;177;p27"/>
           <p:cNvSpPr txBox="1"/>
           <p:nvPr>
             <p:ph idx="12" type="sldNum"/>
@@ -12376,590 +16134,9 @@
           </a:p>
         </p:txBody>
       </p:sp>
-    </p:spTree>
-  </p:cSld>
-  <p:clrMapOvr>
-    <a:masterClrMapping/>
-  </p:clrMapOvr>
-</p:sld>
-</file>
-
-<file path=ppt/slides/slide14.xml><?xml version="1.0" encoding="utf-8"?>
-<p:sld xmlns:a="http://schemas.openxmlformats.org/drawingml/2006/main" xmlns:r="http://schemas.openxmlformats.org/officeDocument/2006/relationships" xmlns:mc="http://schemas.openxmlformats.org/markup-compatibility/2006" xmlns:mv="urn:schemas-microsoft-com:mac:vml" xmlns:p="http://schemas.openxmlformats.org/presentationml/2006/main" xmlns:c="http://schemas.openxmlformats.org/drawingml/2006/chart" xmlns:dgm="http://schemas.openxmlformats.org/drawingml/2006/diagram" xmlns:o="urn:schemas-microsoft-com:office:office" xmlns:v="urn:schemas-microsoft-com:vml" xmlns:pvml="urn:schemas-microsoft-com:office:powerpoint" xmlns:com="http://schemas.openxmlformats.org/drawingml/2006/compatibility" xmlns:p14="http://schemas.microsoft.com/office/powerpoint/2010/main" xmlns:p15="http://schemas.microsoft.com/office/powerpoint/2012/main" xmlns:ahyp="http://schemas.microsoft.com/office/drawing/2018/hyperlinkcolor">
-  <p:cSld>
-    <p:spTree>
-      <p:nvGrpSpPr>
-        <p:cNvPr id="139" name="Shape 139"/>
-        <p:cNvGrpSpPr/>
-        <p:nvPr/>
-      </p:nvGrpSpPr>
-      <p:grpSpPr>
-        <a:xfrm>
-          <a:off x="0" y="0"/>
-          <a:ext cx="0" cy="0"/>
-          <a:chOff x="0" y="0"/>
-          <a:chExt cx="0" cy="0"/>
-        </a:xfrm>
-      </p:grpSpPr>
       <p:sp>
         <p:nvSpPr>
-          <p:cNvPr id="140" name="Google Shape;140;p21"/>
-          <p:cNvSpPr txBox="1"/>
-          <p:nvPr>
-            <p:ph type="title"/>
-          </p:nvPr>
-        </p:nvSpPr>
-        <p:spPr>
-          <a:xfrm>
-            <a:off x="0" y="0"/>
-            <a:ext cx="9144000" cy="685800"/>
-          </a:xfrm>
-          <a:prstGeom prst="rect">
-            <a:avLst/>
-          </a:prstGeom>
-        </p:spPr>
-        <p:txBody>
-          <a:bodyPr anchorCtr="0" anchor="ctr" bIns="91425" lIns="274300" spcFirstLastPara="1" rIns="91425" wrap="square" tIns="91425">
-            <a:noAutofit/>
-          </a:bodyPr>
-          <a:lstStyle/>
-          <a:p>
-            <a:pPr indent="0" lvl="0" marL="0" rtl="0" algn="l">
-              <a:spcBef>
-                <a:spcPts val="0"/>
-              </a:spcBef>
-              <a:spcAft>
-                <a:spcPts val="0"/>
-              </a:spcAft>
-              <a:buNone/>
-            </a:pPr>
-            <a:r>
-              <a:rPr lang="en"/>
-              <a:t>Regular</a:t>
-            </a:r>
-            <a:r>
-              <a:rPr lang="en"/>
-              <a:t> Deliverable: Product Glossary</a:t>
-            </a:r>
-            <a:endParaRPr/>
-          </a:p>
-        </p:txBody>
-      </p:sp>
-      <p:sp>
-        <p:nvSpPr>
-          <p:cNvPr id="141" name="Google Shape;141;p21"/>
-          <p:cNvSpPr txBox="1"/>
-          <p:nvPr>
-            <p:ph idx="1" type="body"/>
-          </p:nvPr>
-        </p:nvSpPr>
-        <p:spPr>
-          <a:xfrm>
-            <a:off x="274320" y="914400"/>
-            <a:ext cx="8595300" cy="4114800"/>
-          </a:xfrm>
-          <a:prstGeom prst="rect">
-            <a:avLst/>
-          </a:prstGeom>
-        </p:spPr>
-        <p:txBody>
-          <a:bodyPr anchorCtr="0" anchor="t" bIns="0" lIns="0" spcFirstLastPara="1" rIns="0" wrap="square" tIns="0">
-            <a:noAutofit/>
-          </a:bodyPr>
-          <a:lstStyle/>
-          <a:p>
-            <a:pPr indent="0" lvl="0" marL="0" rtl="0" algn="l">
-              <a:spcBef>
-                <a:spcPts val="0"/>
-              </a:spcBef>
-              <a:spcAft>
-                <a:spcPts val="1200"/>
-              </a:spcAft>
-              <a:buNone/>
-            </a:pPr>
-            <a:r>
-              <a:rPr lang="en"/>
-              <a:t>Please create a product glossary and keep it up-to-date </a:t>
-            </a:r>
-            <a:endParaRPr/>
-          </a:p>
-        </p:txBody>
-      </p:sp>
-      <p:sp>
-        <p:nvSpPr>
-          <p:cNvPr id="142" name="Google Shape;142;p21"/>
-          <p:cNvSpPr txBox="1"/>
-          <p:nvPr>
-            <p:ph idx="12" type="sldNum"/>
-          </p:nvPr>
-        </p:nvSpPr>
-        <p:spPr>
-          <a:xfrm>
-            <a:off x="7315202" y="4416550"/>
-            <a:ext cx="1828800" cy="731400"/>
-          </a:xfrm>
-          <a:prstGeom prst="rect">
-            <a:avLst/>
-          </a:prstGeom>
-        </p:spPr>
-        <p:txBody>
-          <a:bodyPr anchorCtr="0" anchor="b" bIns="91425" lIns="91425" spcFirstLastPara="1" rIns="91425" wrap="square" tIns="91425">
-            <a:noAutofit/>
-          </a:bodyPr>
-          <a:lstStyle/>
-          <a:p>
-            <a:pPr indent="0" lvl="0" marL="0" rtl="0" algn="r">
-              <a:spcBef>
-                <a:spcPts val="0"/>
-              </a:spcBef>
-              <a:spcAft>
-                <a:spcPts val="0"/>
-              </a:spcAft>
-              <a:buNone/>
-            </a:pPr>
-            <a:fld id="{00000000-1234-1234-1234-123412341234}" type="slidenum">
-              <a:rPr lang="en">
-                <a:solidFill>
-                  <a:schemeClr val="dk1"/>
-                </a:solidFill>
-              </a:rPr>
-              <a:t>‹#›</a:t>
-            </a:fld>
-            <a:endParaRPr>
-              <a:solidFill>
-                <a:schemeClr val="dk1"/>
-              </a:solidFill>
-            </a:endParaRPr>
-          </a:p>
-          <a:p>
-            <a:pPr indent="0" lvl="0" marL="0" rtl="0" algn="r">
-              <a:spcBef>
-                <a:spcPts val="0"/>
-              </a:spcBef>
-              <a:spcAft>
-                <a:spcPts val="0"/>
-              </a:spcAft>
-              <a:buNone/>
-            </a:pPr>
-            <a:r>
-              <a:rPr b="0" lang="en" sz="900" u="sng">
-                <a:solidFill>
-                  <a:schemeClr val="hlink"/>
-                </a:solidFill>
-                <a:hlinkClick r:id="rId3"/>
-              </a:rPr>
-              <a:t>https://oss.cs.fau.de</a:t>
-            </a:r>
-            <a:r>
-              <a:rPr b="0" lang="en" sz="900"/>
-              <a:t> </a:t>
-            </a:r>
-            <a:endParaRPr b="0" sz="900"/>
-          </a:p>
-        </p:txBody>
-      </p:sp>
-    </p:spTree>
-  </p:cSld>
-  <p:clrMapOvr>
-    <a:masterClrMapping/>
-  </p:clrMapOvr>
-</p:sld>
-</file>
-
-<file path=ppt/slides/slide15.xml><?xml version="1.0" encoding="utf-8"?>
-<p:sld xmlns:a="http://schemas.openxmlformats.org/drawingml/2006/main" xmlns:r="http://schemas.openxmlformats.org/officeDocument/2006/relationships" xmlns:mc="http://schemas.openxmlformats.org/markup-compatibility/2006" xmlns:mv="urn:schemas-microsoft-com:mac:vml" xmlns:p="http://schemas.openxmlformats.org/presentationml/2006/main" xmlns:c="http://schemas.openxmlformats.org/drawingml/2006/chart" xmlns:dgm="http://schemas.openxmlformats.org/drawingml/2006/diagram" xmlns:o="urn:schemas-microsoft-com:office:office" xmlns:v="urn:schemas-microsoft-com:vml" xmlns:pvml="urn:schemas-microsoft-com:office:powerpoint" xmlns:com="http://schemas.openxmlformats.org/drawingml/2006/compatibility" xmlns:p14="http://schemas.microsoft.com/office/powerpoint/2010/main" xmlns:p15="http://schemas.microsoft.com/office/powerpoint/2012/main" xmlns:ahyp="http://schemas.microsoft.com/office/drawing/2018/hyperlinkcolor">
-  <p:cSld>
-    <p:spTree>
-      <p:nvGrpSpPr>
-        <p:cNvPr id="146" name="Shape 146"/>
-        <p:cNvGrpSpPr/>
-        <p:nvPr/>
-      </p:nvGrpSpPr>
-      <p:grpSpPr>
-        <a:xfrm>
-          <a:off x="0" y="0"/>
-          <a:ext cx="0" cy="0"/>
-          <a:chOff x="0" y="0"/>
-          <a:chExt cx="0" cy="0"/>
-        </a:xfrm>
-      </p:grpSpPr>
-      <p:sp>
-        <p:nvSpPr>
-          <p:cNvPr id="147" name="Google Shape;147;p22"/>
-          <p:cNvSpPr txBox="1"/>
-          <p:nvPr>
-            <p:ph type="title"/>
-          </p:nvPr>
-        </p:nvSpPr>
-        <p:spPr>
-          <a:xfrm>
-            <a:off x="0" y="-7"/>
-            <a:ext cx="9144000" cy="2386500"/>
-          </a:xfrm>
-          <a:prstGeom prst="rect">
-            <a:avLst/>
-          </a:prstGeom>
-        </p:spPr>
-        <p:txBody>
-          <a:bodyPr anchorCtr="0" anchor="b" bIns="274300" lIns="91425" spcFirstLastPara="1" rIns="91425" wrap="square" tIns="91425">
-            <a:noAutofit/>
-          </a:bodyPr>
-          <a:lstStyle/>
-          <a:p>
-            <a:pPr indent="0" lvl="0" marL="0" rtl="0" algn="ctr">
-              <a:spcBef>
-                <a:spcPts val="0"/>
-              </a:spcBef>
-              <a:spcAft>
-                <a:spcPts val="0"/>
-              </a:spcAft>
-              <a:buNone/>
-            </a:pPr>
-            <a:r>
-              <a:rPr lang="en"/>
-              <a:t>3. Product Backlog</a:t>
-            </a:r>
-            <a:endParaRPr/>
-          </a:p>
-        </p:txBody>
-      </p:sp>
-    </p:spTree>
-  </p:cSld>
-  <p:clrMapOvr>
-    <a:masterClrMapping/>
-  </p:clrMapOvr>
-</p:sld>
-</file>
-
-<file path=ppt/slides/slide16.xml><?xml version="1.0" encoding="utf-8"?>
-<p:sld xmlns:a="http://schemas.openxmlformats.org/drawingml/2006/main" xmlns:r="http://schemas.openxmlformats.org/officeDocument/2006/relationships" xmlns:mc="http://schemas.openxmlformats.org/markup-compatibility/2006" xmlns:mv="urn:schemas-microsoft-com:mac:vml" xmlns:p="http://schemas.openxmlformats.org/presentationml/2006/main" xmlns:c="http://schemas.openxmlformats.org/drawingml/2006/chart" xmlns:dgm="http://schemas.openxmlformats.org/drawingml/2006/diagram" xmlns:o="urn:schemas-microsoft-com:office:office" xmlns:v="urn:schemas-microsoft-com:vml" xmlns:pvml="urn:schemas-microsoft-com:office:powerpoint" xmlns:com="http://schemas.openxmlformats.org/drawingml/2006/compatibility" xmlns:p14="http://schemas.microsoft.com/office/powerpoint/2010/main" xmlns:p15="http://schemas.microsoft.com/office/powerpoint/2012/main" xmlns:ahyp="http://schemas.microsoft.com/office/drawing/2018/hyperlinkcolor">
-  <p:cSld>
-    <p:spTree>
-      <p:nvGrpSpPr>
-        <p:cNvPr id="151" name="Shape 151"/>
-        <p:cNvGrpSpPr/>
-        <p:nvPr/>
-      </p:nvGrpSpPr>
-      <p:grpSpPr>
-        <a:xfrm>
-          <a:off x="0" y="0"/>
-          <a:ext cx="0" cy="0"/>
-          <a:chOff x="0" y="0"/>
-          <a:chExt cx="0" cy="0"/>
-        </a:xfrm>
-      </p:grpSpPr>
-      <p:sp>
-        <p:nvSpPr>
-          <p:cNvPr id="152" name="Google Shape;152;p23"/>
-          <p:cNvSpPr txBox="1"/>
-          <p:nvPr>
-            <p:ph idx="1" type="body"/>
-          </p:nvPr>
-        </p:nvSpPr>
-        <p:spPr>
-          <a:xfrm>
-            <a:off x="274320" y="914400"/>
-            <a:ext cx="8595300" cy="4114800"/>
-          </a:xfrm>
-          <a:prstGeom prst="rect">
-            <a:avLst/>
-          </a:prstGeom>
-        </p:spPr>
-        <p:txBody>
-          <a:bodyPr anchorCtr="0" anchor="t" bIns="0" lIns="0" spcFirstLastPara="1" rIns="0" wrap="square" tIns="0">
-            <a:noAutofit/>
-          </a:bodyPr>
-          <a:lstStyle/>
-          <a:p>
-            <a:pPr indent="0" lvl="0" marL="0" rtl="0" algn="l">
-              <a:spcBef>
-                <a:spcPts val="0"/>
-              </a:spcBef>
-              <a:spcAft>
-                <a:spcPts val="0"/>
-              </a:spcAft>
-              <a:buNone/>
-            </a:pPr>
-            <a:r>
-              <a:rPr lang="en"/>
-              <a:t>A </a:t>
-            </a:r>
-            <a:r>
-              <a:rPr b="1" lang="en"/>
-              <a:t>backlog</a:t>
-            </a:r>
-            <a:r>
-              <a:rPr lang="en"/>
-              <a:t> is a</a:t>
-            </a:r>
-            <a:endParaRPr/>
-          </a:p>
-          <a:p>
-            <a:pPr indent="-342900" lvl="0" marL="457200" rtl="0" algn="l">
-              <a:spcBef>
-                <a:spcPts val="1200"/>
-              </a:spcBef>
-              <a:spcAft>
-                <a:spcPts val="0"/>
-              </a:spcAft>
-              <a:buSzPts val="1800"/>
-              <a:buChar char="●"/>
-            </a:pPr>
-            <a:r>
-              <a:rPr lang="en"/>
-              <a:t>Prioritized list of items that need doing</a:t>
-            </a:r>
-            <a:endParaRPr/>
-          </a:p>
-          <a:p>
-            <a:pPr indent="0" lvl="0" marL="0" rtl="0" algn="l">
-              <a:spcBef>
-                <a:spcPts val="1200"/>
-              </a:spcBef>
-              <a:spcAft>
-                <a:spcPts val="0"/>
-              </a:spcAft>
-              <a:buNone/>
-            </a:pPr>
-            <a:r>
-              <a:rPr lang="en"/>
-              <a:t>The</a:t>
-            </a:r>
-            <a:r>
-              <a:rPr b="1" lang="en"/>
-              <a:t> product backlog</a:t>
-            </a:r>
-            <a:r>
-              <a:rPr lang="en"/>
-              <a:t> is a backlog of items that</a:t>
-            </a:r>
-            <a:endParaRPr/>
-          </a:p>
-          <a:p>
-            <a:pPr indent="-342900" lvl="0" marL="457200" rtl="0" algn="l">
-              <a:spcBef>
-                <a:spcPts val="1200"/>
-              </a:spcBef>
-              <a:spcAft>
-                <a:spcPts val="0"/>
-              </a:spcAft>
-              <a:buSzPts val="1800"/>
-              <a:buChar char="●"/>
-            </a:pPr>
-            <a:r>
-              <a:rPr lang="en"/>
-              <a:t>Are expected of the software under development</a:t>
-            </a:r>
-            <a:endParaRPr/>
-          </a:p>
-          <a:p>
-            <a:pPr indent="0" lvl="0" marL="0" rtl="0" algn="l">
-              <a:spcBef>
-                <a:spcPts val="1200"/>
-              </a:spcBef>
-              <a:spcAft>
-                <a:spcPts val="0"/>
-              </a:spcAft>
-              <a:buNone/>
-            </a:pPr>
-            <a:r>
-              <a:rPr lang="en"/>
-              <a:t>The </a:t>
-            </a:r>
-            <a:r>
-              <a:rPr b="1" lang="en"/>
-              <a:t>sprint backlog</a:t>
-            </a:r>
-            <a:r>
-              <a:rPr lang="en"/>
-              <a:t> is a backlog of items that</a:t>
-            </a:r>
-            <a:endParaRPr/>
-          </a:p>
-          <a:p>
-            <a:pPr indent="-342900" lvl="0" marL="457200" rtl="0" algn="l">
-              <a:spcBef>
-                <a:spcPts val="1200"/>
-              </a:spcBef>
-              <a:spcAft>
-                <a:spcPts val="0"/>
-              </a:spcAft>
-              <a:buSzPts val="1800"/>
-              <a:buChar char="●"/>
-            </a:pPr>
-            <a:r>
-              <a:rPr lang="en"/>
-              <a:t>Are marked for doing in the upcoming sprint</a:t>
-            </a:r>
-            <a:endParaRPr/>
-          </a:p>
-          <a:p>
-            <a:pPr indent="0" lvl="0" marL="0" rtl="0" algn="l">
-              <a:spcBef>
-                <a:spcPts val="1200"/>
-              </a:spcBef>
-              <a:spcAft>
-                <a:spcPts val="0"/>
-              </a:spcAft>
-              <a:buNone/>
-            </a:pPr>
-            <a:r>
-              <a:rPr lang="en"/>
-              <a:t>The </a:t>
-            </a:r>
-            <a:r>
-              <a:rPr b="1" lang="en"/>
-              <a:t>impediments backlog</a:t>
-            </a:r>
-            <a:r>
-              <a:rPr lang="en"/>
-              <a:t> </a:t>
-            </a:r>
-            <a:r>
-              <a:rPr b="1" lang="en"/>
-              <a:t>[1] </a:t>
-            </a:r>
-            <a:r>
-              <a:rPr lang="en"/>
-              <a:t>is a backlog of items that</a:t>
-            </a:r>
-            <a:endParaRPr/>
-          </a:p>
-          <a:p>
-            <a:pPr indent="-342900" lvl="0" marL="457200" rtl="0" algn="l">
-              <a:spcBef>
-                <a:spcPts val="1200"/>
-              </a:spcBef>
-              <a:spcAft>
-                <a:spcPts val="0"/>
-              </a:spcAft>
-              <a:buSzPts val="1800"/>
-              <a:buChar char="●"/>
-            </a:pPr>
-            <a:r>
-              <a:rPr lang="en"/>
-              <a:t>Are impediments to resolve and improvements to make </a:t>
-            </a:r>
-            <a:endParaRPr/>
-          </a:p>
-        </p:txBody>
-      </p:sp>
-      <p:sp>
-        <p:nvSpPr>
-          <p:cNvPr id="153" name="Google Shape;153;p23"/>
-          <p:cNvSpPr txBox="1"/>
-          <p:nvPr>
-            <p:ph type="title"/>
-          </p:nvPr>
-        </p:nvSpPr>
-        <p:spPr>
-          <a:xfrm>
-            <a:off x="0" y="0"/>
-            <a:ext cx="9144000" cy="685800"/>
-          </a:xfrm>
-          <a:prstGeom prst="rect">
-            <a:avLst/>
-          </a:prstGeom>
-        </p:spPr>
-        <p:txBody>
-          <a:bodyPr anchorCtr="0" anchor="ctr" bIns="91425" lIns="274300" spcFirstLastPara="1" rIns="91425" wrap="square" tIns="91425">
-            <a:noAutofit/>
-          </a:bodyPr>
-          <a:lstStyle/>
-          <a:p>
-            <a:pPr indent="0" lvl="0" marL="0" rtl="0" algn="l">
-              <a:spcBef>
-                <a:spcPts val="0"/>
-              </a:spcBef>
-              <a:spcAft>
-                <a:spcPts val="0"/>
-              </a:spcAft>
-              <a:buNone/>
-            </a:pPr>
-            <a:r>
-              <a:rPr lang="en"/>
-              <a:t>Scrum Backlogs</a:t>
-            </a:r>
-            <a:endParaRPr/>
-          </a:p>
-        </p:txBody>
-      </p:sp>
-      <p:sp>
-        <p:nvSpPr>
-          <p:cNvPr id="154" name="Google Shape;154;p23"/>
-          <p:cNvSpPr txBox="1"/>
-          <p:nvPr>
-            <p:ph idx="12" type="sldNum"/>
-          </p:nvPr>
-        </p:nvSpPr>
-        <p:spPr>
-          <a:xfrm>
-            <a:off x="7315202" y="4416550"/>
-            <a:ext cx="1828800" cy="731400"/>
-          </a:xfrm>
-          <a:prstGeom prst="rect">
-            <a:avLst/>
-          </a:prstGeom>
-        </p:spPr>
-        <p:txBody>
-          <a:bodyPr anchorCtr="0" anchor="b" bIns="91425" lIns="91425" spcFirstLastPara="1" rIns="91425" wrap="square" tIns="91425">
-            <a:noAutofit/>
-          </a:bodyPr>
-          <a:lstStyle/>
-          <a:p>
-            <a:pPr indent="0" lvl="0" marL="0" rtl="0" algn="r">
-              <a:spcBef>
-                <a:spcPts val="0"/>
-              </a:spcBef>
-              <a:spcAft>
-                <a:spcPts val="0"/>
-              </a:spcAft>
-              <a:buNone/>
-            </a:pPr>
-            <a:fld id="{00000000-1234-1234-1234-123412341234}" type="slidenum">
-              <a:rPr lang="en">
-                <a:solidFill>
-                  <a:schemeClr val="dk1"/>
-                </a:solidFill>
-              </a:rPr>
-              <a:t>‹#›</a:t>
-            </a:fld>
-            <a:endParaRPr>
-              <a:solidFill>
-                <a:schemeClr val="dk1"/>
-              </a:solidFill>
-            </a:endParaRPr>
-          </a:p>
-          <a:p>
-            <a:pPr indent="0" lvl="0" marL="0" rtl="0" algn="r">
-              <a:spcBef>
-                <a:spcPts val="0"/>
-              </a:spcBef>
-              <a:spcAft>
-                <a:spcPts val="0"/>
-              </a:spcAft>
-              <a:buNone/>
-            </a:pPr>
-            <a:r>
-              <a:rPr b="0" lang="en" sz="900" u="sng">
-                <a:solidFill>
-                  <a:schemeClr val="hlink"/>
-                </a:solidFill>
-                <a:hlinkClick r:id="rId3"/>
-              </a:rPr>
-              <a:t>https://oss.cs.fau.de</a:t>
-            </a:r>
-            <a:r>
-              <a:rPr b="0" lang="en" sz="900"/>
-              <a:t> </a:t>
-            </a:r>
-            <a:endParaRPr b="0" sz="900"/>
-          </a:p>
-        </p:txBody>
-      </p:sp>
-      <p:sp>
-        <p:nvSpPr>
-          <p:cNvPr id="155" name="Google Shape;155;p23"/>
+          <p:cNvPr id="178" name="Google Shape;178;p27"/>
           <p:cNvSpPr txBox="1"/>
           <p:nvPr/>
         </p:nvSpPr>
@@ -12993,7 +16170,7 @@
             </a:pPr>
             <a:r>
               <a:rPr lang="en"/>
-              <a:t>[1] Called imp-squared (impediments x improvements) backlog in AMOS</a:t>
+              <a:t>[1] Sometimes, the application domain is a technical domain</a:t>
             </a:r>
             <a:endParaRPr/>
           </a:p>
@@ -13007,12 +16184,12 @@
 </p:sld>
 </file>
 
-<file path=ppt/slides/slide17.xml><?xml version="1.0" encoding="utf-8"?>
+<file path=ppt/slides/slide14.xml><?xml version="1.0" encoding="utf-8"?>
 <p:sld xmlns:a="http://schemas.openxmlformats.org/drawingml/2006/main" xmlns:r="http://schemas.openxmlformats.org/officeDocument/2006/relationships" xmlns:mc="http://schemas.openxmlformats.org/markup-compatibility/2006" xmlns:mv="urn:schemas-microsoft-com:mac:vml" xmlns:p="http://schemas.openxmlformats.org/presentationml/2006/main" xmlns:c="http://schemas.openxmlformats.org/drawingml/2006/chart" xmlns:dgm="http://schemas.openxmlformats.org/drawingml/2006/diagram" xmlns:o="urn:schemas-microsoft-com:office:office" xmlns:v="urn:schemas-microsoft-com:vml" xmlns:pvml="urn:schemas-microsoft-com:office:powerpoint" xmlns:com="http://schemas.openxmlformats.org/drawingml/2006/compatibility" xmlns:p14="http://schemas.microsoft.com/office/powerpoint/2010/main" xmlns:p15="http://schemas.microsoft.com/office/powerpoint/2012/main" xmlns:ahyp="http://schemas.microsoft.com/office/drawing/2018/hyperlinkcolor">
   <p:cSld>
     <p:spTree>
       <p:nvGrpSpPr>
-        <p:cNvPr id="159" name="Shape 159"/>
+        <p:cNvPr id="182" name="Shape 182"/>
         <p:cNvGrpSpPr/>
         <p:nvPr/>
       </p:nvGrpSpPr>
@@ -13026,7 +16203,7 @@
       </p:grpSpPr>
       <p:sp>
         <p:nvSpPr>
-          <p:cNvPr id="160" name="Google Shape;160;p24"/>
+          <p:cNvPr id="183" name="Google Shape;183;p28"/>
           <p:cNvSpPr txBox="1"/>
           <p:nvPr>
             <p:ph type="title"/>
@@ -13058,7 +16235,11 @@
             </a:pPr>
             <a:r>
               <a:rPr lang="en"/>
-              <a:t>Backlogs and Backlog Items</a:t>
+              <a:t>Regular</a:t>
+            </a:r>
+            <a:r>
+              <a:rPr lang="en"/>
+              <a:t> Deliverable: Product Glossary</a:t>
             </a:r>
             <a:endParaRPr/>
           </a:p>
@@ -13066,7 +16247,7 @@
       </p:sp>
       <p:sp>
         <p:nvSpPr>
-          <p:cNvPr id="161" name="Google Shape;161;p24"/>
+          <p:cNvPr id="184" name="Google Shape;184;p28"/>
           <p:cNvSpPr txBox="1"/>
           <p:nvPr>
             <p:ph idx="1" type="body"/>
@@ -13092,87 +16273,13 @@
                 <a:spcPts val="0"/>
               </a:spcBef>
               <a:spcAft>
-                <a:spcPts val="0"/>
-              </a:spcAft>
-              <a:buNone/>
-            </a:pPr>
-            <a:r>
-              <a:rPr b="1" lang="en"/>
-              <a:t>Backlog items</a:t>
-            </a:r>
+                <a:spcPts val="1200"/>
+              </a:spcAft>
+              <a:buNone/>
+            </a:pPr>
             <a:r>
               <a:rPr lang="en"/>
-              <a:t> are items in a backlog</a:t>
-            </a:r>
-            <a:endParaRPr/>
-          </a:p>
-          <a:p>
-            <a:pPr indent="-342900" lvl="0" marL="457200" rtl="0" algn="l">
-              <a:spcBef>
-                <a:spcPts val="1200"/>
-              </a:spcBef>
-              <a:spcAft>
-                <a:spcPts val="0"/>
-              </a:spcAft>
-              <a:buSzPts val="1800"/>
-              <a:buChar char="●"/>
-            </a:pPr>
-            <a:r>
-              <a:rPr lang="en"/>
-              <a:t>Product ba</a:t>
-            </a:r>
-            <a:r>
-              <a:rPr lang="en"/>
-              <a:t>cklog → product backlog items</a:t>
-            </a:r>
-            <a:endParaRPr/>
-          </a:p>
-          <a:p>
-            <a:pPr indent="-342900" lvl="0" marL="457200" rtl="0" algn="l">
-              <a:spcBef>
-                <a:spcPts val="0"/>
-              </a:spcBef>
-              <a:spcAft>
-                <a:spcPts val="0"/>
-              </a:spcAft>
-              <a:buSzPts val="1800"/>
-              <a:buChar char="●"/>
-            </a:pPr>
-            <a:r>
-              <a:rPr lang="en"/>
-              <a:t>Sprint backlog → sprint backlog items</a:t>
-            </a:r>
-            <a:endParaRPr/>
-          </a:p>
-          <a:p>
-            <a:pPr indent="-342900" lvl="0" marL="457200" rtl="0" algn="l">
-              <a:spcBef>
-                <a:spcPts val="0"/>
-              </a:spcBef>
-              <a:spcAft>
-                <a:spcPts val="0"/>
-              </a:spcAft>
-              <a:buSzPts val="1800"/>
-              <a:buChar char="●"/>
-            </a:pPr>
-            <a:r>
-              <a:rPr lang="en"/>
-              <a:t>Impediments backlog → impediments x improvements</a:t>
-            </a:r>
-            <a:endParaRPr/>
-          </a:p>
-          <a:p>
-            <a:pPr indent="0" lvl="0" marL="0" rtl="0" algn="l">
-              <a:spcBef>
-                <a:spcPts val="1200"/>
-              </a:spcBef>
-              <a:spcAft>
-                <a:spcPts val="1200"/>
-              </a:spcAft>
-              <a:buNone/>
-            </a:pPr>
-            <a:r>
-              <a:t/>
+              <a:t>Please create a product glossary and keep it up-to-date </a:t>
             </a:r>
             <a:endParaRPr/>
           </a:p>
@@ -13180,7 +16287,7 @@
       </p:sp>
       <p:sp>
         <p:nvSpPr>
-          <p:cNvPr id="162" name="Google Shape;162;p24"/>
+          <p:cNvPr id="185" name="Google Shape;185;p28"/>
           <p:cNvSpPr txBox="1"/>
           <p:nvPr>
             <p:ph idx="12" type="sldNum"/>
@@ -13259,12 +16366,705 @@
 </p:sld>
 </file>
 
+<file path=ppt/slides/slide15.xml><?xml version="1.0" encoding="utf-8"?>
+<p:sld xmlns:a="http://schemas.openxmlformats.org/drawingml/2006/main" xmlns:r="http://schemas.openxmlformats.org/officeDocument/2006/relationships" xmlns:mc="http://schemas.openxmlformats.org/markup-compatibility/2006" xmlns:mv="urn:schemas-microsoft-com:mac:vml" xmlns:p="http://schemas.openxmlformats.org/presentationml/2006/main" xmlns:c="http://schemas.openxmlformats.org/drawingml/2006/chart" xmlns:dgm="http://schemas.openxmlformats.org/drawingml/2006/diagram" xmlns:o="urn:schemas-microsoft-com:office:office" xmlns:v="urn:schemas-microsoft-com:vml" xmlns:pvml="urn:schemas-microsoft-com:office:powerpoint" xmlns:com="http://schemas.openxmlformats.org/drawingml/2006/compatibility" xmlns:p14="http://schemas.microsoft.com/office/powerpoint/2010/main" xmlns:p15="http://schemas.microsoft.com/office/powerpoint/2012/main" xmlns:ahyp="http://schemas.microsoft.com/office/drawing/2018/hyperlinkcolor">
+  <p:cSld>
+    <p:spTree>
+      <p:nvGrpSpPr>
+        <p:cNvPr id="189" name="Shape 189"/>
+        <p:cNvGrpSpPr/>
+        <p:nvPr/>
+      </p:nvGrpSpPr>
+      <p:grpSpPr>
+        <a:xfrm>
+          <a:off x="0" y="0"/>
+          <a:ext cx="0" cy="0"/>
+          <a:chOff x="0" y="0"/>
+          <a:chExt cx="0" cy="0"/>
+        </a:xfrm>
+      </p:grpSpPr>
+      <p:sp>
+        <p:nvSpPr>
+          <p:cNvPr id="190" name="Google Shape;190;p29"/>
+          <p:cNvSpPr txBox="1"/>
+          <p:nvPr>
+            <p:ph type="title"/>
+          </p:nvPr>
+        </p:nvSpPr>
+        <p:spPr>
+          <a:xfrm>
+            <a:off x="0" y="-7"/>
+            <a:ext cx="9144000" cy="2386500"/>
+          </a:xfrm>
+          <a:prstGeom prst="rect">
+            <a:avLst/>
+          </a:prstGeom>
+        </p:spPr>
+        <p:txBody>
+          <a:bodyPr anchorCtr="0" anchor="b" bIns="274300" lIns="91425" spcFirstLastPara="1" rIns="91425" wrap="square" tIns="91425">
+            <a:noAutofit/>
+          </a:bodyPr>
+          <a:lstStyle/>
+          <a:p>
+            <a:pPr indent="0" lvl="0" marL="0" rtl="0" algn="ctr">
+              <a:spcBef>
+                <a:spcPts val="0"/>
+              </a:spcBef>
+              <a:spcAft>
+                <a:spcPts val="0"/>
+              </a:spcAft>
+              <a:buNone/>
+            </a:pPr>
+            <a:r>
+              <a:rPr lang="en"/>
+              <a:t>3. Product Backlog</a:t>
+            </a:r>
+            <a:endParaRPr/>
+          </a:p>
+        </p:txBody>
+      </p:sp>
+    </p:spTree>
+  </p:cSld>
+  <p:clrMapOvr>
+    <a:masterClrMapping/>
+  </p:clrMapOvr>
+</p:sld>
+</file>
+
+<file path=ppt/slides/slide16.xml><?xml version="1.0" encoding="utf-8"?>
+<p:sld xmlns:a="http://schemas.openxmlformats.org/drawingml/2006/main" xmlns:r="http://schemas.openxmlformats.org/officeDocument/2006/relationships" xmlns:mc="http://schemas.openxmlformats.org/markup-compatibility/2006" xmlns:mv="urn:schemas-microsoft-com:mac:vml" xmlns:p="http://schemas.openxmlformats.org/presentationml/2006/main" xmlns:c="http://schemas.openxmlformats.org/drawingml/2006/chart" xmlns:dgm="http://schemas.openxmlformats.org/drawingml/2006/diagram" xmlns:o="urn:schemas-microsoft-com:office:office" xmlns:v="urn:schemas-microsoft-com:vml" xmlns:pvml="urn:schemas-microsoft-com:office:powerpoint" xmlns:com="http://schemas.openxmlformats.org/drawingml/2006/compatibility" xmlns:p14="http://schemas.microsoft.com/office/powerpoint/2010/main" xmlns:p15="http://schemas.microsoft.com/office/powerpoint/2012/main" xmlns:ahyp="http://schemas.microsoft.com/office/drawing/2018/hyperlinkcolor">
+  <p:cSld>
+    <p:spTree>
+      <p:nvGrpSpPr>
+        <p:cNvPr id="194" name="Shape 194"/>
+        <p:cNvGrpSpPr/>
+        <p:nvPr/>
+      </p:nvGrpSpPr>
+      <p:grpSpPr>
+        <a:xfrm>
+          <a:off x="0" y="0"/>
+          <a:ext cx="0" cy="0"/>
+          <a:chOff x="0" y="0"/>
+          <a:chExt cx="0" cy="0"/>
+        </a:xfrm>
+      </p:grpSpPr>
+      <p:sp>
+        <p:nvSpPr>
+          <p:cNvPr id="195" name="Google Shape;195;p30"/>
+          <p:cNvSpPr txBox="1"/>
+          <p:nvPr>
+            <p:ph idx="1" type="body"/>
+          </p:nvPr>
+        </p:nvSpPr>
+        <p:spPr>
+          <a:xfrm>
+            <a:off x="274320" y="914400"/>
+            <a:ext cx="8595300" cy="4114800"/>
+          </a:xfrm>
+          <a:prstGeom prst="rect">
+            <a:avLst/>
+          </a:prstGeom>
+        </p:spPr>
+        <p:txBody>
+          <a:bodyPr anchorCtr="0" anchor="t" bIns="0" lIns="0" spcFirstLastPara="1" rIns="0" wrap="square" tIns="0">
+            <a:noAutofit/>
+          </a:bodyPr>
+          <a:lstStyle/>
+          <a:p>
+            <a:pPr indent="0" lvl="0" marL="0" rtl="0" algn="l">
+              <a:spcBef>
+                <a:spcPts val="0"/>
+              </a:spcBef>
+              <a:spcAft>
+                <a:spcPts val="0"/>
+              </a:spcAft>
+              <a:buNone/>
+            </a:pPr>
+            <a:r>
+              <a:rPr lang="en"/>
+              <a:t>A </a:t>
+            </a:r>
+            <a:r>
+              <a:rPr b="1" lang="en"/>
+              <a:t>backlog</a:t>
+            </a:r>
+            <a:r>
+              <a:rPr lang="en"/>
+              <a:t> is a</a:t>
+            </a:r>
+            <a:endParaRPr/>
+          </a:p>
+          <a:p>
+            <a:pPr indent="-342900" lvl="0" marL="457200" rtl="0" algn="l">
+              <a:spcBef>
+                <a:spcPts val="1200"/>
+              </a:spcBef>
+              <a:spcAft>
+                <a:spcPts val="0"/>
+              </a:spcAft>
+              <a:buSzPts val="1800"/>
+              <a:buChar char="●"/>
+            </a:pPr>
+            <a:r>
+              <a:rPr lang="en"/>
+              <a:t>Prioritized list of items that need doing</a:t>
+            </a:r>
+            <a:endParaRPr/>
+          </a:p>
+          <a:p>
+            <a:pPr indent="0" lvl="0" marL="0" rtl="0" algn="l">
+              <a:spcBef>
+                <a:spcPts val="1200"/>
+              </a:spcBef>
+              <a:spcAft>
+                <a:spcPts val="0"/>
+              </a:spcAft>
+              <a:buNone/>
+            </a:pPr>
+            <a:r>
+              <a:rPr lang="en"/>
+              <a:t>The</a:t>
+            </a:r>
+            <a:r>
+              <a:rPr b="1" lang="en"/>
+              <a:t> product backlog</a:t>
+            </a:r>
+            <a:r>
+              <a:rPr lang="en"/>
+              <a:t> is a backlog of items that</a:t>
+            </a:r>
+            <a:endParaRPr/>
+          </a:p>
+          <a:p>
+            <a:pPr indent="-342900" lvl="0" marL="457200" rtl="0" algn="l">
+              <a:spcBef>
+                <a:spcPts val="1200"/>
+              </a:spcBef>
+              <a:spcAft>
+                <a:spcPts val="0"/>
+              </a:spcAft>
+              <a:buSzPts val="1800"/>
+              <a:buChar char="●"/>
+            </a:pPr>
+            <a:r>
+              <a:rPr lang="en"/>
+              <a:t>Are expected of the software under development</a:t>
+            </a:r>
+            <a:endParaRPr/>
+          </a:p>
+          <a:p>
+            <a:pPr indent="0" lvl="0" marL="0" rtl="0" algn="l">
+              <a:spcBef>
+                <a:spcPts val="1200"/>
+              </a:spcBef>
+              <a:spcAft>
+                <a:spcPts val="0"/>
+              </a:spcAft>
+              <a:buNone/>
+            </a:pPr>
+            <a:r>
+              <a:rPr lang="en"/>
+              <a:t>The </a:t>
+            </a:r>
+            <a:r>
+              <a:rPr b="1" lang="en"/>
+              <a:t>sprint backlog</a:t>
+            </a:r>
+            <a:r>
+              <a:rPr lang="en"/>
+              <a:t> is a backlog of items that</a:t>
+            </a:r>
+            <a:endParaRPr/>
+          </a:p>
+          <a:p>
+            <a:pPr indent="-342900" lvl="0" marL="457200" rtl="0" algn="l">
+              <a:spcBef>
+                <a:spcPts val="1200"/>
+              </a:spcBef>
+              <a:spcAft>
+                <a:spcPts val="0"/>
+              </a:spcAft>
+              <a:buSzPts val="1800"/>
+              <a:buChar char="●"/>
+            </a:pPr>
+            <a:r>
+              <a:rPr lang="en"/>
+              <a:t>Are marked for doing in the upcoming sprint</a:t>
+            </a:r>
+            <a:endParaRPr/>
+          </a:p>
+          <a:p>
+            <a:pPr indent="0" lvl="0" marL="0" rtl="0" algn="l">
+              <a:spcBef>
+                <a:spcPts val="1200"/>
+              </a:spcBef>
+              <a:spcAft>
+                <a:spcPts val="0"/>
+              </a:spcAft>
+              <a:buNone/>
+            </a:pPr>
+            <a:r>
+              <a:rPr lang="en"/>
+              <a:t>The </a:t>
+            </a:r>
+            <a:r>
+              <a:rPr b="1" lang="en"/>
+              <a:t>impediments backlog</a:t>
+            </a:r>
+            <a:r>
+              <a:rPr lang="en"/>
+              <a:t> </a:t>
+            </a:r>
+            <a:r>
+              <a:rPr b="1" lang="en"/>
+              <a:t>[1] </a:t>
+            </a:r>
+            <a:r>
+              <a:rPr lang="en"/>
+              <a:t>is a backlog of items that</a:t>
+            </a:r>
+            <a:endParaRPr/>
+          </a:p>
+          <a:p>
+            <a:pPr indent="-342900" lvl="0" marL="457200" rtl="0" algn="l">
+              <a:spcBef>
+                <a:spcPts val="1200"/>
+              </a:spcBef>
+              <a:spcAft>
+                <a:spcPts val="0"/>
+              </a:spcAft>
+              <a:buSzPts val="1800"/>
+              <a:buChar char="●"/>
+            </a:pPr>
+            <a:r>
+              <a:rPr lang="en"/>
+              <a:t>Are impediments to resolve and improvements to make </a:t>
+            </a:r>
+            <a:endParaRPr/>
+          </a:p>
+        </p:txBody>
+      </p:sp>
+      <p:sp>
+        <p:nvSpPr>
+          <p:cNvPr id="196" name="Google Shape;196;p30"/>
+          <p:cNvSpPr txBox="1"/>
+          <p:nvPr>
+            <p:ph type="title"/>
+          </p:nvPr>
+        </p:nvSpPr>
+        <p:spPr>
+          <a:xfrm>
+            <a:off x="0" y="0"/>
+            <a:ext cx="9144000" cy="685800"/>
+          </a:xfrm>
+          <a:prstGeom prst="rect">
+            <a:avLst/>
+          </a:prstGeom>
+        </p:spPr>
+        <p:txBody>
+          <a:bodyPr anchorCtr="0" anchor="ctr" bIns="91425" lIns="274300" spcFirstLastPara="1" rIns="91425" wrap="square" tIns="91425">
+            <a:noAutofit/>
+          </a:bodyPr>
+          <a:lstStyle/>
+          <a:p>
+            <a:pPr indent="0" lvl="0" marL="0" rtl="0" algn="l">
+              <a:spcBef>
+                <a:spcPts val="0"/>
+              </a:spcBef>
+              <a:spcAft>
+                <a:spcPts val="0"/>
+              </a:spcAft>
+              <a:buNone/>
+            </a:pPr>
+            <a:r>
+              <a:rPr lang="en"/>
+              <a:t>Scrum Backlogs</a:t>
+            </a:r>
+            <a:endParaRPr/>
+          </a:p>
+        </p:txBody>
+      </p:sp>
+      <p:sp>
+        <p:nvSpPr>
+          <p:cNvPr id="197" name="Google Shape;197;p30"/>
+          <p:cNvSpPr txBox="1"/>
+          <p:nvPr>
+            <p:ph idx="12" type="sldNum"/>
+          </p:nvPr>
+        </p:nvSpPr>
+        <p:spPr>
+          <a:xfrm>
+            <a:off x="7315202" y="4416550"/>
+            <a:ext cx="1828800" cy="731400"/>
+          </a:xfrm>
+          <a:prstGeom prst="rect">
+            <a:avLst/>
+          </a:prstGeom>
+        </p:spPr>
+        <p:txBody>
+          <a:bodyPr anchorCtr="0" anchor="b" bIns="91425" lIns="91425" spcFirstLastPara="1" rIns="91425" wrap="square" tIns="91425">
+            <a:noAutofit/>
+          </a:bodyPr>
+          <a:lstStyle/>
+          <a:p>
+            <a:pPr indent="0" lvl="0" marL="0" rtl="0" algn="r">
+              <a:spcBef>
+                <a:spcPts val="0"/>
+              </a:spcBef>
+              <a:spcAft>
+                <a:spcPts val="0"/>
+              </a:spcAft>
+              <a:buNone/>
+            </a:pPr>
+            <a:fld id="{00000000-1234-1234-1234-123412341234}" type="slidenum">
+              <a:rPr lang="en">
+                <a:solidFill>
+                  <a:schemeClr val="dk1"/>
+                </a:solidFill>
+              </a:rPr>
+              <a:t>‹#›</a:t>
+            </a:fld>
+            <a:endParaRPr>
+              <a:solidFill>
+                <a:schemeClr val="dk1"/>
+              </a:solidFill>
+            </a:endParaRPr>
+          </a:p>
+          <a:p>
+            <a:pPr indent="0" lvl="0" marL="0" rtl="0" algn="r">
+              <a:spcBef>
+                <a:spcPts val="0"/>
+              </a:spcBef>
+              <a:spcAft>
+                <a:spcPts val="0"/>
+              </a:spcAft>
+              <a:buNone/>
+            </a:pPr>
+            <a:r>
+              <a:rPr b="0" lang="en" sz="900" u="sng">
+                <a:solidFill>
+                  <a:schemeClr val="hlink"/>
+                </a:solidFill>
+                <a:hlinkClick r:id="rId3"/>
+              </a:rPr>
+              <a:t>https://oss.cs.fau.de</a:t>
+            </a:r>
+            <a:r>
+              <a:rPr b="0" lang="en" sz="900"/>
+              <a:t> </a:t>
+            </a:r>
+            <a:endParaRPr b="0" sz="900"/>
+          </a:p>
+        </p:txBody>
+      </p:sp>
+      <p:sp>
+        <p:nvSpPr>
+          <p:cNvPr id="198" name="Google Shape;198;p30"/>
+          <p:cNvSpPr txBox="1"/>
+          <p:nvPr/>
+        </p:nvSpPr>
+        <p:spPr>
+          <a:xfrm>
+            <a:off x="0" y="4233672"/>
+            <a:ext cx="7315200" cy="914400"/>
+          </a:xfrm>
+          <a:prstGeom prst="rect">
+            <a:avLst/>
+          </a:prstGeom>
+          <a:noFill/>
+          <a:ln>
+            <a:noFill/>
+          </a:ln>
+        </p:spPr>
+        <p:txBody>
+          <a:bodyPr anchorCtr="0" anchor="b" bIns="91425" lIns="91425" spcFirstLastPara="1" rIns="91425" wrap="square" tIns="91425">
+            <a:noAutofit/>
+          </a:bodyPr>
+          <a:lstStyle/>
+          <a:p>
+            <a:pPr indent="0" lvl="0" marL="0" rtl="0" algn="l">
+              <a:spcBef>
+                <a:spcPts val="0"/>
+              </a:spcBef>
+              <a:spcAft>
+                <a:spcPts val="0"/>
+              </a:spcAft>
+              <a:buNone/>
+            </a:pPr>
+            <a:r>
+              <a:rPr lang="en"/>
+              <a:t>[1] Called imp-squared (impediments x improvements) backlog in AMOS</a:t>
+            </a:r>
+            <a:endParaRPr/>
+          </a:p>
+        </p:txBody>
+      </p:sp>
+    </p:spTree>
+  </p:cSld>
+  <p:clrMapOvr>
+    <a:masterClrMapping/>
+  </p:clrMapOvr>
+</p:sld>
+</file>
+
+<file path=ppt/slides/slide17.xml><?xml version="1.0" encoding="utf-8"?>
+<p:sld xmlns:a="http://schemas.openxmlformats.org/drawingml/2006/main" xmlns:r="http://schemas.openxmlformats.org/officeDocument/2006/relationships" xmlns:mc="http://schemas.openxmlformats.org/markup-compatibility/2006" xmlns:mv="urn:schemas-microsoft-com:mac:vml" xmlns:p="http://schemas.openxmlformats.org/presentationml/2006/main" xmlns:c="http://schemas.openxmlformats.org/drawingml/2006/chart" xmlns:dgm="http://schemas.openxmlformats.org/drawingml/2006/diagram" xmlns:o="urn:schemas-microsoft-com:office:office" xmlns:v="urn:schemas-microsoft-com:vml" xmlns:pvml="urn:schemas-microsoft-com:office:powerpoint" xmlns:com="http://schemas.openxmlformats.org/drawingml/2006/compatibility" xmlns:p14="http://schemas.microsoft.com/office/powerpoint/2010/main" xmlns:p15="http://schemas.microsoft.com/office/powerpoint/2012/main" xmlns:ahyp="http://schemas.microsoft.com/office/drawing/2018/hyperlinkcolor">
+  <p:cSld>
+    <p:spTree>
+      <p:nvGrpSpPr>
+        <p:cNvPr id="202" name="Shape 202"/>
+        <p:cNvGrpSpPr/>
+        <p:nvPr/>
+      </p:nvGrpSpPr>
+      <p:grpSpPr>
+        <a:xfrm>
+          <a:off x="0" y="0"/>
+          <a:ext cx="0" cy="0"/>
+          <a:chOff x="0" y="0"/>
+          <a:chExt cx="0" cy="0"/>
+        </a:xfrm>
+      </p:grpSpPr>
+      <p:sp>
+        <p:nvSpPr>
+          <p:cNvPr id="203" name="Google Shape;203;p31"/>
+          <p:cNvSpPr txBox="1"/>
+          <p:nvPr>
+            <p:ph type="title"/>
+          </p:nvPr>
+        </p:nvSpPr>
+        <p:spPr>
+          <a:xfrm>
+            <a:off x="0" y="0"/>
+            <a:ext cx="9144000" cy="685800"/>
+          </a:xfrm>
+          <a:prstGeom prst="rect">
+            <a:avLst/>
+          </a:prstGeom>
+        </p:spPr>
+        <p:txBody>
+          <a:bodyPr anchorCtr="0" anchor="ctr" bIns="91425" lIns="274300" spcFirstLastPara="1" rIns="91425" wrap="square" tIns="91425">
+            <a:noAutofit/>
+          </a:bodyPr>
+          <a:lstStyle/>
+          <a:p>
+            <a:pPr indent="0" lvl="0" marL="0" rtl="0" algn="l">
+              <a:spcBef>
+                <a:spcPts val="0"/>
+              </a:spcBef>
+              <a:spcAft>
+                <a:spcPts val="0"/>
+              </a:spcAft>
+              <a:buNone/>
+            </a:pPr>
+            <a:r>
+              <a:rPr lang="en"/>
+              <a:t>Backlogs and Backlog Items</a:t>
+            </a:r>
+            <a:endParaRPr/>
+          </a:p>
+        </p:txBody>
+      </p:sp>
+      <p:sp>
+        <p:nvSpPr>
+          <p:cNvPr id="204" name="Google Shape;204;p31"/>
+          <p:cNvSpPr txBox="1"/>
+          <p:nvPr>
+            <p:ph idx="1" type="body"/>
+          </p:nvPr>
+        </p:nvSpPr>
+        <p:spPr>
+          <a:xfrm>
+            <a:off x="274320" y="914400"/>
+            <a:ext cx="8595300" cy="4114800"/>
+          </a:xfrm>
+          <a:prstGeom prst="rect">
+            <a:avLst/>
+          </a:prstGeom>
+        </p:spPr>
+        <p:txBody>
+          <a:bodyPr anchorCtr="0" anchor="t" bIns="0" lIns="0" spcFirstLastPara="1" rIns="0" wrap="square" tIns="0">
+            <a:noAutofit/>
+          </a:bodyPr>
+          <a:lstStyle/>
+          <a:p>
+            <a:pPr indent="0" lvl="0" marL="0" rtl="0" algn="l">
+              <a:spcBef>
+                <a:spcPts val="0"/>
+              </a:spcBef>
+              <a:spcAft>
+                <a:spcPts val="0"/>
+              </a:spcAft>
+              <a:buNone/>
+            </a:pPr>
+            <a:r>
+              <a:rPr b="1" lang="en"/>
+              <a:t>Backlog items</a:t>
+            </a:r>
+            <a:r>
+              <a:rPr lang="en"/>
+              <a:t> are items in a backlog</a:t>
+            </a:r>
+            <a:endParaRPr/>
+          </a:p>
+          <a:p>
+            <a:pPr indent="-342900" lvl="0" marL="457200" rtl="0" algn="l">
+              <a:spcBef>
+                <a:spcPts val="1200"/>
+              </a:spcBef>
+              <a:spcAft>
+                <a:spcPts val="0"/>
+              </a:spcAft>
+              <a:buSzPts val="1800"/>
+              <a:buChar char="●"/>
+            </a:pPr>
+            <a:r>
+              <a:rPr lang="en"/>
+              <a:t>Product ba</a:t>
+            </a:r>
+            <a:r>
+              <a:rPr lang="en"/>
+              <a:t>cklog → product backlog items</a:t>
+            </a:r>
+            <a:endParaRPr/>
+          </a:p>
+          <a:p>
+            <a:pPr indent="-342900" lvl="0" marL="457200" rtl="0" algn="l">
+              <a:spcBef>
+                <a:spcPts val="0"/>
+              </a:spcBef>
+              <a:spcAft>
+                <a:spcPts val="0"/>
+              </a:spcAft>
+              <a:buSzPts val="1800"/>
+              <a:buChar char="●"/>
+            </a:pPr>
+            <a:r>
+              <a:rPr lang="en"/>
+              <a:t>Sprint backlog → sprint backlog items</a:t>
+            </a:r>
+            <a:endParaRPr/>
+          </a:p>
+          <a:p>
+            <a:pPr indent="-342900" lvl="0" marL="457200" rtl="0" algn="l">
+              <a:spcBef>
+                <a:spcPts val="0"/>
+              </a:spcBef>
+              <a:spcAft>
+                <a:spcPts val="0"/>
+              </a:spcAft>
+              <a:buSzPts val="1800"/>
+              <a:buChar char="●"/>
+            </a:pPr>
+            <a:r>
+              <a:rPr lang="en"/>
+              <a:t>Impediments backlog → impediments x improvements</a:t>
+            </a:r>
+            <a:endParaRPr/>
+          </a:p>
+          <a:p>
+            <a:pPr indent="0" lvl="0" marL="0" rtl="0" algn="l">
+              <a:spcBef>
+                <a:spcPts val="1200"/>
+              </a:spcBef>
+              <a:spcAft>
+                <a:spcPts val="1200"/>
+              </a:spcAft>
+              <a:buNone/>
+            </a:pPr>
+            <a:r>
+              <a:t/>
+            </a:r>
+            <a:endParaRPr/>
+          </a:p>
+        </p:txBody>
+      </p:sp>
+      <p:sp>
+        <p:nvSpPr>
+          <p:cNvPr id="205" name="Google Shape;205;p31"/>
+          <p:cNvSpPr txBox="1"/>
+          <p:nvPr>
+            <p:ph idx="12" type="sldNum"/>
+          </p:nvPr>
+        </p:nvSpPr>
+        <p:spPr>
+          <a:xfrm>
+            <a:off x="7315202" y="4416550"/>
+            <a:ext cx="1828800" cy="731400"/>
+          </a:xfrm>
+          <a:prstGeom prst="rect">
+            <a:avLst/>
+          </a:prstGeom>
+        </p:spPr>
+        <p:txBody>
+          <a:bodyPr anchorCtr="0" anchor="b" bIns="91425" lIns="91425" spcFirstLastPara="1" rIns="91425" wrap="square" tIns="91425">
+            <a:noAutofit/>
+          </a:bodyPr>
+          <a:lstStyle/>
+          <a:p>
+            <a:pPr indent="0" lvl="0" marL="0" rtl="0" algn="r">
+              <a:spcBef>
+                <a:spcPts val="0"/>
+              </a:spcBef>
+              <a:spcAft>
+                <a:spcPts val="0"/>
+              </a:spcAft>
+              <a:buNone/>
+            </a:pPr>
+            <a:fld id="{00000000-1234-1234-1234-123412341234}" type="slidenum">
+              <a:rPr lang="en">
+                <a:solidFill>
+                  <a:schemeClr val="dk1"/>
+                </a:solidFill>
+              </a:rPr>
+              <a:t>‹#›</a:t>
+            </a:fld>
+            <a:endParaRPr>
+              <a:solidFill>
+                <a:schemeClr val="dk1"/>
+              </a:solidFill>
+            </a:endParaRPr>
+          </a:p>
+          <a:p>
+            <a:pPr indent="0" lvl="0" marL="0" rtl="0" algn="r">
+              <a:spcBef>
+                <a:spcPts val="0"/>
+              </a:spcBef>
+              <a:spcAft>
+                <a:spcPts val="0"/>
+              </a:spcAft>
+              <a:buNone/>
+            </a:pPr>
+            <a:r>
+              <a:rPr b="0" lang="en" sz="900" u="sng">
+                <a:solidFill>
+                  <a:schemeClr val="hlink"/>
+                </a:solidFill>
+                <a:hlinkClick r:id="rId3"/>
+              </a:rPr>
+              <a:t>https://oss.cs.fau.de</a:t>
+            </a:r>
+            <a:r>
+              <a:rPr b="0" lang="en" sz="900"/>
+              <a:t> </a:t>
+            </a:r>
+            <a:endParaRPr b="0" sz="900"/>
+          </a:p>
+        </p:txBody>
+      </p:sp>
+    </p:spTree>
+  </p:cSld>
+  <p:clrMapOvr>
+    <a:masterClrMapping/>
+  </p:clrMapOvr>
+</p:sld>
+</file>
+
 <file path=ppt/slides/slide18.xml><?xml version="1.0" encoding="utf-8"?>
 <p:sld xmlns:a="http://schemas.openxmlformats.org/drawingml/2006/main" xmlns:r="http://schemas.openxmlformats.org/officeDocument/2006/relationships" xmlns:mc="http://schemas.openxmlformats.org/markup-compatibility/2006" xmlns:mv="urn:schemas-microsoft-com:mac:vml" xmlns:p="http://schemas.openxmlformats.org/presentationml/2006/main" xmlns:c="http://schemas.openxmlformats.org/drawingml/2006/chart" xmlns:dgm="http://schemas.openxmlformats.org/drawingml/2006/diagram" xmlns:o="urn:schemas-microsoft-com:office:office" xmlns:v="urn:schemas-microsoft-com:vml" xmlns:pvml="urn:schemas-microsoft-com:office:powerpoint" xmlns:com="http://schemas.openxmlformats.org/drawingml/2006/compatibility" xmlns:p14="http://schemas.microsoft.com/office/powerpoint/2010/main" xmlns:p15="http://schemas.microsoft.com/office/powerpoint/2012/main" xmlns:ahyp="http://schemas.microsoft.com/office/drawing/2018/hyperlinkcolor">
   <p:cSld>
     <p:spTree>
       <p:nvGrpSpPr>
-        <p:cNvPr id="166" name="Shape 166"/>
+        <p:cNvPr id="209" name="Shape 209"/>
         <p:cNvGrpSpPr/>
         <p:nvPr/>
       </p:nvGrpSpPr>
@@ -13278,7 +17078,7 @@
       </p:grpSpPr>
       <p:pic>
         <p:nvPicPr>
-          <p:cNvPr id="167" name="Google Shape;167;p25"/>
+          <p:cNvPr id="210" name="Google Shape;210;p32"/>
           <p:cNvPicPr preferRelativeResize="0"/>
           <p:nvPr/>
         </p:nvPicPr>
@@ -13292,8 +17092,8 @@
         </p:blipFill>
         <p:spPr>
           <a:xfrm>
-            <a:off x="274320" y="914400"/>
-            <a:ext cx="8595360" cy="3495446"/>
+            <a:off x="0" y="731520"/>
+            <a:ext cx="9144001" cy="3920067"/>
           </a:xfrm>
           <a:prstGeom prst="rect">
             <a:avLst/>
@@ -13306,7 +17106,7 @@
       </p:pic>
       <p:sp>
         <p:nvSpPr>
-          <p:cNvPr id="168" name="Google Shape;168;p25"/>
+          <p:cNvPr id="211" name="Google Shape;211;p32"/>
           <p:cNvSpPr txBox="1"/>
           <p:nvPr>
             <p:ph type="title"/>
@@ -13346,7 +17146,7 @@
       </p:sp>
       <p:sp>
         <p:nvSpPr>
-          <p:cNvPr id="169" name="Google Shape;169;p25"/>
+          <p:cNvPr id="212" name="Google Shape;212;p32"/>
           <p:cNvSpPr txBox="1"/>
           <p:nvPr>
             <p:ph idx="12" type="sldNum"/>
@@ -13419,13 +17219,13 @@
       </p:sp>
       <p:sp>
         <p:nvSpPr>
-          <p:cNvPr id="170" name="Google Shape;170;p25"/>
+          <p:cNvPr id="213" name="Google Shape;213;p32"/>
           <p:cNvSpPr/>
           <p:nvPr/>
         </p:nvSpPr>
         <p:spPr>
           <a:xfrm>
-            <a:off x="1661275" y="2132525"/>
+            <a:off x="1692141" y="2163391"/>
             <a:ext cx="6750300" cy="903900"/>
           </a:xfrm>
           <a:prstGeom prst="rect">
@@ -13466,7 +17266,7 @@
       </p:sp>
       <p:sp>
         <p:nvSpPr>
-          <p:cNvPr id="171" name="Google Shape;171;p25"/>
+          <p:cNvPr id="214" name="Google Shape;214;p32"/>
           <p:cNvSpPr txBox="1"/>
           <p:nvPr/>
         </p:nvSpPr>
@@ -13543,7 +17343,7 @@
   <p:cSld>
     <p:spTree>
       <p:nvGrpSpPr>
-        <p:cNvPr id="175" name="Shape 175"/>
+        <p:cNvPr id="218" name="Shape 218"/>
         <p:cNvGrpSpPr/>
         <p:nvPr/>
       </p:nvGrpSpPr>
@@ -13557,7 +17357,7 @@
       </p:grpSpPr>
       <p:sp>
         <p:nvSpPr>
-          <p:cNvPr id="176" name="Google Shape;176;p26"/>
+          <p:cNvPr id="219" name="Google Shape;219;p33"/>
           <p:cNvSpPr txBox="1"/>
           <p:nvPr>
             <p:ph idx="1" type="body"/>
@@ -13738,7 +17538,7 @@
       </p:sp>
       <p:sp>
         <p:nvSpPr>
-          <p:cNvPr id="177" name="Google Shape;177;p26"/>
+          <p:cNvPr id="220" name="Google Shape;220;p33"/>
           <p:cNvSpPr txBox="1"/>
           <p:nvPr>
             <p:ph type="title"/>
@@ -13778,7 +17578,7 @@
       </p:sp>
       <p:sp>
         <p:nvSpPr>
-          <p:cNvPr id="178" name="Google Shape;178;p26"/>
+          <p:cNvPr id="221" name="Google Shape;221;p33"/>
           <p:cNvSpPr txBox="1"/>
           <p:nvPr>
             <p:ph idx="12" type="sldNum"/>
@@ -13862,7 +17662,7 @@
   <p:cSld>
     <p:spTree>
       <p:nvGrpSpPr>
-        <p:cNvPr id="56" name="Shape 56"/>
+        <p:cNvPr id="98" name="Shape 98"/>
         <p:cNvGrpSpPr/>
         <p:nvPr/>
       </p:nvGrpSpPr>
@@ -13876,7 +17676,7 @@
       </p:grpSpPr>
       <p:sp>
         <p:nvSpPr>
-          <p:cNvPr id="57" name="Google Shape;57;p9"/>
+          <p:cNvPr id="99" name="Google Shape;99;p16"/>
           <p:cNvSpPr txBox="1"/>
           <p:nvPr>
             <p:ph type="title"/>
@@ -13920,7 +17720,7 @@
       </p:sp>
       <p:sp>
         <p:nvSpPr>
-          <p:cNvPr id="58" name="Google Shape;58;p9"/>
+          <p:cNvPr id="100" name="Google Shape;100;p16"/>
           <p:cNvSpPr txBox="1"/>
           <p:nvPr>
             <p:ph idx="1" type="body"/>
@@ -14008,7 +17808,7 @@
       </p:sp>
       <p:sp>
         <p:nvSpPr>
-          <p:cNvPr id="59" name="Google Shape;59;p9"/>
+          <p:cNvPr id="101" name="Google Shape;101;p16"/>
           <p:cNvSpPr txBox="1"/>
           <p:nvPr>
             <p:ph idx="12" type="sldNum"/>
@@ -14092,7 +17892,7 @@
   <p:cSld>
     <p:spTree>
       <p:nvGrpSpPr>
-        <p:cNvPr id="182" name="Shape 182"/>
+        <p:cNvPr id="225" name="Shape 225"/>
         <p:cNvGrpSpPr/>
         <p:nvPr/>
       </p:nvGrpSpPr>
@@ -14106,7 +17906,7 @@
       </p:grpSpPr>
       <p:sp>
         <p:nvSpPr>
-          <p:cNvPr id="183" name="Google Shape;183;p27"/>
+          <p:cNvPr id="226" name="Google Shape;226;p34"/>
           <p:cNvSpPr txBox="1"/>
           <p:nvPr>
             <p:ph idx="1" type="body"/>
@@ -14284,7 +18084,7 @@
       </p:sp>
       <p:sp>
         <p:nvSpPr>
-          <p:cNvPr id="184" name="Google Shape;184;p27"/>
+          <p:cNvPr id="227" name="Google Shape;227;p34"/>
           <p:cNvSpPr txBox="1"/>
           <p:nvPr>
             <p:ph type="title"/>
@@ -14324,7 +18124,7 @@
       </p:sp>
       <p:sp>
         <p:nvSpPr>
-          <p:cNvPr id="185" name="Google Shape;185;p27"/>
+          <p:cNvPr id="228" name="Google Shape;228;p34"/>
           <p:cNvSpPr txBox="1"/>
           <p:nvPr>
             <p:ph idx="12" type="sldNum"/>
@@ -14408,7 +18208,7 @@
   <p:cSld>
     <p:spTree>
       <p:nvGrpSpPr>
-        <p:cNvPr id="189" name="Shape 189"/>
+        <p:cNvPr id="232" name="Shape 232"/>
         <p:cNvGrpSpPr/>
         <p:nvPr/>
       </p:nvGrpSpPr>
@@ -14422,7 +18222,7 @@
       </p:grpSpPr>
       <p:sp>
         <p:nvSpPr>
-          <p:cNvPr id="190" name="Google Shape;190;p28"/>
+          <p:cNvPr id="233" name="Google Shape;233;p35"/>
           <p:cNvSpPr txBox="1"/>
           <p:nvPr>
             <p:ph type="title"/>
@@ -14462,7 +18262,7 @@
       </p:sp>
       <p:sp>
         <p:nvSpPr>
-          <p:cNvPr id="191" name="Google Shape;191;p28"/>
+          <p:cNvPr id="234" name="Google Shape;234;p35"/>
           <p:cNvSpPr txBox="1"/>
           <p:nvPr>
             <p:ph idx="12" type="sldNum"/>
@@ -14535,7 +18335,7 @@
       </p:sp>
       <p:sp>
         <p:nvSpPr>
-          <p:cNvPr id="192" name="Google Shape;192;p28"/>
+          <p:cNvPr id="235" name="Google Shape;235;p35"/>
           <p:cNvSpPr txBox="1"/>
           <p:nvPr>
             <p:ph idx="1" type="body"/>
@@ -14662,7 +18462,7 @@
       </p:sp>
       <p:sp>
         <p:nvSpPr>
-          <p:cNvPr id="193" name="Google Shape;193;p28"/>
+          <p:cNvPr id="236" name="Google Shape;236;p35"/>
           <p:cNvSpPr txBox="1"/>
           <p:nvPr/>
         </p:nvSpPr>
@@ -14726,7 +18526,7 @@
       </p:sp>
       <p:pic>
         <p:nvPicPr>
-          <p:cNvPr id="194" name="Google Shape;194;p28"/>
+          <p:cNvPr id="237" name="Google Shape;237;p35"/>
           <p:cNvPicPr preferRelativeResize="0"/>
           <p:nvPr/>
         </p:nvPicPr>
@@ -14765,7 +18565,7 @@
   <p:cSld>
     <p:spTree>
       <p:nvGrpSpPr>
-        <p:cNvPr id="198" name="Shape 198"/>
+        <p:cNvPr id="241" name="Shape 241"/>
         <p:cNvGrpSpPr/>
         <p:nvPr/>
       </p:nvGrpSpPr>
@@ -14779,7 +18579,7 @@
       </p:grpSpPr>
       <p:sp>
         <p:nvSpPr>
-          <p:cNvPr id="199" name="Google Shape;199;p29"/>
+          <p:cNvPr id="242" name="Google Shape;242;p36"/>
           <p:cNvSpPr txBox="1"/>
           <p:nvPr>
             <p:ph type="title"/>
@@ -14819,7 +18619,7 @@
       </p:sp>
       <p:sp>
         <p:nvSpPr>
-          <p:cNvPr id="200" name="Google Shape;200;p29"/>
+          <p:cNvPr id="243" name="Google Shape;243;p36"/>
           <p:cNvSpPr txBox="1"/>
           <p:nvPr>
             <p:ph idx="12" type="sldNum"/>
@@ -14892,7 +18692,7 @@
       </p:sp>
       <p:pic>
         <p:nvPicPr>
-          <p:cNvPr id="201" name="Google Shape;201;p29"/>
+          <p:cNvPr id="244" name="Google Shape;244;p36"/>
           <p:cNvPicPr preferRelativeResize="0"/>
           <p:nvPr/>
         </p:nvPicPr>
@@ -14906,8 +18706,8 @@
         </p:blipFill>
         <p:spPr>
           <a:xfrm>
-            <a:off x="274320" y="914400"/>
-            <a:ext cx="8595360" cy="3495446"/>
+            <a:off x="0" y="731520"/>
+            <a:ext cx="9144001" cy="3931920"/>
           </a:xfrm>
           <a:prstGeom prst="rect">
             <a:avLst/>
@@ -14931,7 +18731,7 @@
   <p:cSld>
     <p:spTree>
       <p:nvGrpSpPr>
-        <p:cNvPr id="205" name="Shape 205"/>
+        <p:cNvPr id="248" name="Shape 248"/>
         <p:cNvGrpSpPr/>
         <p:nvPr/>
       </p:nvGrpSpPr>
@@ -14945,7 +18745,7 @@
       </p:grpSpPr>
       <p:sp>
         <p:nvSpPr>
-          <p:cNvPr id="206" name="Google Shape;206;p30"/>
+          <p:cNvPr id="249" name="Google Shape;249;p37"/>
           <p:cNvSpPr txBox="1"/>
           <p:nvPr>
             <p:ph type="title"/>
@@ -14985,7 +18785,7 @@
       </p:sp>
       <p:sp>
         <p:nvSpPr>
-          <p:cNvPr id="207" name="Google Shape;207;p30"/>
+          <p:cNvPr id="250" name="Google Shape;250;p37"/>
           <p:cNvSpPr txBox="1"/>
           <p:nvPr>
             <p:ph idx="12" type="sldNum"/>
@@ -15058,7 +18858,7 @@
       </p:sp>
       <p:graphicFrame>
         <p:nvGraphicFramePr>
-          <p:cNvPr id="208" name="Google Shape;208;p30"/>
+          <p:cNvPr id="251" name="Google Shape;251;p37"/>
           <p:cNvGraphicFramePr/>
           <p:nvPr/>
         </p:nvGraphicFramePr>
@@ -15071,7 +18871,7 @@
             <a:tbl>
               <a:tblPr>
                 <a:noFill/>
-                <a:tableStyleId>{C8642286-7339-4B29-B360-2DF6F540B912}</a:tableStyleId>
+                <a:tableStyleId>{06765188-D505-4E99-84A0-020E74BA5E39}</a:tableStyleId>
               </a:tblPr>
               <a:tblGrid>
                 <a:gridCol w="647000"/>
@@ -15915,7 +19715,7 @@
   <p:cSld>
     <p:spTree>
       <p:nvGrpSpPr>
-        <p:cNvPr id="212" name="Shape 212"/>
+        <p:cNvPr id="255" name="Shape 255"/>
         <p:cNvGrpSpPr/>
         <p:nvPr/>
       </p:nvGrpSpPr>
@@ -15929,7 +19729,7 @@
       </p:grpSpPr>
       <p:sp>
         <p:nvSpPr>
-          <p:cNvPr id="213" name="Google Shape;213;p31"/>
+          <p:cNvPr id="256" name="Google Shape;256;p38"/>
           <p:cNvSpPr txBox="1"/>
           <p:nvPr>
             <p:ph type="title"/>
@@ -15969,7 +19769,7 @@
       </p:sp>
       <p:sp>
         <p:nvSpPr>
-          <p:cNvPr id="214" name="Google Shape;214;p31"/>
+          <p:cNvPr id="257" name="Google Shape;257;p38"/>
           <p:cNvSpPr txBox="1"/>
           <p:nvPr>
             <p:ph idx="12" type="sldNum"/>
@@ -16042,7 +19842,7 @@
       </p:sp>
       <p:sp>
         <p:nvSpPr>
-          <p:cNvPr id="215" name="Google Shape;215;p31"/>
+          <p:cNvPr id="258" name="Google Shape;258;p38"/>
           <p:cNvSpPr txBox="1"/>
           <p:nvPr>
             <p:ph idx="1" type="body"/>
@@ -16171,7 +19971,7 @@
   <p:cSld>
     <p:spTree>
       <p:nvGrpSpPr>
-        <p:cNvPr id="219" name="Shape 219"/>
+        <p:cNvPr id="262" name="Shape 262"/>
         <p:cNvGrpSpPr/>
         <p:nvPr/>
       </p:nvGrpSpPr>
@@ -16185,7 +19985,7 @@
       </p:grpSpPr>
       <p:sp>
         <p:nvSpPr>
-          <p:cNvPr id="220" name="Google Shape;220;p32"/>
+          <p:cNvPr id="263" name="Google Shape;263;p39"/>
           <p:cNvSpPr txBox="1"/>
           <p:nvPr>
             <p:ph type="title"/>
@@ -16225,7 +20025,7 @@
       </p:sp>
       <p:sp>
         <p:nvSpPr>
-          <p:cNvPr id="221" name="Google Shape;221;p32"/>
+          <p:cNvPr id="264" name="Google Shape;264;p39"/>
           <p:cNvSpPr txBox="1"/>
           <p:nvPr>
             <p:ph idx="1" type="body"/>
@@ -16408,7 +20208,7 @@
       </p:sp>
       <p:sp>
         <p:nvSpPr>
-          <p:cNvPr id="222" name="Google Shape;222;p32"/>
+          <p:cNvPr id="265" name="Google Shape;265;p39"/>
           <p:cNvSpPr txBox="1"/>
           <p:nvPr>
             <p:ph idx="12" type="sldNum"/>
@@ -16482,7 +20282,7 @@
       </p:sp>
       <p:graphicFrame>
         <p:nvGraphicFramePr>
-          <p:cNvPr id="223" name="Google Shape;223;p32"/>
+          <p:cNvPr id="266" name="Google Shape;266;p39"/>
           <p:cNvGraphicFramePr/>
           <p:nvPr/>
         </p:nvGraphicFramePr>
@@ -16495,7 +20295,7 @@
             <a:tbl>
               <a:tblPr>
                 <a:noFill/>
-                <a:tableStyleId>{C8642286-7339-4B29-B360-2DF6F540B912}</a:tableStyleId>
+                <a:tableStyleId>{06765188-D505-4E99-84A0-020E74BA5E39}</a:tableStyleId>
               </a:tblPr>
               <a:tblGrid>
                 <a:gridCol w="2103125"/>
@@ -17546,7 +21346,7 @@
   <p:cSld>
     <p:spTree>
       <p:nvGrpSpPr>
-        <p:cNvPr id="227" name="Shape 227"/>
+        <p:cNvPr id="270" name="Shape 270"/>
         <p:cNvGrpSpPr/>
         <p:nvPr/>
       </p:nvGrpSpPr>
@@ -17560,7 +21360,7 @@
       </p:grpSpPr>
       <p:sp>
         <p:nvSpPr>
-          <p:cNvPr id="228" name="Google Shape;228;p33"/>
+          <p:cNvPr id="271" name="Google Shape;271;p40"/>
           <p:cNvSpPr txBox="1"/>
           <p:nvPr>
             <p:ph type="title"/>
@@ -17600,7 +21400,7 @@
       </p:sp>
       <p:sp>
         <p:nvSpPr>
-          <p:cNvPr id="229" name="Google Shape;229;p33"/>
+          <p:cNvPr id="272" name="Google Shape;272;p40"/>
           <p:cNvSpPr txBox="1"/>
           <p:nvPr>
             <p:ph idx="1" type="body"/>
@@ -17718,7 +21518,7 @@
       </p:sp>
       <p:sp>
         <p:nvSpPr>
-          <p:cNvPr id="230" name="Google Shape;230;p33"/>
+          <p:cNvPr id="273" name="Google Shape;273;p40"/>
           <p:cNvSpPr txBox="1"/>
           <p:nvPr>
             <p:ph idx="4294967295" type="body"/>
@@ -17817,7 +21617,7 @@
       </p:sp>
       <p:sp>
         <p:nvSpPr>
-          <p:cNvPr id="231" name="Google Shape;231;p33"/>
+          <p:cNvPr id="274" name="Google Shape;274;p40"/>
           <p:cNvSpPr txBox="1"/>
           <p:nvPr>
             <p:ph idx="12" type="sldNum"/>
@@ -17901,7 +21701,7 @@
   <p:cSld>
     <p:spTree>
       <p:nvGrpSpPr>
-        <p:cNvPr id="235" name="Shape 235"/>
+        <p:cNvPr id="278" name="Shape 278"/>
         <p:cNvGrpSpPr/>
         <p:nvPr/>
       </p:nvGrpSpPr>
@@ -17915,7 +21715,7 @@
       </p:grpSpPr>
       <p:sp>
         <p:nvSpPr>
-          <p:cNvPr id="236" name="Google Shape;236;p34"/>
+          <p:cNvPr id="279" name="Google Shape;279;p41"/>
           <p:cNvSpPr txBox="1"/>
           <p:nvPr>
             <p:ph type="title"/>
@@ -17955,7 +21755,7 @@
       </p:sp>
       <p:sp>
         <p:nvSpPr>
-          <p:cNvPr id="237" name="Google Shape;237;p34"/>
+          <p:cNvPr id="280" name="Google Shape;280;p41"/>
           <p:cNvSpPr txBox="1"/>
           <p:nvPr>
             <p:ph idx="12" type="sldNum"/>
@@ -18028,7 +21828,7 @@
       </p:sp>
       <p:sp>
         <p:nvSpPr>
-          <p:cNvPr id="238" name="Google Shape;238;p34"/>
+          <p:cNvPr id="281" name="Google Shape;281;p41"/>
           <p:cNvSpPr txBox="1"/>
           <p:nvPr>
             <p:ph idx="1" type="body"/>
@@ -18091,7 +21891,7 @@
       </p:sp>
       <p:graphicFrame>
         <p:nvGraphicFramePr>
-          <p:cNvPr id="239" name="Google Shape;239;p34"/>
+          <p:cNvPr id="282" name="Google Shape;282;p41"/>
           <p:cNvGraphicFramePr/>
           <p:nvPr/>
         </p:nvGraphicFramePr>
@@ -18104,7 +21904,7 @@
             <a:tbl>
               <a:tblPr>
                 <a:noFill/>
-                <a:tableStyleId>{C8642286-7339-4B29-B360-2DF6F540B912}</a:tableStyleId>
+                <a:tableStyleId>{06765188-D505-4E99-84A0-020E74BA5E39}</a:tableStyleId>
               </a:tblPr>
               <a:tblGrid>
                 <a:gridCol w="637250"/>
@@ -19089,7 +22889,7 @@
   <p:cSld>
     <p:spTree>
       <p:nvGrpSpPr>
-        <p:cNvPr id="243" name="Shape 243"/>
+        <p:cNvPr id="286" name="Shape 286"/>
         <p:cNvGrpSpPr/>
         <p:nvPr/>
       </p:nvGrpSpPr>
@@ -19103,7 +22903,7 @@
       </p:grpSpPr>
       <p:sp>
         <p:nvSpPr>
-          <p:cNvPr id="244" name="Google Shape;244;p35"/>
+          <p:cNvPr id="287" name="Google Shape;287;p42"/>
           <p:cNvSpPr txBox="1"/>
           <p:nvPr>
             <p:ph type="title"/>
@@ -19143,7 +22943,7 @@
       </p:sp>
       <p:sp>
         <p:nvSpPr>
-          <p:cNvPr id="245" name="Google Shape;245;p35"/>
+          <p:cNvPr id="288" name="Google Shape;288;p42"/>
           <p:cNvSpPr txBox="1"/>
           <p:nvPr>
             <p:ph idx="12" type="sldNum"/>
@@ -19216,7 +23016,7 @@
       </p:sp>
       <p:pic>
         <p:nvPicPr>
-          <p:cNvPr id="246" name="Google Shape;246;p35"/>
+          <p:cNvPr id="289" name="Google Shape;289;p42"/>
           <p:cNvPicPr preferRelativeResize="0"/>
           <p:nvPr/>
         </p:nvPicPr>
@@ -19230,8 +23030,8 @@
         </p:blipFill>
         <p:spPr>
           <a:xfrm>
-            <a:off x="274320" y="914400"/>
-            <a:ext cx="8595360" cy="3495446"/>
+            <a:off x="0" y="731520"/>
+            <a:ext cx="9144001" cy="3931920"/>
           </a:xfrm>
           <a:prstGeom prst="rect">
             <a:avLst/>
@@ -19255,7 +23055,7 @@
   <p:cSld>
     <p:spTree>
       <p:nvGrpSpPr>
-        <p:cNvPr id="250" name="Shape 250"/>
+        <p:cNvPr id="293" name="Shape 293"/>
         <p:cNvGrpSpPr/>
         <p:nvPr/>
       </p:nvGrpSpPr>
@@ -19269,7 +23069,7 @@
       </p:grpSpPr>
       <p:sp>
         <p:nvSpPr>
-          <p:cNvPr id="251" name="Google Shape;251;p36"/>
+          <p:cNvPr id="294" name="Google Shape;294;p43"/>
           <p:cNvSpPr txBox="1"/>
           <p:nvPr>
             <p:ph type="title"/>
@@ -19309,7 +23109,7 @@
       </p:sp>
       <p:sp>
         <p:nvSpPr>
-          <p:cNvPr id="252" name="Google Shape;252;p36"/>
+          <p:cNvPr id="295" name="Google Shape;295;p43"/>
           <p:cNvSpPr txBox="1"/>
           <p:nvPr>
             <p:ph idx="12" type="sldNum"/>
@@ -19382,7 +23182,7 @@
       </p:sp>
       <p:sp>
         <p:nvSpPr>
-          <p:cNvPr id="253" name="Google Shape;253;p36"/>
+          <p:cNvPr id="296" name="Google Shape;296;p43"/>
           <p:cNvSpPr txBox="1"/>
           <p:nvPr>
             <p:ph idx="1" type="body"/>
@@ -19476,7 +23276,7 @@
       </p:sp>
       <p:sp>
         <p:nvSpPr>
-          <p:cNvPr id="254" name="Google Shape;254;p36"/>
+          <p:cNvPr id="297" name="Google Shape;297;p43"/>
           <p:cNvSpPr txBox="1"/>
           <p:nvPr>
             <p:ph idx="4294967295" type="body"/>
@@ -19565,7 +23365,7 @@
   <p:cSld>
     <p:spTree>
       <p:nvGrpSpPr>
-        <p:cNvPr id="63" name="Shape 63"/>
+        <p:cNvPr id="105" name="Shape 105"/>
         <p:cNvGrpSpPr/>
         <p:nvPr/>
       </p:nvGrpSpPr>
@@ -19579,7 +23379,7 @@
       </p:grpSpPr>
       <p:sp>
         <p:nvSpPr>
-          <p:cNvPr id="64" name="Google Shape;64;p10"/>
+          <p:cNvPr id="106" name="Google Shape;106;p17"/>
           <p:cNvSpPr txBox="1"/>
           <p:nvPr>
             <p:ph idx="1" type="body"/>
@@ -19726,7 +23526,7 @@
       </p:sp>
       <p:sp>
         <p:nvSpPr>
-          <p:cNvPr id="65" name="Google Shape;65;p10"/>
+          <p:cNvPr id="107" name="Google Shape;107;p17"/>
           <p:cNvSpPr txBox="1"/>
           <p:nvPr>
             <p:ph type="title"/>
@@ -19766,7 +23566,7 @@
       </p:sp>
       <p:sp>
         <p:nvSpPr>
-          <p:cNvPr id="66" name="Google Shape;66;p10"/>
+          <p:cNvPr id="108" name="Google Shape;108;p17"/>
           <p:cNvSpPr txBox="1"/>
           <p:nvPr>
             <p:ph idx="12" type="sldNum"/>
@@ -19850,7 +23650,7 @@
   <p:cSld>
     <p:spTree>
       <p:nvGrpSpPr>
-        <p:cNvPr id="258" name="Shape 258"/>
+        <p:cNvPr id="301" name="Shape 301"/>
         <p:cNvGrpSpPr/>
         <p:nvPr/>
       </p:nvGrpSpPr>
@@ -19864,7 +23664,7 @@
       </p:grpSpPr>
       <p:sp>
         <p:nvSpPr>
-          <p:cNvPr id="259" name="Google Shape;259;p37"/>
+          <p:cNvPr id="302" name="Google Shape;302;p44"/>
           <p:cNvSpPr txBox="1"/>
           <p:nvPr>
             <p:ph type="title"/>
@@ -19915,7 +23715,7 @@
   <p:cSld>
     <p:spTree>
       <p:nvGrpSpPr>
-        <p:cNvPr id="263" name="Shape 263"/>
+        <p:cNvPr id="306" name="Shape 306"/>
         <p:cNvGrpSpPr/>
         <p:nvPr/>
       </p:nvGrpSpPr>
@@ -19929,7 +23729,7 @@
       </p:grpSpPr>
       <p:sp>
         <p:nvSpPr>
-          <p:cNvPr id="264" name="Google Shape;264;p38"/>
+          <p:cNvPr id="307" name="Google Shape;307;p45"/>
           <p:cNvSpPr txBox="1"/>
           <p:nvPr>
             <p:ph type="title"/>
@@ -19969,7 +23769,7 @@
       </p:sp>
       <p:sp>
         <p:nvSpPr>
-          <p:cNvPr id="265" name="Google Shape;265;p38"/>
+          <p:cNvPr id="308" name="Google Shape;308;p45"/>
           <p:cNvSpPr txBox="1"/>
           <p:nvPr>
             <p:ph idx="1" type="body"/>
@@ -20114,7 +23914,7 @@
       </p:sp>
       <p:sp>
         <p:nvSpPr>
-          <p:cNvPr id="266" name="Google Shape;266;p38"/>
+          <p:cNvPr id="309" name="Google Shape;309;p45"/>
           <p:cNvSpPr txBox="1"/>
           <p:nvPr>
             <p:ph idx="12" type="sldNum"/>
@@ -20198,7 +23998,7 @@
   <p:cSld>
     <p:spTree>
       <p:nvGrpSpPr>
-        <p:cNvPr id="270" name="Shape 270"/>
+        <p:cNvPr id="313" name="Shape 313"/>
         <p:cNvGrpSpPr/>
         <p:nvPr/>
       </p:nvGrpSpPr>
@@ -20212,7 +24012,7 @@
       </p:grpSpPr>
       <p:sp>
         <p:nvSpPr>
-          <p:cNvPr id="271" name="Google Shape;271;p39"/>
+          <p:cNvPr id="314" name="Google Shape;314;p46"/>
           <p:cNvSpPr txBox="1"/>
           <p:nvPr>
             <p:ph idx="1" type="body"/>
@@ -20304,7 +24104,7 @@
       </p:sp>
       <p:sp>
         <p:nvSpPr>
-          <p:cNvPr id="272" name="Google Shape;272;p39"/>
+          <p:cNvPr id="315" name="Google Shape;315;p46"/>
           <p:cNvSpPr txBox="1"/>
           <p:nvPr>
             <p:ph type="title"/>
@@ -20344,7 +24144,7 @@
       </p:sp>
       <p:sp>
         <p:nvSpPr>
-          <p:cNvPr id="273" name="Google Shape;273;p39"/>
+          <p:cNvPr id="316" name="Google Shape;316;p46"/>
           <p:cNvSpPr txBox="1"/>
           <p:nvPr>
             <p:ph idx="12" type="sldNum"/>
@@ -20417,7 +24217,7 @@
       </p:sp>
       <p:pic>
         <p:nvPicPr>
-          <p:cNvPr id="274" name="Google Shape;274;p39"/>
+          <p:cNvPr id="317" name="Google Shape;317;p46"/>
           <p:cNvPicPr preferRelativeResize="0"/>
           <p:nvPr/>
         </p:nvPicPr>
@@ -20431,8 +24231,8 @@
         </p:blipFill>
         <p:spPr>
           <a:xfrm>
-            <a:off x="274320" y="2286000"/>
-            <a:ext cx="8595359" cy="1757274"/>
+            <a:off x="0" y="1828800"/>
+            <a:ext cx="9144000" cy="1955973"/>
           </a:xfrm>
           <a:prstGeom prst="rect">
             <a:avLst/>
@@ -20456,7 +24256,7 @@
   <p:cSld>
     <p:spTree>
       <p:nvGrpSpPr>
-        <p:cNvPr id="278" name="Shape 278"/>
+        <p:cNvPr id="321" name="Shape 321"/>
         <p:cNvGrpSpPr/>
         <p:nvPr/>
       </p:nvGrpSpPr>
@@ -20470,7 +24270,7 @@
       </p:grpSpPr>
       <p:sp>
         <p:nvSpPr>
-          <p:cNvPr id="279" name="Google Shape;279;p40"/>
+          <p:cNvPr id="322" name="Google Shape;322;p47"/>
           <p:cNvSpPr txBox="1"/>
           <p:nvPr>
             <p:ph type="title"/>
@@ -20510,7 +24310,7 @@
       </p:sp>
       <p:sp>
         <p:nvSpPr>
-          <p:cNvPr id="280" name="Google Shape;280;p40"/>
+          <p:cNvPr id="323" name="Google Shape;323;p47"/>
           <p:cNvSpPr txBox="1"/>
           <p:nvPr>
             <p:ph idx="1" type="body"/>
@@ -20638,7 +24438,7 @@
       </p:sp>
       <p:sp>
         <p:nvSpPr>
-          <p:cNvPr id="281" name="Google Shape;281;p40"/>
+          <p:cNvPr id="324" name="Google Shape;324;p47"/>
           <p:cNvSpPr txBox="1"/>
           <p:nvPr>
             <p:ph idx="12" type="sldNum"/>
@@ -20722,7 +24522,7 @@
   <p:cSld>
     <p:spTree>
       <p:nvGrpSpPr>
-        <p:cNvPr id="285" name="Shape 285"/>
+        <p:cNvPr id="328" name="Shape 328"/>
         <p:cNvGrpSpPr/>
         <p:nvPr/>
       </p:nvGrpSpPr>
@@ -20736,7 +24536,7 @@
       </p:grpSpPr>
       <p:sp>
         <p:nvSpPr>
-          <p:cNvPr id="286" name="Google Shape;286;p41"/>
+          <p:cNvPr id="329" name="Google Shape;329;p48"/>
           <p:cNvSpPr txBox="1"/>
           <p:nvPr>
             <p:ph type="title"/>
@@ -20776,7 +24576,7 @@
       </p:sp>
       <p:sp>
         <p:nvSpPr>
-          <p:cNvPr id="287" name="Google Shape;287;p41"/>
+          <p:cNvPr id="330" name="Google Shape;330;p48"/>
           <p:cNvSpPr txBox="1"/>
           <p:nvPr>
             <p:ph idx="1" type="body"/>
@@ -20882,7 +24682,7 @@
       </p:sp>
       <p:sp>
         <p:nvSpPr>
-          <p:cNvPr id="288" name="Google Shape;288;p41"/>
+          <p:cNvPr id="331" name="Google Shape;331;p48"/>
           <p:cNvSpPr txBox="1"/>
           <p:nvPr>
             <p:ph idx="12" type="sldNum"/>
@@ -20966,7 +24766,7 @@
   <p:cSld>
     <p:spTree>
       <p:nvGrpSpPr>
-        <p:cNvPr id="292" name="Shape 292"/>
+        <p:cNvPr id="335" name="Shape 335"/>
         <p:cNvGrpSpPr/>
         <p:nvPr/>
       </p:nvGrpSpPr>
@@ -20980,7 +24780,7 @@
       </p:grpSpPr>
       <p:sp>
         <p:nvSpPr>
-          <p:cNvPr id="293" name="Google Shape;293;p42"/>
+          <p:cNvPr id="336" name="Google Shape;336;p49"/>
           <p:cNvSpPr txBox="1"/>
           <p:nvPr>
             <p:ph type="title"/>
@@ -21020,7 +24820,7 @@
       </p:sp>
       <p:sp>
         <p:nvSpPr>
-          <p:cNvPr id="294" name="Google Shape;294;p42"/>
+          <p:cNvPr id="337" name="Google Shape;337;p49"/>
           <p:cNvSpPr txBox="1"/>
           <p:nvPr>
             <p:ph idx="1" type="body"/>
@@ -21077,7 +24877,7 @@
       </p:sp>
       <p:sp>
         <p:nvSpPr>
-          <p:cNvPr id="295" name="Google Shape;295;p42"/>
+          <p:cNvPr id="338" name="Google Shape;338;p49"/>
           <p:cNvSpPr txBox="1"/>
           <p:nvPr>
             <p:ph idx="12" type="sldNum"/>
@@ -21161,7 +24961,7 @@
   <p:cSld>
     <p:spTree>
       <p:nvGrpSpPr>
-        <p:cNvPr id="299" name="Shape 299"/>
+        <p:cNvPr id="342" name="Shape 342"/>
         <p:cNvGrpSpPr/>
         <p:nvPr/>
       </p:nvGrpSpPr>
@@ -21175,7 +24975,7 @@
       </p:grpSpPr>
       <p:sp>
         <p:nvSpPr>
-          <p:cNvPr id="300" name="Google Shape;300;p43"/>
+          <p:cNvPr id="343" name="Google Shape;343;p50"/>
           <p:cNvSpPr txBox="1"/>
           <p:nvPr>
             <p:ph type="title"/>
@@ -21215,7 +25015,7 @@
       </p:sp>
       <p:sp>
         <p:nvSpPr>
-          <p:cNvPr id="301" name="Google Shape;301;p43"/>
+          <p:cNvPr id="344" name="Google Shape;344;p50"/>
           <p:cNvSpPr txBox="1"/>
           <p:nvPr>
             <p:ph idx="1" type="body"/>
@@ -21279,7 +25079,7 @@
       </p:sp>
       <p:sp>
         <p:nvSpPr>
-          <p:cNvPr id="302" name="Google Shape;302;p43"/>
+          <p:cNvPr id="345" name="Google Shape;345;p50"/>
           <p:cNvSpPr txBox="1"/>
           <p:nvPr>
             <p:ph idx="12" type="sldNum"/>
@@ -21352,7 +25152,7 @@
       </p:sp>
       <p:sp>
         <p:nvSpPr>
-          <p:cNvPr id="303" name="Google Shape;303;p43"/>
+          <p:cNvPr id="346" name="Google Shape;346;p50"/>
           <p:cNvSpPr txBox="1"/>
           <p:nvPr/>
         </p:nvSpPr>
@@ -21437,7 +25237,7 @@
   <p:cSld>
     <p:spTree>
       <p:nvGrpSpPr>
-        <p:cNvPr id="307" name="Shape 307"/>
+        <p:cNvPr id="350" name="Shape 350"/>
         <p:cNvGrpSpPr/>
         <p:nvPr/>
       </p:nvGrpSpPr>
@@ -21451,7 +25251,7 @@
       </p:grpSpPr>
       <p:sp>
         <p:nvSpPr>
-          <p:cNvPr id="308" name="Google Shape;308;p44"/>
+          <p:cNvPr id="351" name="Google Shape;351;p51"/>
           <p:cNvSpPr txBox="1"/>
           <p:nvPr>
             <p:ph type="title"/>
@@ -21491,7 +25291,7 @@
       </p:sp>
       <p:sp>
         <p:nvSpPr>
-          <p:cNvPr id="309" name="Google Shape;309;p44"/>
+          <p:cNvPr id="352" name="Google Shape;352;p51"/>
           <p:cNvSpPr txBox="1"/>
           <p:nvPr>
             <p:ph idx="12" type="sldNum"/>
@@ -21564,7 +25364,7 @@
       </p:sp>
       <p:pic>
         <p:nvPicPr>
-          <p:cNvPr id="310" name="Google Shape;310;p44"/>
+          <p:cNvPr id="353" name="Google Shape;353;p51"/>
           <p:cNvPicPr preferRelativeResize="0"/>
           <p:nvPr/>
         </p:nvPicPr>
@@ -21578,8 +25378,8 @@
         </p:blipFill>
         <p:spPr>
           <a:xfrm>
-            <a:off x="274320" y="914400"/>
-            <a:ext cx="8595360" cy="3493598"/>
+            <a:off x="0" y="731520"/>
+            <a:ext cx="9144001" cy="3931920"/>
           </a:xfrm>
           <a:prstGeom prst="rect">
             <a:avLst/>
@@ -21603,7 +25403,7 @@
   <p:cSld>
     <p:spTree>
       <p:nvGrpSpPr>
-        <p:cNvPr id="314" name="Shape 314"/>
+        <p:cNvPr id="357" name="Shape 357"/>
         <p:cNvGrpSpPr/>
         <p:nvPr/>
       </p:nvGrpSpPr>
@@ -21617,7 +25417,7 @@
       </p:grpSpPr>
       <p:sp>
         <p:nvSpPr>
-          <p:cNvPr id="315" name="Google Shape;315;p45"/>
+          <p:cNvPr id="358" name="Google Shape;358;p52"/>
           <p:cNvSpPr txBox="1"/>
           <p:nvPr>
             <p:ph type="title"/>
@@ -21657,7 +25457,7 @@
       </p:sp>
       <p:sp>
         <p:nvSpPr>
-          <p:cNvPr id="316" name="Google Shape;316;p45"/>
+          <p:cNvPr id="359" name="Google Shape;359;p52"/>
           <p:cNvSpPr txBox="1"/>
           <p:nvPr>
             <p:ph idx="12" type="sldNum"/>
@@ -21730,7 +25530,7 @@
       </p:sp>
       <p:pic>
         <p:nvPicPr>
-          <p:cNvPr id="317" name="Google Shape;317;p45"/>
+          <p:cNvPr id="360" name="Google Shape;360;p52"/>
           <p:cNvPicPr preferRelativeResize="0"/>
           <p:nvPr/>
         </p:nvPicPr>
@@ -21744,8 +25544,8 @@
         </p:blipFill>
         <p:spPr>
           <a:xfrm>
-            <a:off x="274320" y="914400"/>
-            <a:ext cx="8595360" cy="3493598"/>
+            <a:off x="0" y="731520"/>
+            <a:ext cx="9144001" cy="3931920"/>
           </a:xfrm>
           <a:prstGeom prst="rect">
             <a:avLst/>
@@ -21769,7 +25569,7 @@
   <p:cSld>
     <p:spTree>
       <p:nvGrpSpPr>
-        <p:cNvPr id="321" name="Shape 321"/>
+        <p:cNvPr id="364" name="Shape 364"/>
         <p:cNvGrpSpPr/>
         <p:nvPr/>
       </p:nvGrpSpPr>
@@ -21783,7 +25583,7 @@
       </p:grpSpPr>
       <p:sp>
         <p:nvSpPr>
-          <p:cNvPr id="322" name="Google Shape;322;p46"/>
+          <p:cNvPr id="365" name="Google Shape;365;p53"/>
           <p:cNvSpPr txBox="1"/>
           <p:nvPr>
             <p:ph type="title"/>
@@ -21823,7 +25623,7 @@
       </p:sp>
       <p:sp>
         <p:nvSpPr>
-          <p:cNvPr id="323" name="Google Shape;323;p46"/>
+          <p:cNvPr id="366" name="Google Shape;366;p53"/>
           <p:cNvSpPr txBox="1"/>
           <p:nvPr>
             <p:ph idx="1" type="body"/>
@@ -21913,7 +25713,7 @@
       </p:sp>
       <p:sp>
         <p:nvSpPr>
-          <p:cNvPr id="324" name="Google Shape;324;p46"/>
+          <p:cNvPr id="367" name="Google Shape;367;p53"/>
           <p:cNvSpPr txBox="1"/>
           <p:nvPr>
             <p:ph idx="12" type="sldNum"/>
@@ -21997,7 +25797,7 @@
   <p:cSld>
     <p:spTree>
       <p:nvGrpSpPr>
-        <p:cNvPr id="70" name="Shape 70"/>
+        <p:cNvPr id="112" name="Shape 112"/>
         <p:cNvGrpSpPr/>
         <p:nvPr/>
       </p:nvGrpSpPr>
@@ -22011,7 +25811,7 @@
       </p:grpSpPr>
       <p:sp>
         <p:nvSpPr>
-          <p:cNvPr id="71" name="Google Shape;71;p11"/>
+          <p:cNvPr id="113" name="Google Shape;113;p18"/>
           <p:cNvSpPr txBox="1"/>
           <p:nvPr>
             <p:ph type="title"/>
@@ -22062,7 +25862,7 @@
   <p:cSld>
     <p:spTree>
       <p:nvGrpSpPr>
-        <p:cNvPr id="328" name="Shape 328"/>
+        <p:cNvPr id="371" name="Shape 371"/>
         <p:cNvGrpSpPr/>
         <p:nvPr/>
       </p:nvGrpSpPr>
@@ -22076,7 +25876,7 @@
       </p:grpSpPr>
       <p:sp>
         <p:nvSpPr>
-          <p:cNvPr id="329" name="Google Shape;329;p47"/>
+          <p:cNvPr id="372" name="Google Shape;372;p54"/>
           <p:cNvSpPr txBox="1"/>
           <p:nvPr>
             <p:ph type="title"/>
@@ -22127,7 +25927,7 @@
   <p:cSld>
     <p:spTree>
       <p:nvGrpSpPr>
-        <p:cNvPr id="333" name="Shape 333"/>
+        <p:cNvPr id="376" name="Shape 376"/>
         <p:cNvGrpSpPr/>
         <p:nvPr/>
       </p:nvGrpSpPr>
@@ -22141,7 +25941,7 @@
       </p:grpSpPr>
       <p:sp>
         <p:nvSpPr>
-          <p:cNvPr id="334" name="Google Shape;334;p48"/>
+          <p:cNvPr id="377" name="Google Shape;377;p55"/>
           <p:cNvSpPr txBox="1"/>
           <p:nvPr>
             <p:ph type="title"/>
@@ -22181,7 +25981,7 @@
       </p:sp>
       <p:sp>
         <p:nvSpPr>
-          <p:cNvPr id="335" name="Google Shape;335;p48"/>
+          <p:cNvPr id="378" name="Google Shape;378;p55"/>
           <p:cNvSpPr txBox="1"/>
           <p:nvPr>
             <p:ph idx="12" type="sldNum"/>
@@ -22254,7 +26054,7 @@
       </p:sp>
       <p:pic>
         <p:nvPicPr>
-          <p:cNvPr id="336" name="Google Shape;336;p48"/>
+          <p:cNvPr id="379" name="Google Shape;379;p55"/>
           <p:cNvPicPr preferRelativeResize="0"/>
           <p:nvPr/>
         </p:nvPicPr>
@@ -22268,8 +26068,8 @@
         </p:blipFill>
         <p:spPr>
           <a:xfrm>
-            <a:off x="274320" y="914400"/>
-            <a:ext cx="8595360" cy="3493598"/>
+            <a:off x="0" y="731520"/>
+            <a:ext cx="9144001" cy="3931920"/>
           </a:xfrm>
           <a:prstGeom prst="rect">
             <a:avLst/>
@@ -22293,7 +26093,7 @@
   <p:cSld>
     <p:spTree>
       <p:nvGrpSpPr>
-        <p:cNvPr id="340" name="Shape 340"/>
+        <p:cNvPr id="383" name="Shape 383"/>
         <p:cNvGrpSpPr/>
         <p:nvPr/>
       </p:nvGrpSpPr>
@@ -22307,7 +26107,7 @@
       </p:grpSpPr>
       <p:sp>
         <p:nvSpPr>
-          <p:cNvPr id="341" name="Google Shape;341;p49"/>
+          <p:cNvPr id="384" name="Google Shape;384;p56"/>
           <p:cNvSpPr txBox="1"/>
           <p:nvPr>
             <p:ph type="title"/>
@@ -22347,7 +26147,7 @@
       </p:sp>
       <p:sp>
         <p:nvSpPr>
-          <p:cNvPr id="342" name="Google Shape;342;p49"/>
+          <p:cNvPr id="385" name="Google Shape;385;p56"/>
           <p:cNvSpPr txBox="1"/>
           <p:nvPr>
             <p:ph idx="12" type="sldNum"/>
@@ -22420,7 +26220,7 @@
       </p:sp>
       <p:graphicFrame>
         <p:nvGraphicFramePr>
-          <p:cNvPr id="343" name="Google Shape;343;p49"/>
+          <p:cNvPr id="386" name="Google Shape;386;p56"/>
           <p:cNvGraphicFramePr/>
           <p:nvPr/>
         </p:nvGraphicFramePr>
@@ -22433,7 +26233,7 @@
             <a:tbl>
               <a:tblPr>
                 <a:noFill/>
-                <a:tableStyleId>{E482AAB0-600E-4602-8F6B-44D323A07FC4}</a:tableStyleId>
+                <a:tableStyleId>{C864D910-C642-4BC7-AC68-6AAAE45BA753}</a:tableStyleId>
               </a:tblPr>
               <a:tblGrid>
                 <a:gridCol w="645525"/>
@@ -32726,7 +36526,7 @@
   <p:cSld>
     <p:spTree>
       <p:nvGrpSpPr>
-        <p:cNvPr id="347" name="Shape 347"/>
+        <p:cNvPr id="390" name="Shape 390"/>
         <p:cNvGrpSpPr/>
         <p:nvPr/>
       </p:nvGrpSpPr>
@@ -32740,7 +36540,7 @@
       </p:grpSpPr>
       <p:sp>
         <p:nvSpPr>
-          <p:cNvPr id="348" name="Google Shape;348;p50"/>
+          <p:cNvPr id="391" name="Google Shape;391;p57"/>
           <p:cNvSpPr txBox="1"/>
           <p:nvPr>
             <p:ph type="title"/>
@@ -32784,7 +36584,7 @@
       </p:sp>
       <p:sp>
         <p:nvSpPr>
-          <p:cNvPr id="349" name="Google Shape;349;p50"/>
+          <p:cNvPr id="392" name="Google Shape;392;p57"/>
           <p:cNvSpPr txBox="1"/>
           <p:nvPr>
             <p:ph idx="12" type="sldNum"/>
@@ -32857,7 +36657,7 @@
       </p:sp>
       <p:pic>
         <p:nvPicPr>
-          <p:cNvPr id="350" name="Google Shape;350;p50"/>
+          <p:cNvPr id="393" name="Google Shape;393;p57"/>
           <p:cNvPicPr preferRelativeResize="0"/>
           <p:nvPr/>
         </p:nvPicPr>
@@ -32871,8 +36671,8 @@
         </p:blipFill>
         <p:spPr>
           <a:xfrm>
-            <a:off x="274320" y="914400"/>
-            <a:ext cx="8595360" cy="3495446"/>
+            <a:off x="0" y="731520"/>
+            <a:ext cx="9144001" cy="3931920"/>
           </a:xfrm>
           <a:prstGeom prst="rect">
             <a:avLst/>
@@ -32896,7 +36696,7 @@
   <p:cSld>
     <p:spTree>
       <p:nvGrpSpPr>
-        <p:cNvPr id="354" name="Shape 354"/>
+        <p:cNvPr id="397" name="Shape 397"/>
         <p:cNvGrpSpPr/>
         <p:nvPr/>
       </p:nvGrpSpPr>
@@ -32910,7 +36710,7 @@
       </p:grpSpPr>
       <p:sp>
         <p:nvSpPr>
-          <p:cNvPr id="355" name="Google Shape;355;p51"/>
+          <p:cNvPr id="398" name="Google Shape;398;p58"/>
           <p:cNvSpPr txBox="1"/>
           <p:nvPr>
             <p:ph type="title"/>
@@ -32950,7 +36750,7 @@
       </p:sp>
       <p:sp>
         <p:nvSpPr>
-          <p:cNvPr id="356" name="Google Shape;356;p51"/>
+          <p:cNvPr id="399" name="Google Shape;399;p58"/>
           <p:cNvSpPr txBox="1"/>
           <p:nvPr>
             <p:ph idx="12" type="sldNum"/>
@@ -33023,7 +36823,7 @@
       </p:sp>
       <p:pic>
         <p:nvPicPr>
-          <p:cNvPr id="357" name="Google Shape;357;p51"/>
+          <p:cNvPr id="400" name="Google Shape;400;p58"/>
           <p:cNvPicPr preferRelativeResize="0"/>
           <p:nvPr/>
         </p:nvPicPr>
@@ -33037,8 +36837,8 @@
         </p:blipFill>
         <p:spPr>
           <a:xfrm>
-            <a:off x="274320" y="914400"/>
-            <a:ext cx="8595360" cy="3493598"/>
+            <a:off x="0" y="731520"/>
+            <a:ext cx="9144001" cy="3931920"/>
           </a:xfrm>
           <a:prstGeom prst="rect">
             <a:avLst/>
@@ -33062,7 +36862,7 @@
   <p:cSld>
     <p:spTree>
       <p:nvGrpSpPr>
-        <p:cNvPr id="361" name="Shape 361"/>
+        <p:cNvPr id="404" name="Shape 404"/>
         <p:cNvGrpSpPr/>
         <p:nvPr/>
       </p:nvGrpSpPr>
@@ -33076,7 +36876,7 @@
       </p:grpSpPr>
       <p:sp>
         <p:nvSpPr>
-          <p:cNvPr id="362" name="Google Shape;362;p52"/>
+          <p:cNvPr id="405" name="Google Shape;405;p59"/>
           <p:cNvSpPr txBox="1"/>
           <p:nvPr>
             <p:ph type="title"/>
@@ -33116,7 +36916,7 @@
       </p:sp>
       <p:sp>
         <p:nvSpPr>
-          <p:cNvPr id="363" name="Google Shape;363;p52"/>
+          <p:cNvPr id="406" name="Google Shape;406;p59"/>
           <p:cNvSpPr txBox="1"/>
           <p:nvPr>
             <p:ph idx="12" type="sldNum"/>
@@ -33189,7 +36989,7 @@
       </p:sp>
       <p:pic>
         <p:nvPicPr>
-          <p:cNvPr id="364" name="Google Shape;364;p52"/>
+          <p:cNvPr id="407" name="Google Shape;407;p59"/>
           <p:cNvPicPr preferRelativeResize="0"/>
           <p:nvPr/>
         </p:nvPicPr>
@@ -33203,8 +37003,8 @@
         </p:blipFill>
         <p:spPr>
           <a:xfrm>
-            <a:off x="274320" y="914400"/>
-            <a:ext cx="8595360" cy="3493598"/>
+            <a:off x="0" y="731520"/>
+            <a:ext cx="9144001" cy="3931920"/>
           </a:xfrm>
           <a:prstGeom prst="rect">
             <a:avLst/>
@@ -33228,7 +37028,7 @@
   <p:cSld>
     <p:spTree>
       <p:nvGrpSpPr>
-        <p:cNvPr id="368" name="Shape 368"/>
+        <p:cNvPr id="411" name="Shape 411"/>
         <p:cNvGrpSpPr/>
         <p:nvPr/>
       </p:nvGrpSpPr>
@@ -33242,7 +37042,7 @@
       </p:grpSpPr>
       <p:sp>
         <p:nvSpPr>
-          <p:cNvPr id="369" name="Google Shape;369;p53"/>
+          <p:cNvPr id="412" name="Google Shape;412;p60"/>
           <p:cNvSpPr txBox="1"/>
           <p:nvPr>
             <p:ph type="title"/>
@@ -33282,7 +37082,7 @@
       </p:sp>
       <p:sp>
         <p:nvSpPr>
-          <p:cNvPr id="370" name="Google Shape;370;p53"/>
+          <p:cNvPr id="413" name="Google Shape;413;p60"/>
           <p:cNvSpPr txBox="1"/>
           <p:nvPr>
             <p:ph idx="1" type="body"/>
@@ -33372,7 +37172,7 @@
       </p:sp>
       <p:sp>
         <p:nvSpPr>
-          <p:cNvPr id="371" name="Google Shape;371;p53"/>
+          <p:cNvPr id="414" name="Google Shape;414;p60"/>
           <p:cNvSpPr txBox="1"/>
           <p:nvPr>
             <p:ph idx="12" type="sldNum"/>
@@ -33456,7 +37256,7 @@
   <p:cSld>
     <p:spTree>
       <p:nvGrpSpPr>
-        <p:cNvPr id="375" name="Shape 375"/>
+        <p:cNvPr id="418" name="Shape 418"/>
         <p:cNvGrpSpPr/>
         <p:nvPr/>
       </p:nvGrpSpPr>
@@ -33470,7 +37270,7 @@
       </p:grpSpPr>
       <p:sp>
         <p:nvSpPr>
-          <p:cNvPr id="376" name="Google Shape;376;p54"/>
+          <p:cNvPr id="419" name="Google Shape;419;p61"/>
           <p:cNvSpPr txBox="1"/>
           <p:nvPr>
             <p:ph type="title"/>
@@ -33514,7 +37314,7 @@
       </p:sp>
       <p:sp>
         <p:nvSpPr>
-          <p:cNvPr id="377" name="Google Shape;377;p54"/>
+          <p:cNvPr id="420" name="Google Shape;420;p61"/>
           <p:cNvSpPr txBox="1"/>
           <p:nvPr>
             <p:ph idx="1" type="body"/>
@@ -33570,7 +37370,7 @@
       </p:sp>
       <p:sp>
         <p:nvSpPr>
-          <p:cNvPr id="378" name="Google Shape;378;p54"/>
+          <p:cNvPr id="421" name="Google Shape;421;p61"/>
           <p:cNvSpPr txBox="1"/>
           <p:nvPr>
             <p:ph idx="12" type="sldNum"/>
@@ -33654,7 +37454,7 @@
   <p:cSld>
     <p:spTree>
       <p:nvGrpSpPr>
-        <p:cNvPr id="382" name="Shape 382"/>
+        <p:cNvPr id="425" name="Shape 425"/>
         <p:cNvGrpSpPr/>
         <p:nvPr/>
       </p:nvGrpSpPr>
@@ -33668,7 +37468,7 @@
       </p:grpSpPr>
       <p:sp>
         <p:nvSpPr>
-          <p:cNvPr id="383" name="Google Shape;383;p55"/>
+          <p:cNvPr id="426" name="Google Shape;426;p62"/>
           <p:cNvSpPr txBox="1"/>
           <p:nvPr>
             <p:ph type="title"/>
@@ -33719,7 +37519,7 @@
   <p:cSld>
     <p:spTree>
       <p:nvGrpSpPr>
-        <p:cNvPr id="387" name="Shape 387"/>
+        <p:cNvPr id="430" name="Shape 430"/>
         <p:cNvGrpSpPr/>
         <p:nvPr/>
       </p:nvGrpSpPr>
@@ -33733,7 +37533,7 @@
       </p:grpSpPr>
       <p:sp>
         <p:nvSpPr>
-          <p:cNvPr id="388" name="Google Shape;388;p56"/>
+          <p:cNvPr id="431" name="Google Shape;431;p63"/>
           <p:cNvSpPr txBox="1"/>
           <p:nvPr>
             <p:ph type="title"/>
@@ -33773,7 +37573,7 @@
       </p:sp>
       <p:sp>
         <p:nvSpPr>
-          <p:cNvPr id="389" name="Google Shape;389;p56"/>
+          <p:cNvPr id="432" name="Google Shape;432;p63"/>
           <p:cNvSpPr txBox="1"/>
           <p:nvPr>
             <p:ph idx="12" type="sldNum"/>
@@ -33846,7 +37646,7 @@
       </p:sp>
       <p:pic>
         <p:nvPicPr>
-          <p:cNvPr id="390" name="Google Shape;390;p56"/>
+          <p:cNvPr id="433" name="Google Shape;433;p63"/>
           <p:cNvPicPr preferRelativeResize="0"/>
           <p:nvPr/>
         </p:nvPicPr>
@@ -33885,7 +37685,7 @@
   <p:cSld>
     <p:spTree>
       <p:nvGrpSpPr>
-        <p:cNvPr id="75" name="Shape 75"/>
+        <p:cNvPr id="117" name="Shape 117"/>
         <p:cNvGrpSpPr/>
         <p:nvPr/>
       </p:nvGrpSpPr>
@@ -33899,7 +37699,7 @@
       </p:grpSpPr>
       <p:sp>
         <p:nvSpPr>
-          <p:cNvPr id="76" name="Google Shape;76;p12"/>
+          <p:cNvPr id="118" name="Google Shape;118;p19"/>
           <p:cNvSpPr txBox="1"/>
           <p:nvPr>
             <p:ph type="title"/>
@@ -33939,7 +37739,7 @@
       </p:sp>
       <p:sp>
         <p:nvSpPr>
-          <p:cNvPr id="77" name="Google Shape;77;p12"/>
+          <p:cNvPr id="119" name="Google Shape;119;p19"/>
           <p:cNvSpPr txBox="1"/>
           <p:nvPr>
             <p:ph idx="1" type="body"/>
@@ -34037,7 +37837,7 @@
       </p:sp>
       <p:sp>
         <p:nvSpPr>
-          <p:cNvPr id="78" name="Google Shape;78;p12"/>
+          <p:cNvPr id="120" name="Google Shape;120;p19"/>
           <p:cNvSpPr txBox="1"/>
           <p:nvPr>
             <p:ph idx="12" type="sldNum"/>
@@ -34110,7 +37910,7 @@
       </p:sp>
       <p:sp>
         <p:nvSpPr>
-          <p:cNvPr id="79" name="Google Shape;79;p12"/>
+          <p:cNvPr id="121" name="Google Shape;121;p19"/>
           <p:cNvSpPr txBox="1"/>
           <p:nvPr/>
         </p:nvSpPr>
@@ -34163,7 +37963,7 @@
   <p:cSld>
     <p:spTree>
       <p:nvGrpSpPr>
-        <p:cNvPr id="394" name="Shape 394"/>
+        <p:cNvPr id="437" name="Shape 437"/>
         <p:cNvGrpSpPr/>
         <p:nvPr/>
       </p:nvGrpSpPr>
@@ -34177,7 +37977,7 @@
       </p:grpSpPr>
       <p:sp>
         <p:nvSpPr>
-          <p:cNvPr id="395" name="Google Shape;395;p57"/>
+          <p:cNvPr id="438" name="Google Shape;438;p64"/>
           <p:cNvSpPr txBox="1"/>
           <p:nvPr>
             <p:ph type="title"/>
@@ -34217,7 +38017,7 @@
       </p:sp>
       <p:sp>
         <p:nvSpPr>
-          <p:cNvPr id="396" name="Google Shape;396;p57"/>
+          <p:cNvPr id="439" name="Google Shape;439;p64"/>
           <p:cNvSpPr txBox="1"/>
           <p:nvPr>
             <p:ph idx="1" type="body"/>
@@ -34348,7 +38148,7 @@
       </p:sp>
       <p:sp>
         <p:nvSpPr>
-          <p:cNvPr id="397" name="Google Shape;397;p57"/>
+          <p:cNvPr id="440" name="Google Shape;440;p64"/>
           <p:cNvSpPr txBox="1"/>
           <p:nvPr>
             <p:ph idx="12" type="sldNum"/>
@@ -34432,7 +38232,7 @@
   <p:cSld>
     <p:spTree>
       <p:nvGrpSpPr>
-        <p:cNvPr id="401" name="Shape 401"/>
+        <p:cNvPr id="444" name="Shape 444"/>
         <p:cNvGrpSpPr/>
         <p:nvPr/>
       </p:nvGrpSpPr>
@@ -34446,7 +38246,7 @@
       </p:grpSpPr>
       <p:sp>
         <p:nvSpPr>
-          <p:cNvPr id="402" name="Google Shape;402;p58"/>
+          <p:cNvPr id="445" name="Google Shape;445;p65"/>
           <p:cNvSpPr txBox="1"/>
           <p:nvPr>
             <p:ph type="title"/>
@@ -34486,7 +38286,7 @@
       </p:sp>
       <p:sp>
         <p:nvSpPr>
-          <p:cNvPr id="403" name="Google Shape;403;p58"/>
+          <p:cNvPr id="446" name="Google Shape;446;p65"/>
           <p:cNvSpPr txBox="1"/>
           <p:nvPr>
             <p:ph idx="1" type="body"/>
@@ -34518,7 +38318,7 @@
             </a:pPr>
             <a:r>
               <a:rPr lang="en"/>
-              <a:t>There are three main decisions with associated definitions of done</a:t>
+              <a:t>There are three main release decisions, each with associated definitions of done</a:t>
             </a:r>
             <a:endParaRPr/>
           </a:p>
@@ -34569,7 +38369,7 @@
             </a:pPr>
             <a:r>
               <a:rPr lang="en"/>
-              <a:t>Project release</a:t>
+              <a:t>Project or product release</a:t>
             </a:r>
             <a:endParaRPr/>
           </a:p>
@@ -34643,7 +38443,7 @@
       </p:sp>
       <p:sp>
         <p:nvSpPr>
-          <p:cNvPr id="404" name="Google Shape;404;p58"/>
+          <p:cNvPr id="447" name="Google Shape;447;p65"/>
           <p:cNvSpPr txBox="1"/>
           <p:nvPr>
             <p:ph idx="12" type="sldNum"/>
@@ -34727,7 +38527,7 @@
   <p:cSld>
     <p:spTree>
       <p:nvGrpSpPr>
-        <p:cNvPr id="408" name="Shape 408"/>
+        <p:cNvPr id="451" name="Shape 451"/>
         <p:cNvGrpSpPr/>
         <p:nvPr/>
       </p:nvGrpSpPr>
@@ -34741,7 +38541,7 @@
       </p:grpSpPr>
       <p:sp>
         <p:nvSpPr>
-          <p:cNvPr id="409" name="Google Shape;409;p59"/>
+          <p:cNvPr id="452" name="Google Shape;452;p66"/>
           <p:cNvSpPr txBox="1"/>
           <p:nvPr>
             <p:ph type="title"/>
@@ -34781,7 +38581,7 @@
       </p:sp>
       <p:sp>
         <p:nvSpPr>
-          <p:cNvPr id="410" name="Google Shape;410;p59"/>
+          <p:cNvPr id="453" name="Google Shape;453;p66"/>
           <p:cNvSpPr txBox="1"/>
           <p:nvPr>
             <p:ph idx="1" type="body"/>
@@ -34873,7 +38673,7 @@
       </p:sp>
       <p:sp>
         <p:nvSpPr>
-          <p:cNvPr id="411" name="Google Shape;411;p59"/>
+          <p:cNvPr id="454" name="Google Shape;454;p66"/>
           <p:cNvSpPr txBox="1"/>
           <p:nvPr>
             <p:ph idx="12" type="sldNum"/>
@@ -34957,7 +38757,7 @@
   <p:cSld>
     <p:spTree>
       <p:nvGrpSpPr>
-        <p:cNvPr id="415" name="Shape 415"/>
+        <p:cNvPr id="458" name="Shape 458"/>
         <p:cNvGrpSpPr/>
         <p:nvPr/>
       </p:nvGrpSpPr>
@@ -34971,7 +38771,7 @@
       </p:grpSpPr>
       <p:sp>
         <p:nvSpPr>
-          <p:cNvPr id="416" name="Google Shape;416;p60"/>
+          <p:cNvPr id="459" name="Google Shape;459;p67"/>
           <p:cNvSpPr txBox="1"/>
           <p:nvPr>
             <p:ph type="title"/>
@@ -35011,7 +38811,7 @@
       </p:sp>
       <p:sp>
         <p:nvSpPr>
-          <p:cNvPr id="417" name="Google Shape;417;p60"/>
+          <p:cNvPr id="460" name="Google Shape;460;p67"/>
           <p:cNvSpPr txBox="1"/>
           <p:nvPr>
             <p:ph idx="1" type="body"/>
@@ -35118,7 +38918,7 @@
       </p:sp>
       <p:sp>
         <p:nvSpPr>
-          <p:cNvPr id="418" name="Google Shape;418;p60"/>
+          <p:cNvPr id="461" name="Google Shape;461;p67"/>
           <p:cNvSpPr txBox="1"/>
           <p:nvPr>
             <p:ph idx="12" type="sldNum"/>
@@ -35202,7 +39002,7 @@
   <p:cSld>
     <p:spTree>
       <p:nvGrpSpPr>
-        <p:cNvPr id="422" name="Shape 422"/>
+        <p:cNvPr id="465" name="Shape 465"/>
         <p:cNvGrpSpPr/>
         <p:nvPr/>
       </p:nvGrpSpPr>
@@ -35216,7 +39016,7 @@
       </p:grpSpPr>
       <p:sp>
         <p:nvSpPr>
-          <p:cNvPr id="423" name="Google Shape;423;p61"/>
+          <p:cNvPr id="466" name="Google Shape;466;p68"/>
           <p:cNvSpPr txBox="1"/>
           <p:nvPr>
             <p:ph type="title"/>
@@ -35256,7 +39056,7 @@
       </p:sp>
       <p:sp>
         <p:nvSpPr>
-          <p:cNvPr id="424" name="Google Shape;424;p61"/>
+          <p:cNvPr id="467" name="Google Shape;467;p68"/>
           <p:cNvSpPr txBox="1"/>
           <p:nvPr>
             <p:ph idx="1" type="body"/>
@@ -35352,7 +39152,7 @@
       </p:sp>
       <p:sp>
         <p:nvSpPr>
-          <p:cNvPr id="425" name="Google Shape;425;p61"/>
+          <p:cNvPr id="468" name="Google Shape;468;p68"/>
           <p:cNvSpPr txBox="1"/>
           <p:nvPr>
             <p:ph idx="12" type="sldNum"/>
@@ -35436,7 +39236,7 @@
   <p:cSld>
     <p:spTree>
       <p:nvGrpSpPr>
-        <p:cNvPr id="429" name="Shape 429"/>
+        <p:cNvPr id="472" name="Shape 472"/>
         <p:cNvGrpSpPr/>
         <p:nvPr/>
       </p:nvGrpSpPr>
@@ -35450,7 +39250,7 @@
       </p:grpSpPr>
       <p:sp>
         <p:nvSpPr>
-          <p:cNvPr id="430" name="Google Shape;430;p62"/>
+          <p:cNvPr id="473" name="Google Shape;473;p69"/>
           <p:cNvSpPr txBox="1"/>
           <p:nvPr>
             <p:ph type="title"/>
@@ -35490,7 +39290,7 @@
       </p:sp>
       <p:sp>
         <p:nvSpPr>
-          <p:cNvPr id="431" name="Google Shape;431;p62"/>
+          <p:cNvPr id="474" name="Google Shape;474;p69"/>
           <p:cNvSpPr txBox="1"/>
           <p:nvPr>
             <p:ph idx="1" type="body"/>
@@ -35546,7 +39346,7 @@
       </p:sp>
       <p:sp>
         <p:nvSpPr>
-          <p:cNvPr id="432" name="Google Shape;432;p62"/>
+          <p:cNvPr id="475" name="Google Shape;475;p69"/>
           <p:cNvSpPr txBox="1"/>
           <p:nvPr>
             <p:ph idx="12" type="sldNum"/>
@@ -35630,7 +39430,7 @@
   <p:cSld>
     <p:spTree>
       <p:nvGrpSpPr>
-        <p:cNvPr id="436" name="Shape 436"/>
+        <p:cNvPr id="479" name="Shape 479"/>
         <p:cNvGrpSpPr/>
         <p:nvPr/>
       </p:nvGrpSpPr>
@@ -35644,7 +39444,7 @@
       </p:grpSpPr>
       <p:sp>
         <p:nvSpPr>
-          <p:cNvPr id="437" name="Google Shape;437;p63"/>
+          <p:cNvPr id="480" name="Google Shape;480;p70"/>
           <p:cNvSpPr txBox="1"/>
           <p:nvPr>
             <p:ph type="title"/>
@@ -35695,7 +39495,7 @@
   <p:cSld>
     <p:spTree>
       <p:nvGrpSpPr>
-        <p:cNvPr id="441" name="Shape 441"/>
+        <p:cNvPr id="484" name="Shape 484"/>
         <p:cNvGrpSpPr/>
         <p:nvPr/>
       </p:nvGrpSpPr>
@@ -35709,7 +39509,7 @@
       </p:grpSpPr>
       <p:sp>
         <p:nvSpPr>
-          <p:cNvPr id="442" name="Google Shape;442;p64"/>
+          <p:cNvPr id="485" name="Google Shape;485;p71"/>
           <p:cNvSpPr txBox="1"/>
           <p:nvPr>
             <p:ph type="title"/>
@@ -35749,7 +39549,7 @@
       </p:sp>
       <p:sp>
         <p:nvSpPr>
-          <p:cNvPr id="443" name="Google Shape;443;p64"/>
+          <p:cNvPr id="486" name="Google Shape;486;p71"/>
           <p:cNvSpPr txBox="1"/>
           <p:nvPr>
             <p:ph idx="12" type="sldNum"/>
@@ -35822,7 +39622,7 @@
       </p:sp>
       <p:pic>
         <p:nvPicPr>
-          <p:cNvPr id="444" name="Google Shape;444;p64"/>
+          <p:cNvPr id="487" name="Google Shape;487;p71"/>
           <p:cNvPicPr preferRelativeResize="0"/>
           <p:nvPr/>
         </p:nvPicPr>
@@ -35836,8 +39636,8 @@
         </p:blipFill>
         <p:spPr>
           <a:xfrm>
-            <a:off x="274320" y="914400"/>
-            <a:ext cx="8595360" cy="3495446"/>
+            <a:off x="0" y="731520"/>
+            <a:ext cx="9144001" cy="3931920"/>
           </a:xfrm>
           <a:prstGeom prst="rect">
             <a:avLst/>
@@ -35861,7 +39661,7 @@
   <p:cSld>
     <p:spTree>
       <p:nvGrpSpPr>
-        <p:cNvPr id="448" name="Shape 448"/>
+        <p:cNvPr id="491" name="Shape 491"/>
         <p:cNvGrpSpPr/>
         <p:nvPr/>
       </p:nvGrpSpPr>
@@ -35875,7 +39675,7 @@
       </p:grpSpPr>
       <p:sp>
         <p:nvSpPr>
-          <p:cNvPr id="449" name="Google Shape;449;p65"/>
+          <p:cNvPr id="492" name="Google Shape;492;p72"/>
           <p:cNvSpPr txBox="1"/>
           <p:nvPr>
             <p:ph type="title"/>
@@ -35915,7 +39715,7 @@
       </p:sp>
       <p:sp>
         <p:nvSpPr>
-          <p:cNvPr id="450" name="Google Shape;450;p65"/>
+          <p:cNvPr id="493" name="Google Shape;493;p72"/>
           <p:cNvSpPr txBox="1"/>
           <p:nvPr>
             <p:ph idx="12" type="sldNum"/>
@@ -35988,7 +39788,7 @@
       </p:sp>
       <p:graphicFrame>
         <p:nvGraphicFramePr>
-          <p:cNvPr id="451" name="Google Shape;451;p65"/>
+          <p:cNvPr id="494" name="Google Shape;494;p72"/>
           <p:cNvGraphicFramePr/>
           <p:nvPr/>
         </p:nvGraphicFramePr>
@@ -36001,7 +39801,7 @@
             <a:tbl>
               <a:tblPr>
                 <a:noFill/>
-                <a:tableStyleId>{C8642286-7339-4B29-B360-2DF6F540B912}</a:tableStyleId>
+                <a:tableStyleId>{06765188-D505-4E99-84A0-020E74BA5E39}</a:tableStyleId>
               </a:tblPr>
               <a:tblGrid>
                 <a:gridCol w="1719075"/>
@@ -37410,7 +41210,7 @@
   <p:cSld>
     <p:spTree>
       <p:nvGrpSpPr>
-        <p:cNvPr id="455" name="Shape 455"/>
+        <p:cNvPr id="498" name="Shape 498"/>
         <p:cNvGrpSpPr/>
         <p:nvPr/>
       </p:nvGrpSpPr>
@@ -37424,7 +41224,7 @@
       </p:grpSpPr>
       <p:sp>
         <p:nvSpPr>
-          <p:cNvPr id="456" name="Google Shape;456;p66"/>
+          <p:cNvPr id="499" name="Google Shape;499;p73"/>
           <p:cNvSpPr txBox="1"/>
           <p:nvPr>
             <p:ph type="title"/>
@@ -37464,7 +41264,7 @@
       </p:sp>
       <p:sp>
         <p:nvSpPr>
-          <p:cNvPr id="457" name="Google Shape;457;p66"/>
+          <p:cNvPr id="500" name="Google Shape;500;p73"/>
           <p:cNvSpPr txBox="1"/>
           <p:nvPr>
             <p:ph idx="12" type="sldNum"/>
@@ -37537,7 +41337,7 @@
       </p:sp>
       <p:pic>
         <p:nvPicPr>
-          <p:cNvPr id="458" name="Google Shape;458;p66"/>
+          <p:cNvPr id="501" name="Google Shape;501;p73"/>
           <p:cNvPicPr preferRelativeResize="0"/>
           <p:nvPr/>
         </p:nvPicPr>
@@ -37551,8 +41351,8 @@
         </p:blipFill>
         <p:spPr>
           <a:xfrm>
-            <a:off x="274320" y="914400"/>
-            <a:ext cx="8595360" cy="3493598"/>
+            <a:off x="0" y="731520"/>
+            <a:ext cx="9144001" cy="3931920"/>
           </a:xfrm>
           <a:prstGeom prst="rect">
             <a:avLst/>
@@ -37576,7 +41376,7 @@
   <p:cSld>
     <p:spTree>
       <p:nvGrpSpPr>
-        <p:cNvPr id="83" name="Shape 83"/>
+        <p:cNvPr id="125" name="Shape 125"/>
         <p:cNvGrpSpPr/>
         <p:nvPr/>
       </p:nvGrpSpPr>
@@ -37590,7 +41390,7 @@
       </p:grpSpPr>
       <p:sp>
         <p:nvSpPr>
-          <p:cNvPr id="84" name="Google Shape;84;p13"/>
+          <p:cNvPr id="126" name="Google Shape;126;p20"/>
           <p:cNvSpPr txBox="1"/>
           <p:nvPr>
             <p:ph type="title"/>
@@ -37630,7 +41430,7 @@
       </p:sp>
       <p:sp>
         <p:nvSpPr>
-          <p:cNvPr id="85" name="Google Shape;85;p13"/>
+          <p:cNvPr id="127" name="Google Shape;127;p20"/>
           <p:cNvSpPr txBox="1"/>
           <p:nvPr>
             <p:ph idx="12" type="sldNum"/>
@@ -37703,7 +41503,7 @@
       </p:sp>
       <p:sp>
         <p:nvSpPr>
-          <p:cNvPr id="86" name="Google Shape;86;p13"/>
+          <p:cNvPr id="128" name="Google Shape;128;p20"/>
           <p:cNvSpPr txBox="1"/>
           <p:nvPr>
             <p:ph idx="1" type="body"/>
@@ -37801,7 +41601,7 @@
       </p:sp>
       <p:sp>
         <p:nvSpPr>
-          <p:cNvPr id="87" name="Google Shape;87;p13"/>
+          <p:cNvPr id="129" name="Google Shape;129;p20"/>
           <p:cNvSpPr txBox="1"/>
           <p:nvPr/>
         </p:nvSpPr>
@@ -37856,7 +41656,7 @@
   <p:cSld>
     <p:spTree>
       <p:nvGrpSpPr>
-        <p:cNvPr id="462" name="Shape 462"/>
+        <p:cNvPr id="505" name="Shape 505"/>
         <p:cNvGrpSpPr/>
         <p:nvPr/>
       </p:nvGrpSpPr>
@@ -37870,7 +41670,7 @@
       </p:grpSpPr>
       <p:sp>
         <p:nvSpPr>
-          <p:cNvPr id="463" name="Google Shape;463;p67"/>
+          <p:cNvPr id="506" name="Google Shape;506;p74"/>
           <p:cNvSpPr txBox="1"/>
           <p:nvPr>
             <p:ph type="title"/>
@@ -37910,7 +41710,7 @@
       </p:sp>
       <p:sp>
         <p:nvSpPr>
-          <p:cNvPr id="464" name="Google Shape;464;p67"/>
+          <p:cNvPr id="507" name="Google Shape;507;p74"/>
           <p:cNvSpPr txBox="1"/>
           <p:nvPr>
             <p:ph idx="1" type="body"/>
@@ -38068,7 +41868,7 @@
       </p:sp>
       <p:sp>
         <p:nvSpPr>
-          <p:cNvPr id="465" name="Google Shape;465;p67"/>
+          <p:cNvPr id="508" name="Google Shape;508;p74"/>
           <p:cNvSpPr txBox="1"/>
           <p:nvPr>
             <p:ph idx="12" type="sldNum"/>
@@ -38152,7 +41952,7 @@
   <p:cSld>
     <p:spTree>
       <p:nvGrpSpPr>
-        <p:cNvPr id="469" name="Shape 469"/>
+        <p:cNvPr id="512" name="Shape 512"/>
         <p:cNvGrpSpPr/>
         <p:nvPr/>
       </p:nvGrpSpPr>
@@ -38166,7 +41966,7 @@
       </p:grpSpPr>
       <p:sp>
         <p:nvSpPr>
-          <p:cNvPr id="470" name="Google Shape;470;p68"/>
+          <p:cNvPr id="513" name="Google Shape;513;p75"/>
           <p:cNvSpPr txBox="1"/>
           <p:nvPr>
             <p:ph type="ctrTitle"/>
@@ -38206,7 +42006,7 @@
       </p:sp>
       <p:sp>
         <p:nvSpPr>
-          <p:cNvPr id="471" name="Google Shape;471;p68"/>
+          <p:cNvPr id="514" name="Google Shape;514;p75"/>
           <p:cNvSpPr txBox="1"/>
           <p:nvPr>
             <p:ph idx="1" type="subTitle"/>
@@ -38336,7 +42136,7 @@
   <p:cSld>
     <p:spTree>
       <p:nvGrpSpPr>
-        <p:cNvPr id="475" name="Shape 475"/>
+        <p:cNvPr id="518" name="Shape 518"/>
         <p:cNvGrpSpPr/>
         <p:nvPr/>
       </p:nvGrpSpPr>
@@ -38350,7 +42150,7 @@
       </p:grpSpPr>
       <p:sp>
         <p:nvSpPr>
-          <p:cNvPr id="476" name="Google Shape;476;p69"/>
+          <p:cNvPr id="519" name="Google Shape;519;p76"/>
           <p:cNvSpPr txBox="1"/>
           <p:nvPr>
             <p:ph type="title"/>
@@ -38390,7 +42190,7 @@
       </p:sp>
       <p:sp>
         <p:nvSpPr>
-          <p:cNvPr id="477" name="Google Shape;477;p69"/>
+          <p:cNvPr id="520" name="Google Shape;520;p76"/>
           <p:cNvSpPr txBox="1"/>
           <p:nvPr>
             <p:ph idx="12" type="sldNum"/>
@@ -38463,7 +42263,7 @@
       </p:sp>
       <p:sp>
         <p:nvSpPr>
-          <p:cNvPr id="478" name="Google Shape;478;p69"/>
+          <p:cNvPr id="521" name="Google Shape;521;p76"/>
           <p:cNvSpPr txBox="1"/>
           <p:nvPr>
             <p:ph idx="1" type="body"/>
@@ -38558,7 +42358,7 @@
             </a:pPr>
             <a:r>
               <a:rPr lang="en"/>
-              <a:t>© Copyright 2009-2025 Dirk Riehle, some rights reserved</a:t>
+              <a:t>© Copyright 2009-2026 Dirk Riehle, some rights reserved</a:t>
             </a:r>
             <a:endParaRPr/>
           </a:p>
@@ -38592,7 +42392,7 @@
   <p:cSld>
     <p:spTree>
       <p:nvGrpSpPr>
-        <p:cNvPr id="91" name="Shape 91"/>
+        <p:cNvPr id="133" name="Shape 133"/>
         <p:cNvGrpSpPr/>
         <p:nvPr/>
       </p:nvGrpSpPr>
@@ -38606,7 +42406,7 @@
       </p:grpSpPr>
       <p:sp>
         <p:nvSpPr>
-          <p:cNvPr id="92" name="Google Shape;92;p14"/>
+          <p:cNvPr id="134" name="Google Shape;134;p21"/>
           <p:cNvSpPr txBox="1"/>
           <p:nvPr>
             <p:ph idx="1" type="body"/>
@@ -38671,7 +42471,7 @@
       </p:sp>
       <p:sp>
         <p:nvSpPr>
-          <p:cNvPr id="93" name="Google Shape;93;p14"/>
+          <p:cNvPr id="135" name="Google Shape;135;p21"/>
           <p:cNvSpPr txBox="1"/>
           <p:nvPr>
             <p:ph type="title"/>
@@ -38711,7 +42511,7 @@
       </p:sp>
       <p:sp>
         <p:nvSpPr>
-          <p:cNvPr id="94" name="Google Shape;94;p14"/>
+          <p:cNvPr id="136" name="Google Shape;136;p21"/>
           <p:cNvSpPr txBox="1"/>
           <p:nvPr>
             <p:ph idx="12" type="sldNum"/>
@@ -38784,7 +42584,7 @@
       </p:sp>
       <p:sp>
         <p:nvSpPr>
-          <p:cNvPr id="95" name="Google Shape;95;p14"/>
+          <p:cNvPr id="137" name="Google Shape;137;p21"/>
           <p:cNvSpPr txBox="1"/>
           <p:nvPr/>
         </p:nvSpPr>
@@ -38839,7 +42639,7 @@
   <p:cSld>
     <p:spTree>
       <p:nvGrpSpPr>
-        <p:cNvPr id="99" name="Shape 99"/>
+        <p:cNvPr id="141" name="Shape 141"/>
         <p:cNvGrpSpPr/>
         <p:nvPr/>
       </p:nvGrpSpPr>
@@ -38853,7 +42653,7 @@
       </p:grpSpPr>
       <p:sp>
         <p:nvSpPr>
-          <p:cNvPr id="100" name="Google Shape;100;p15"/>
+          <p:cNvPr id="142" name="Google Shape;142;p22"/>
           <p:cNvSpPr txBox="1"/>
           <p:nvPr>
             <p:ph type="title"/>
@@ -38893,7 +42693,7 @@
       </p:sp>
       <p:sp>
         <p:nvSpPr>
-          <p:cNvPr id="101" name="Google Shape;101;p15"/>
+          <p:cNvPr id="143" name="Google Shape;143;p22"/>
           <p:cNvSpPr txBox="1"/>
           <p:nvPr>
             <p:ph idx="1" type="body"/>
@@ -38949,7 +42749,7 @@
       </p:sp>
       <p:sp>
         <p:nvSpPr>
-          <p:cNvPr id="102" name="Google Shape;102;p15"/>
+          <p:cNvPr id="144" name="Google Shape;144;p22"/>
           <p:cNvSpPr txBox="1"/>
           <p:nvPr>
             <p:ph idx="12" type="sldNum"/>
@@ -39033,7 +42833,7 @@
   <p:cSld>
     <p:spTree>
       <p:nvGrpSpPr>
-        <p:cNvPr id="106" name="Shape 106"/>
+        <p:cNvPr id="148" name="Shape 148"/>
         <p:cNvGrpSpPr/>
         <p:nvPr/>
       </p:nvGrpSpPr>
@@ -39047,7 +42847,7 @@
       </p:grpSpPr>
       <p:sp>
         <p:nvSpPr>
-          <p:cNvPr id="107" name="Google Shape;107;p16"/>
+          <p:cNvPr id="149" name="Google Shape;149;p23"/>
           <p:cNvSpPr txBox="1"/>
           <p:nvPr>
             <p:ph type="title"/>
@@ -39087,7 +42887,7 @@
       </p:sp>
       <p:sp>
         <p:nvSpPr>
-          <p:cNvPr id="108" name="Google Shape;108;p16"/>
+          <p:cNvPr id="150" name="Google Shape;150;p23"/>
           <p:cNvSpPr txBox="1"/>
           <p:nvPr>
             <p:ph idx="12" type="sldNum"/>
@@ -39160,7 +42960,7 @@
       </p:sp>
       <p:pic>
         <p:nvPicPr>
-          <p:cNvPr id="109" name="Google Shape;109;p16"/>
+          <p:cNvPr id="151" name="Google Shape;151;p23"/>
           <p:cNvPicPr preferRelativeResize="0"/>
           <p:nvPr/>
         </p:nvPicPr>
@@ -39174,8 +42974,8 @@
         </p:blipFill>
         <p:spPr>
           <a:xfrm>
-            <a:off x="274320" y="914400"/>
-            <a:ext cx="8595360" cy="3495446"/>
+            <a:off x="0" y="731520"/>
+            <a:ext cx="9144001" cy="3931920"/>
           </a:xfrm>
           <a:prstGeom prst="rect">
             <a:avLst/>
@@ -39195,6 +42995,285 @@
 </file>
 
 <file path=ppt/theme/theme1.xml><?xml version="1.0" encoding="utf-8"?>
+<a:theme xmlns:a="http://schemas.openxmlformats.org/drawingml/2006/main" xmlns:r="http://schemas.openxmlformats.org/officeDocument/2006/relationships" name="AMOS Slides Template">
+  <a:themeElements>
+    <a:clrScheme name="Simple Light">
+      <a:dk1>
+        <a:srgbClr val="000000"/>
+      </a:dk1>
+      <a:lt1>
+        <a:srgbClr val="FFFFFF"/>
+      </a:lt1>
+      <a:dk2>
+        <a:srgbClr val="404040"/>
+      </a:dk2>
+      <a:lt2>
+        <a:srgbClr val="808080"/>
+      </a:lt2>
+      <a:accent1>
+        <a:srgbClr val="D0D0D0"/>
+      </a:accent1>
+      <a:accent2>
+        <a:srgbClr val="4169E1"/>
+      </a:accent2>
+      <a:accent3>
+        <a:srgbClr val="4CAF50"/>
+      </a:accent3>
+      <a:accent4>
+        <a:srgbClr val="FEB612"/>
+      </a:accent4>
+      <a:accent5>
+        <a:srgbClr val="F36838"/>
+      </a:accent5>
+      <a:accent6>
+        <a:srgbClr val="8E44AD"/>
+      </a:accent6>
+      <a:hlink>
+        <a:srgbClr val="1E90FF"/>
+      </a:hlink>
+      <a:folHlink>
+        <a:srgbClr val="0097A7"/>
+      </a:folHlink>
+    </a:clrScheme>
+    <a:fontScheme name="Office">
+      <a:majorFont>
+        <a:latin typeface="Arial"/>
+        <a:ea typeface=""/>
+        <a:cs typeface=""/>
+        <a:font script="Jpan" typeface="ＭＳ Ｐゴシック"/>
+        <a:font script="Hang" typeface="맑은 고딕"/>
+        <a:font script="Hans" typeface="宋体"/>
+        <a:font script="Hant" typeface="新細明體"/>
+        <a:font script="Arab" typeface="Times New Roman"/>
+        <a:font script="Hebr" typeface="Times New Roman"/>
+        <a:font script="Thai" typeface="Angsana New"/>
+        <a:font script="Ethi" typeface="Nyala"/>
+        <a:font script="Beng" typeface="Vrinda"/>
+        <a:font script="Gujr" typeface="Shruti"/>
+        <a:font script="Khmr" typeface="MoolBoran"/>
+        <a:font script="Knda" typeface="Tunga"/>
+        <a:font script="Guru" typeface="Raavi"/>
+        <a:font script="Cans" typeface="Euphemia"/>
+        <a:font script="Cher" typeface="Plantagenet Cherokee"/>
+        <a:font script="Yiii" typeface="Microsoft Yi Baiti"/>
+        <a:font script="Tibt" typeface="Microsoft Himalaya"/>
+        <a:font script="Thaa" typeface="MV Boli"/>
+        <a:font script="Deva" typeface="Mangal"/>
+        <a:font script="Telu" typeface="Gautami"/>
+        <a:font script="Taml" typeface="Latha"/>
+        <a:font script="Syrc" typeface="Estrangelo Edessa"/>
+        <a:font script="Orya" typeface="Kalinga"/>
+        <a:font script="Mlym" typeface="Kartika"/>
+        <a:font script="Laoo" typeface="DokChampa"/>
+        <a:font script="Sinh" typeface="Iskoola Pota"/>
+        <a:font script="Mong" typeface="Mongolian Baiti"/>
+        <a:font script="Viet" typeface="Times New Roman"/>
+        <a:font script="Uigh" typeface="Microsoft Uighur"/>
+        <a:font script="Geor" typeface="Sylfaen"/>
+      </a:majorFont>
+      <a:minorFont>
+        <a:latin typeface="Arial"/>
+        <a:ea typeface=""/>
+        <a:cs typeface=""/>
+        <a:font script="Jpan" typeface="ＭＳ Ｐゴシック"/>
+        <a:font script="Hang" typeface="맑은 고딕"/>
+        <a:font script="Hans" typeface="宋体"/>
+        <a:font script="Hant" typeface="新細明體"/>
+        <a:font script="Arab" typeface="Arial"/>
+        <a:font script="Hebr" typeface="Arial"/>
+        <a:font script="Thai" typeface="Cordia New"/>
+        <a:font script="Ethi" typeface="Nyala"/>
+        <a:font script="Beng" typeface="Vrinda"/>
+        <a:font script="Gujr" typeface="Shruti"/>
+        <a:font script="Khmr" typeface="DaunPenh"/>
+        <a:font script="Knda" typeface="Tunga"/>
+        <a:font script="Guru" typeface="Raavi"/>
+        <a:font script="Cans" typeface="Euphemia"/>
+        <a:font script="Cher" typeface="Plantagenet Cherokee"/>
+        <a:font script="Yiii" typeface="Microsoft Yi Baiti"/>
+        <a:font script="Tibt" typeface="Microsoft Himalaya"/>
+        <a:font script="Thaa" typeface="MV Boli"/>
+        <a:font script="Deva" typeface="Mangal"/>
+        <a:font script="Telu" typeface="Gautami"/>
+        <a:font script="Taml" typeface="Latha"/>
+        <a:font script="Syrc" typeface="Estrangelo Edessa"/>
+        <a:font script="Orya" typeface="Kalinga"/>
+        <a:font script="Mlym" typeface="Kartika"/>
+        <a:font script="Laoo" typeface="DokChampa"/>
+        <a:font script="Sinh" typeface="Iskoola Pota"/>
+        <a:font script="Mong" typeface="Mongolian Baiti"/>
+        <a:font script="Viet" typeface="Arial"/>
+        <a:font script="Uigh" typeface="Microsoft Uighur"/>
+        <a:font script="Geor" typeface="Sylfaen"/>
+      </a:minorFont>
+    </a:fontScheme>
+    <a:fmtScheme name="Office">
+      <a:fillStyleLst>
+        <a:solidFill>
+          <a:schemeClr val="phClr"/>
+        </a:solidFill>
+        <a:gradFill rotWithShape="1">
+          <a:gsLst>
+            <a:gs pos="0">
+              <a:schemeClr val="phClr">
+                <a:tint val="50000"/>
+                <a:satMod val="300000"/>
+              </a:schemeClr>
+            </a:gs>
+            <a:gs pos="35000">
+              <a:schemeClr val="phClr">
+                <a:tint val="37000"/>
+                <a:satMod val="300000"/>
+              </a:schemeClr>
+            </a:gs>
+            <a:gs pos="100000">
+              <a:schemeClr val="phClr">
+                <a:tint val="15000"/>
+                <a:satMod val="350000"/>
+              </a:schemeClr>
+            </a:gs>
+          </a:gsLst>
+          <a:lin ang="16200000" scaled="1"/>
+        </a:gradFill>
+        <a:gradFill rotWithShape="1">
+          <a:gsLst>
+            <a:gs pos="0">
+              <a:schemeClr val="phClr">
+                <a:tint val="100000"/>
+                <a:shade val="100000"/>
+                <a:satMod val="130000"/>
+              </a:schemeClr>
+            </a:gs>
+            <a:gs pos="100000">
+              <a:schemeClr val="phClr">
+                <a:tint val="50000"/>
+                <a:shade val="100000"/>
+                <a:satMod val="350000"/>
+              </a:schemeClr>
+            </a:gs>
+          </a:gsLst>
+          <a:lin ang="16200000" scaled="0"/>
+        </a:gradFill>
+      </a:fillStyleLst>
+      <a:lnStyleLst>
+        <a:ln w="9525" cap="flat" cmpd="sng" algn="ctr">
+          <a:solidFill>
+            <a:schemeClr val="phClr">
+              <a:shade val="95000"/>
+              <a:satMod val="105000"/>
+            </a:schemeClr>
+          </a:solidFill>
+          <a:prstDash val="solid"/>
+        </a:ln>
+        <a:ln w="25400" cap="flat" cmpd="sng" algn="ctr">
+          <a:solidFill>
+            <a:schemeClr val="phClr"/>
+          </a:solidFill>
+          <a:prstDash val="solid"/>
+        </a:ln>
+        <a:ln w="38100" cap="flat" cmpd="sng" algn="ctr">
+          <a:solidFill>
+            <a:schemeClr val="phClr"/>
+          </a:solidFill>
+          <a:prstDash val="solid"/>
+        </a:ln>
+      </a:lnStyleLst>
+      <a:effectStyleLst>
+        <a:effectStyle>
+          <a:effectLst>
+            <a:outerShdw blurRad="40000" dist="20000" dir="5400000" rotWithShape="0">
+              <a:srgbClr val="000000">
+                <a:alpha val="38000"/>
+              </a:srgbClr>
+            </a:outerShdw>
+          </a:effectLst>
+        </a:effectStyle>
+        <a:effectStyle>
+          <a:effectLst>
+            <a:outerShdw blurRad="40000" dist="23000" dir="5400000" rotWithShape="0">
+              <a:srgbClr val="000000">
+                <a:alpha val="35000"/>
+              </a:srgbClr>
+            </a:outerShdw>
+          </a:effectLst>
+        </a:effectStyle>
+        <a:effectStyle>
+          <a:effectLst>
+            <a:outerShdw blurRad="40000" dist="23000" dir="5400000" rotWithShape="0">
+              <a:srgbClr val="000000">
+                <a:alpha val="35000"/>
+              </a:srgbClr>
+            </a:outerShdw>
+          </a:effectLst>
+          <a:scene3d>
+            <a:camera prst="orthographicFront">
+              <a:rot lat="0" lon="0" rev="0"/>
+            </a:camera>
+            <a:lightRig rig="threePt" dir="t">
+              <a:rot lat="0" lon="0" rev="1200000"/>
+            </a:lightRig>
+          </a:scene3d>
+          <a:sp3d>
+            <a:bevelT w="63500" h="25400"/>
+          </a:sp3d>
+        </a:effectStyle>
+      </a:effectStyleLst>
+      <a:bgFillStyleLst>
+        <a:solidFill>
+          <a:schemeClr val="phClr"/>
+        </a:solidFill>
+        <a:gradFill rotWithShape="1">
+          <a:gsLst>
+            <a:gs pos="0">
+              <a:schemeClr val="phClr">
+                <a:tint val="40000"/>
+                <a:satMod val="350000"/>
+              </a:schemeClr>
+            </a:gs>
+            <a:gs pos="40000">
+              <a:schemeClr val="phClr">
+                <a:tint val="45000"/>
+                <a:shade val="99000"/>
+                <a:satMod val="350000"/>
+              </a:schemeClr>
+            </a:gs>
+            <a:gs pos="100000">
+              <a:schemeClr val="phClr">
+                <a:shade val="20000"/>
+                <a:satMod val="255000"/>
+              </a:schemeClr>
+            </a:gs>
+          </a:gsLst>
+          <a:path path="circle">
+            <a:fillToRect l="50000" t="-80000" r="50000" b="180000"/>
+          </a:path>
+        </a:gradFill>
+        <a:gradFill rotWithShape="1">
+          <a:gsLst>
+            <a:gs pos="0">
+              <a:schemeClr val="phClr">
+                <a:tint val="80000"/>
+                <a:satMod val="300000"/>
+              </a:schemeClr>
+            </a:gs>
+            <a:gs pos="100000">
+              <a:schemeClr val="phClr">
+                <a:shade val="30000"/>
+                <a:satMod val="200000"/>
+              </a:schemeClr>
+            </a:gs>
+          </a:gsLst>
+          <a:path path="circle">
+            <a:fillToRect l="50000" t="50000" r="50000" b="50000"/>
+          </a:path>
+        </a:gradFill>
+      </a:bgFillStyleLst>
+    </a:fmtScheme>
+  </a:themeElements>
+</a:theme>
+</file>
+
+<file path=ppt/theme/theme2.xml><?xml version="1.0" encoding="utf-8"?>
 <a:theme xmlns:a="http://schemas.openxmlformats.org/drawingml/2006/main" xmlns:r="http://schemas.openxmlformats.org/officeDocument/2006/relationships" name="POSS Slides Template">
   <a:themeElements>
     <a:clrScheme name="Simple Light">
@@ -39473,7 +43552,7 @@
 </a:theme>
 </file>
 
-<file path=ppt/theme/theme2.xml><?xml version="1.0" encoding="utf-8"?>
+<file path=ppt/theme/theme3.xml><?xml version="1.0" encoding="utf-8"?>
 <a:theme xmlns:a="http://schemas.openxmlformats.org/drawingml/2006/main" xmlns:r="http://schemas.openxmlformats.org/officeDocument/2006/relationships">
   <a:themeElements>
     <a:clrScheme name="Default">
